--- a/decks/day1/module-3-prompt-engineering.pptx
+++ b/decks/day1/module-3-prompt-engineering.pptx
@@ -3383,7 +3383,7 @@
             <a:off x="365760" y="1097280"/>
             <a:ext cx="8412480" cy="3474720"/>
           </a:xfrm>
-          <a:prstGeom prst="1">
+          <a:prstGeom prst="rect">
             <a:avLst/>
           </a:prstGeom>
           <a:solidFill>
@@ -3804,7 +3804,7 @@
             <a:off x="365760" y="1097280"/>
             <a:ext cx="8412480" cy="3200400"/>
           </a:xfrm>
-          <a:prstGeom prst="1">
+          <a:prstGeom prst="rect">
             <a:avLst/>
           </a:prstGeom>
           <a:solidFill>
@@ -4268,7 +4268,7 @@
             <a:off x="365760" y="4343400"/>
             <a:ext cx="8412480" cy="457200"/>
           </a:xfrm>
-          <a:prstGeom prst="1">
+          <a:prstGeom prst="rect">
             <a:avLst/>
           </a:prstGeom>
           <a:solidFill>

--- a/decks/day1/module-3-prompt-engineering.pptx
+++ b/decks/day1/module-3-prompt-engineering.pptx
@@ -1038,7 +1038,7 @@
           <a:p>
             <a:r>
               <a:rPr lang="en-US" dirty="0"/>
-              <a:t>For PromptAgent, the instructions live in the portal as a versioned artifact — set up in Module 6, seen again Part B of the lab.</a:t>
+              <a:t>For a Prompt agent, the instructions live in the portal as a versioned artifact — set up in Module 6, seen again in Part A of the lab.</a:t>
             </a:r>
             <a:endParaRPr lang="en-US" dirty="0"/>
           </a:p>

--- a/decks/day1/module-3-prompt-engineering.pptx
+++ b/decks/day1/module-3-prompt-engineering.pptx
@@ -510,7 +510,10 @@
           <a:p>
             <a:r>
               <a:rPr lang="en-US" dirty="0"/>
-              <a:t>This is the second-shortest module of Day 1. Don't over-invest — attendees will be doing prompting all week.</a:t>
+              <a:t>• This is the second-shortest module of Day 1 — 25 min
+• Don't over-invest — attendees will be doing prompting all week
+• Goal: acknowledge that prompting still matters, teach the disciplines that matter most, move on
+• If you run over 25 min, cut the anti-patterns slide</a:t>
             </a:r>
             <a:endParaRPr lang="en-US" dirty="0"/>
           </a:p>
@@ -598,7 +601,12 @@
           <a:p>
             <a:r>
               <a:rPr lang="en-US" dirty="0"/>
-              <a:t>Frame it: 'prompts are everywhere in agents.' The engineering discipline stays; the surface area changes.</a:t>
+              <a:t>• Frame the module in one line: 'agents don't kill prompt engineering, they concentrate it'
+• Prompts are now everywhere in your codebase, not just chat
+• System prompts / instructions
+• Tool descriptions (the model reads every docstring)
+• Structured output schemas (field names + docstrings are prompts too)
+• Discipline stays. Surface area gets bigger.</a:t>
             </a:r>
             <a:endParaRPr lang="en-US" dirty="0"/>
           </a:p>
@@ -686,7 +694,14 @@
           <a:p>
             <a:r>
               <a:rPr lang="en-US" dirty="0"/>
-              <a:t>Four labeled sections is a good default. Show real examples during content review if time permits.</a:t>
+              <a:t>• Four labeled sections is a strong default for a system prompt
+•   1. Role and scope
+•   2. How to respond (tone, length, format, 'I don't know')
+•   3. How to use tools (when, which, what to do with the result)
+•   4. Boundaries and safety (refusals, privacy, tenant scope)
+• Keep it under ~500 words
+• If longer, ask: 'should this be a tool or a knowledge source instead?'
+• If time permits, walk through the docs-assistant instructions from the lab</a:t>
             </a:r>
             <a:endParaRPr lang="en-US" dirty="0"/>
           </a:p>
@@ -774,7 +789,13 @@
           <a:p>
             <a:r>
               <a:rPr lang="en-US" dirty="0"/>
-              <a:t>This is where senior devs perk up. Ask if anyone has hit these before — usually a few nods.</a:t>
+              <a:t>• This is where senior devs perk up — they've hit these
+• Ask: 'anyone recognize one of these from a past project?' (usually a few nods)
+• Wall of rules: the more you list, the more the model ignores at least one
+• Example dump in system prompt: move to few-shot messages
+• Prompting the wrong layer: 'search the docs' is a tool call, not a prompt
+• Vague identity: every model already thinks it's helpful — be specific
+• Forgetting the audience: an engineer's prompt ≠ a store associate's prompt</a:t>
             </a:r>
             <a:endParaRPr lang="en-US" dirty="0"/>
           </a:p>
@@ -862,7 +883,12 @@
           <a:p>
             <a:r>
               <a:rPr lang="en-US" dirty="0"/>
-              <a:t>Both techniques appear again — structure is used every day; structured outputs deepens Day 3.</a:t>
+              <a:t>• Two techniques worth investing in this week:
+•   1. Structured instructions — labeled sections beat prose walls
+•   2. Explicit output contracts — tell the model exactly what shape
+• Structure lands every day this week
+• Structured outputs (typed models) deepens on Day 3
+• Best practice: define the shape, don't ask for it</a:t>
             </a:r>
             <a:endParaRPr lang="en-US" dirty="0"/>
           </a:p>
@@ -950,7 +976,12 @@
           <a:p>
             <a:r>
               <a:rPr lang="en-US" dirty="0"/>
-              <a:t>Push hard on 'change one thing.' Attendees will conflate multiple edits and be surprised the eval doesn't tell them what worked.</a:t>
+              <a:t>• The iteration loop is the most important slide in this module
+• 5 steps: eval set → run → read failures → change ONE thing → rerun
+• Push hard on 'change one thing'
+• Attendees will conflate multiple edits, then can't tell what worked
+• The habit starts today — Day 2 (retrieval eval) and Day 4 (workflow eval) reinforce
+• Show: 'don't tune prompts in your head'</a:t>
             </a:r>
             <a:endParaRPr lang="en-US" dirty="0"/>
           </a:p>
@@ -1038,7 +1069,11 @@
           <a:p>
             <a:r>
               <a:rPr lang="en-US" dirty="0"/>
-              <a:t>For a Prompt agent, the instructions live in the portal as a versioned artifact — set up in Module 6, seen again in Part A of the lab.</a:t>
+              <a:t>• For a client-side / Path C agent, instructions live in your code (this slide)
+• For a Prompt agent (Path A, Module 6), instructions live in the portal
+• For a Hosted agent (Path B), instructions live in your code but Foundry runs it
+• Either way: write instructions with structure, not prose
+• Attendees see all three variants in the lab today</a:t>
             </a:r>
             <a:endParaRPr lang="en-US" dirty="0"/>
           </a:p>
@@ -1126,7 +1161,12 @@
           <a:p>
             <a:r>
               <a:rPr lang="en-US" dirty="0"/>
-              <a:t>This is the point most attendees haven't internalized — MAF sends every tool docstring to the model. Docstring quality = model tool-use quality.</a:t>
+              <a:t>• THE point most attendees haven't internalized
+• MAF sends EVERY tool docstring to the model as part of the prompt
+• Bad docstring = model calls the wrong tool at the wrong time
+• Good docstring reads like a mini-prompt: what it does, when to use it, when NOT to use it
+• Show the create_ticket example — walk through what makes each line necessary
+• This is a Day 3 topic really, but planting it now pays off Day 2</a:t>
             </a:r>
             <a:endParaRPr lang="en-US" dirty="0"/>
           </a:p>

--- a/decks/day1/module-3-prompt-engineering.pptx
+++ b/decks/day1/module-3-prompt-engineering.pptx
@@ -14,9 +14,14 @@
     <p:sldId id="262" r:id="rId8"/>
     <p:sldId id="263" r:id="rId9"/>
     <p:sldId id="264" r:id="rId10"/>
+    <p:sldId id="265" r:id="rId11"/>
+    <p:sldId id="266" r:id="rId12"/>
+    <p:sldId id="267" r:id="rId13"/>
+    <p:sldId id="268" r:id="rId14"/>
+    <p:sldId id="269" r:id="rId15"/>
   </p:sldIdLst>
   <p:notesMasterIdLst>
-    <p:notesMasterId r:id="rId11"/>
+    <p:notesMasterId r:id="rId16"/>
   </p:notesMasterIdLst>
   <p:sldSz cx="9144000" cy="5143500"/>
   <p:notesSz cx="5143500" cy="9144000"/>
@@ -510,10 +515,11 @@
           <a:p>
             <a:r>
               <a:rPr lang="en-US" dirty="0"/>
-              <a:t>• This is the second-shortest module of Day 1 — 25 min
-• Don't over-invest — attendees will be doing prompting all week
-• Goal: acknowledge that prompting still matters, teach the disciplines that matter most, move on
-• If you run over 25 min, cut the anti-patterns slide</a:t>
+              <a:t>• Renamed 2026-08-19: was 'Prompt Engineering Fundamentals', now covers full context engineering
+• Time bumped from 25 min to 30 min to accommodate the four new context slides
+• Original prompt-engineering content is unchanged — 4 new slides inserted mid-module
+• Goal: acknowledge that prompting still matters, teach the disciplines that matter most, then broaden to everything in the context window
+• If you run over 30 min, cut the anti-patterns slide OR the tradeoffs slide (but keep the tools-vs-providers distinction)</a:t>
             </a:r>
             <a:endParaRPr lang="en-US" dirty="0"/>
           </a:p>
@@ -537,6 +543,468 @@
             <a:fld id="{F7021451-1387-4CA6-816F-3879F97B5CBC}" type="slidenum">
               <a:rPr lang="en-US"/>
               <a:t>1</a:t>
+            </a:fld>
+            <a:endParaRPr lang="en-US"/>
+          </a:p>
+        </p:txBody>
+      </p:sp>
+    </p:spTree>
+    <p:extLst>
+      <p:ext uri="{BB962C8B-B14F-4D97-AF65-F5344CB8AC3E}">
+        <p14:creationId xmlns:p14="http://schemas.microsoft.com/office/powerpoint/2010/main" val="1024086991"/>
+      </p:ext>
+    </p:extLst>
+  </p:cSld>
+  <p:clrMapOvr>
+    <a:masterClrMapping/>
+  </p:clrMapOvr>
+</p:notes>
+</file>
+
+<file path=ppt/notesSlides/notesSlide10.xml><?xml version="1.0" encoding="utf-8"?>
+<p:notes xmlns:a="http://schemas.openxmlformats.org/drawingml/2006/main" xmlns:r="http://schemas.openxmlformats.org/officeDocument/2006/relationships" xmlns:p="http://schemas.openxmlformats.org/presentationml/2006/main">
+  <p:cSld>
+    <p:spTree>
+      <p:nvGrpSpPr>
+        <p:cNvPr id="1" name=""/>
+        <p:cNvGrpSpPr/>
+        <p:nvPr/>
+      </p:nvGrpSpPr>
+      <p:grpSpPr>
+        <a:xfrm>
+          <a:off x="0" y="0"/>
+          <a:ext cx="0" cy="0"/>
+          <a:chOff x="0" y="0"/>
+          <a:chExt cx="0" cy="0"/>
+        </a:xfrm>
+      </p:grpSpPr>
+      <p:sp>
+        <p:nvSpPr>
+          <p:cNvPr id="2" name="Slide Image Placeholder 1"/>
+          <p:cNvSpPr>
+            <a:spLocks noGrp="1" noRot="1" noChangeAspect="1"/>
+          </p:cNvSpPr>
+          <p:nvPr>
+            <p:ph type="sldImg"/>
+          </p:nvPr>
+        </p:nvSpPr>
+        <p:spPr/>
+      </p:sp>
+      <p:sp>
+        <p:nvSpPr>
+          <p:cNvPr id="3" name="Notes Placeholder 2"/>
+          <p:cNvSpPr>
+            <a:spLocks noGrp="1"/>
+          </p:cNvSpPr>
+          <p:nvPr>
+            <p:ph type="body" idx="1"/>
+          </p:nvPr>
+        </p:nvSpPr>
+        <p:spPr/>
+        <p:txBody>
+          <a:bodyPr/>
+          <a:lstStyle/>
+          <a:p>
+            <a:r>
+              <a:rPr lang="en-US" dirty="0"/>
+              <a:t>• Direct from Learn's Considerations table
+• Read each row and give a real-world example:
+•   Token budget: 'I had a customer whose RAG returned 8K tokens per turn — the actual conversation didn't fit'
+•   Latency: 'if your provider hits a slow DB, every turn is now that slow'
+•   Relevance: 'more chunks isn't better — noise crowds out signal in the ranking'
+•   Staleness: 'user profile was cached at agent creation; six months later, still saying they lived in Boston'
+•   Composability: 'RAG returned the answer; history had a wrong claim from 3 turns ago; model believed history'
+• Compaction as escape valve — pointer to Day 3
+• This slide lands the 'engineering' word in context engineering</a:t>
+            </a:r>
+            <a:endParaRPr lang="en-US" dirty="0"/>
+          </a:p>
+        </p:txBody>
+      </p:sp>
+      <p:sp>
+        <p:nvSpPr>
+          <p:cNvPr id="4" name="Slide Number Placeholder 3"/>
+          <p:cNvSpPr>
+            <a:spLocks noGrp="1"/>
+          </p:cNvSpPr>
+          <p:nvPr>
+            <p:ph type="sldNum" sz="quarter" idx="10"/>
+          </p:nvPr>
+        </p:nvSpPr>
+        <p:spPr/>
+        <p:txBody>
+          <a:bodyPr/>
+          <a:lstStyle/>
+          <a:p>
+            <a:fld id="{F7021451-1387-4CA6-816F-3879F97B5CBC}" type="slidenum">
+              <a:rPr lang="en-US"/>
+              <a:t>10</a:t>
+            </a:fld>
+            <a:endParaRPr lang="en-US"/>
+          </a:p>
+        </p:txBody>
+      </p:sp>
+    </p:spTree>
+    <p:extLst>
+      <p:ext uri="{BB962C8B-B14F-4D97-AF65-F5344CB8AC3E}">
+        <p14:creationId xmlns:p14="http://schemas.microsoft.com/office/powerpoint/2010/main" val="1024086991"/>
+      </p:ext>
+    </p:extLst>
+  </p:cSld>
+  <p:clrMapOvr>
+    <a:masterClrMapping/>
+  </p:clrMapOvr>
+</p:notes>
+</file>
+
+<file path=ppt/notesSlides/notesSlide11.xml><?xml version="1.0" encoding="utf-8"?>
+<p:notes xmlns:a="http://schemas.openxmlformats.org/drawingml/2006/main" xmlns:r="http://schemas.openxmlformats.org/officeDocument/2006/relationships" xmlns:p="http://schemas.openxmlformats.org/presentationml/2006/main">
+  <p:cSld>
+    <p:spTree>
+      <p:nvGrpSpPr>
+        <p:cNvPr id="1" name=""/>
+        <p:cNvGrpSpPr/>
+        <p:nvPr/>
+      </p:nvGrpSpPr>
+      <p:grpSpPr>
+        <a:xfrm>
+          <a:off x="0" y="0"/>
+          <a:ext cx="0" cy="0"/>
+          <a:chOff x="0" y="0"/>
+          <a:chExt cx="0" cy="0"/>
+        </a:xfrm>
+      </p:grpSpPr>
+      <p:sp>
+        <p:nvSpPr>
+          <p:cNvPr id="2" name="Slide Image Placeholder 1"/>
+          <p:cNvSpPr>
+            <a:spLocks noGrp="1" noRot="1" noChangeAspect="1"/>
+          </p:cNvSpPr>
+          <p:nvPr>
+            <p:ph type="sldImg"/>
+          </p:nvPr>
+        </p:nvSpPr>
+        <p:spPr/>
+      </p:sp>
+      <p:sp>
+        <p:nvSpPr>
+          <p:cNvPr id="3" name="Notes Placeholder 2"/>
+          <p:cNvSpPr>
+            <a:spLocks noGrp="1"/>
+          </p:cNvSpPr>
+          <p:nvPr>
+            <p:ph type="body" idx="1"/>
+          </p:nvPr>
+        </p:nvSpPr>
+        <p:spPr/>
+        <p:txBody>
+          <a:bodyPr/>
+          <a:lstStyle/>
+          <a:p>
+            <a:r>
+              <a:rPr lang="en-US" dirty="0"/>
+              <a:t>• The iteration loop is the most important slide in this module
+• 5 steps: eval set → run → read failures → change ONE thing → rerun
+• Push hard on 'change one thing'
+• Attendees will conflate multiple edits, then can't tell what worked
+• The habit starts today — Day 2 (retrieval eval) and Day 4 (workflow eval) reinforce
+• Show: 'don't tune prompts in your head'</a:t>
+            </a:r>
+            <a:endParaRPr lang="en-US" dirty="0"/>
+          </a:p>
+        </p:txBody>
+      </p:sp>
+      <p:sp>
+        <p:nvSpPr>
+          <p:cNvPr id="4" name="Slide Number Placeholder 3"/>
+          <p:cNvSpPr>
+            <a:spLocks noGrp="1"/>
+          </p:cNvSpPr>
+          <p:nvPr>
+            <p:ph type="sldNum" sz="quarter" idx="10"/>
+          </p:nvPr>
+        </p:nvSpPr>
+        <p:spPr/>
+        <p:txBody>
+          <a:bodyPr/>
+          <a:lstStyle/>
+          <a:p>
+            <a:fld id="{F7021451-1387-4CA6-816F-3879F97B5CBC}" type="slidenum">
+              <a:rPr lang="en-US"/>
+              <a:t>11</a:t>
+            </a:fld>
+            <a:endParaRPr lang="en-US"/>
+          </a:p>
+        </p:txBody>
+      </p:sp>
+    </p:spTree>
+    <p:extLst>
+      <p:ext uri="{BB962C8B-B14F-4D97-AF65-F5344CB8AC3E}">
+        <p14:creationId xmlns:p14="http://schemas.microsoft.com/office/powerpoint/2010/main" val="1024086991"/>
+      </p:ext>
+    </p:extLst>
+  </p:cSld>
+  <p:clrMapOvr>
+    <a:masterClrMapping/>
+  </p:clrMapOvr>
+</p:notes>
+</file>
+
+<file path=ppt/notesSlides/notesSlide12.xml><?xml version="1.0" encoding="utf-8"?>
+<p:notes xmlns:a="http://schemas.openxmlformats.org/drawingml/2006/main" xmlns:r="http://schemas.openxmlformats.org/officeDocument/2006/relationships" xmlns:p="http://schemas.openxmlformats.org/presentationml/2006/main">
+  <p:cSld>
+    <p:spTree>
+      <p:nvGrpSpPr>
+        <p:cNvPr id="1" name=""/>
+        <p:cNvGrpSpPr/>
+        <p:nvPr/>
+      </p:nvGrpSpPr>
+      <p:grpSpPr>
+        <a:xfrm>
+          <a:off x="0" y="0"/>
+          <a:ext cx="0" cy="0"/>
+          <a:chOff x="0" y="0"/>
+          <a:chExt cx="0" cy="0"/>
+        </a:xfrm>
+      </p:grpSpPr>
+      <p:sp>
+        <p:nvSpPr>
+          <p:cNvPr id="2" name="Slide Image Placeholder 1"/>
+          <p:cNvSpPr>
+            <a:spLocks noGrp="1" noRot="1" noChangeAspect="1"/>
+          </p:cNvSpPr>
+          <p:nvPr>
+            <p:ph type="sldImg"/>
+          </p:nvPr>
+        </p:nvSpPr>
+        <p:spPr/>
+      </p:sp>
+      <p:sp>
+        <p:nvSpPr>
+          <p:cNvPr id="3" name="Notes Placeholder 2"/>
+          <p:cNvSpPr>
+            <a:spLocks noGrp="1"/>
+          </p:cNvSpPr>
+          <p:nvPr>
+            <p:ph type="body" idx="1"/>
+          </p:nvPr>
+        </p:nvSpPr>
+        <p:spPr/>
+        <p:txBody>
+          <a:bodyPr/>
+          <a:lstStyle/>
+          <a:p>
+            <a:r>
+              <a:rPr lang="en-US" dirty="0"/>
+              <a:t>• For a client-side / Path C agent, instructions live in your code (this slide)
+• For a Prompt agent (Path A, Module 6), instructions live in the portal
+• For a Hosted agent (Path B), instructions live in your code but Foundry runs it
+• Either way: write instructions with structure, not prose
+• Attendees see all three variants in the lab today</a:t>
+            </a:r>
+            <a:endParaRPr lang="en-US" dirty="0"/>
+          </a:p>
+        </p:txBody>
+      </p:sp>
+      <p:sp>
+        <p:nvSpPr>
+          <p:cNvPr id="4" name="Slide Number Placeholder 3"/>
+          <p:cNvSpPr>
+            <a:spLocks noGrp="1"/>
+          </p:cNvSpPr>
+          <p:nvPr>
+            <p:ph type="sldNum" sz="quarter" idx="10"/>
+          </p:nvPr>
+        </p:nvSpPr>
+        <p:spPr/>
+        <p:txBody>
+          <a:bodyPr/>
+          <a:lstStyle/>
+          <a:p>
+            <a:fld id="{F7021451-1387-4CA6-816F-3879F97B5CBC}" type="slidenum">
+              <a:rPr lang="en-US"/>
+              <a:t>12</a:t>
+            </a:fld>
+            <a:endParaRPr lang="en-US"/>
+          </a:p>
+        </p:txBody>
+      </p:sp>
+    </p:spTree>
+    <p:extLst>
+      <p:ext uri="{BB962C8B-B14F-4D97-AF65-F5344CB8AC3E}">
+        <p14:creationId xmlns:p14="http://schemas.microsoft.com/office/powerpoint/2010/main" val="1024086991"/>
+      </p:ext>
+    </p:extLst>
+  </p:cSld>
+  <p:clrMapOvr>
+    <a:masterClrMapping/>
+  </p:clrMapOvr>
+</p:notes>
+</file>
+
+<file path=ppt/notesSlides/notesSlide13.xml><?xml version="1.0" encoding="utf-8"?>
+<p:notes xmlns:a="http://schemas.openxmlformats.org/drawingml/2006/main" xmlns:r="http://schemas.openxmlformats.org/officeDocument/2006/relationships" xmlns:p="http://schemas.openxmlformats.org/presentationml/2006/main">
+  <p:cSld>
+    <p:spTree>
+      <p:nvGrpSpPr>
+        <p:cNvPr id="1" name=""/>
+        <p:cNvGrpSpPr/>
+        <p:nvPr/>
+      </p:nvGrpSpPr>
+      <p:grpSpPr>
+        <a:xfrm>
+          <a:off x="0" y="0"/>
+          <a:ext cx="0" cy="0"/>
+          <a:chOff x="0" y="0"/>
+          <a:chExt cx="0" cy="0"/>
+        </a:xfrm>
+      </p:grpSpPr>
+      <p:sp>
+        <p:nvSpPr>
+          <p:cNvPr id="2" name="Slide Image Placeholder 1"/>
+          <p:cNvSpPr>
+            <a:spLocks noGrp="1" noRot="1" noChangeAspect="1"/>
+          </p:cNvSpPr>
+          <p:nvPr>
+            <p:ph type="sldImg"/>
+          </p:nvPr>
+        </p:nvSpPr>
+        <p:spPr/>
+      </p:sp>
+      <p:sp>
+        <p:nvSpPr>
+          <p:cNvPr id="3" name="Notes Placeholder 2"/>
+          <p:cNvSpPr>
+            <a:spLocks noGrp="1"/>
+          </p:cNvSpPr>
+          <p:nvPr>
+            <p:ph type="body" idx="1"/>
+          </p:nvPr>
+        </p:nvSpPr>
+        <p:spPr/>
+        <p:txBody>
+          <a:bodyPr/>
+          <a:lstStyle/>
+          <a:p>
+            <a:r>
+              <a:rPr lang="en-US" dirty="0"/>
+              <a:t>• THE point most attendees haven't internalized
+• MAF sends EVERY tool docstring to the model as part of the prompt
+• Bad docstring = model calls the wrong tool at the wrong time
+• Good docstring reads like a mini-prompt: what it does, when to use it, when NOT to use it
+• Show the create_ticket example — walk through what makes each line necessary
+• This is a Day 3 topic really, but planting it now pays off Day 2</a:t>
+            </a:r>
+            <a:endParaRPr lang="en-US" dirty="0"/>
+          </a:p>
+        </p:txBody>
+      </p:sp>
+      <p:sp>
+        <p:nvSpPr>
+          <p:cNvPr id="4" name="Slide Number Placeholder 3"/>
+          <p:cNvSpPr>
+            <a:spLocks noGrp="1"/>
+          </p:cNvSpPr>
+          <p:nvPr>
+            <p:ph type="sldNum" sz="quarter" idx="10"/>
+          </p:nvPr>
+        </p:nvSpPr>
+        <p:spPr/>
+        <p:txBody>
+          <a:bodyPr/>
+          <a:lstStyle/>
+          <a:p>
+            <a:fld id="{F7021451-1387-4CA6-816F-3879F97B5CBC}" type="slidenum">
+              <a:rPr lang="en-US"/>
+              <a:t>13</a:t>
+            </a:fld>
+            <a:endParaRPr lang="en-US"/>
+          </a:p>
+        </p:txBody>
+      </p:sp>
+    </p:spTree>
+    <p:extLst>
+      <p:ext uri="{BB962C8B-B14F-4D97-AF65-F5344CB8AC3E}">
+        <p14:creationId xmlns:p14="http://schemas.microsoft.com/office/powerpoint/2010/main" val="1024086991"/>
+      </p:ext>
+    </p:extLst>
+  </p:cSld>
+  <p:clrMapOvr>
+    <a:masterClrMapping/>
+  </p:clrMapOvr>
+</p:notes>
+</file>
+
+<file path=ppt/notesSlides/notesSlide14.xml><?xml version="1.0" encoding="utf-8"?>
+<p:notes xmlns:a="http://schemas.openxmlformats.org/drawingml/2006/main" xmlns:r="http://schemas.openxmlformats.org/officeDocument/2006/relationships" xmlns:p="http://schemas.openxmlformats.org/presentationml/2006/main">
+  <p:cSld>
+    <p:spTree>
+      <p:nvGrpSpPr>
+        <p:cNvPr id="1" name=""/>
+        <p:cNvGrpSpPr/>
+        <p:nvPr/>
+      </p:nvGrpSpPr>
+      <p:grpSpPr>
+        <a:xfrm>
+          <a:off x="0" y="0"/>
+          <a:ext cx="0" cy="0"/>
+          <a:chOff x="0" y="0"/>
+          <a:chExt cx="0" cy="0"/>
+        </a:xfrm>
+      </p:grpSpPr>
+      <p:sp>
+        <p:nvSpPr>
+          <p:cNvPr id="2" name="Slide Image Placeholder 1"/>
+          <p:cNvSpPr>
+            <a:spLocks noGrp="1" noRot="1" noChangeAspect="1"/>
+          </p:cNvSpPr>
+          <p:nvPr>
+            <p:ph type="sldImg"/>
+          </p:nvPr>
+        </p:nvSpPr>
+        <p:spPr/>
+      </p:sp>
+      <p:sp>
+        <p:nvSpPr>
+          <p:cNvPr id="3" name="Notes Placeholder 2"/>
+          <p:cNvSpPr>
+            <a:spLocks noGrp="1"/>
+          </p:cNvSpPr>
+          <p:nvPr>
+            <p:ph type="body" idx="1"/>
+          </p:nvPr>
+        </p:nvSpPr>
+        <p:spPr/>
+        <p:txBody>
+          <a:bodyPr/>
+          <a:lstStyle/>
+          <a:p>
+            <a:r>
+              <a:rPr lang="en-US" dirty="0"/>
+              <a:t>Quick recap and move on. Prompt engineering is a discipline we practice all week, not one we teach once.</a:t>
+            </a:r>
+            <a:endParaRPr lang="en-US" dirty="0"/>
+          </a:p>
+        </p:txBody>
+      </p:sp>
+      <p:sp>
+        <p:nvSpPr>
+          <p:cNvPr id="4" name="Slide Number Placeholder 3"/>
+          <p:cNvSpPr>
+            <a:spLocks noGrp="1"/>
+          </p:cNvSpPr>
+          <p:nvPr>
+            <p:ph type="sldNum" sz="quarter" idx="10"/>
+          </p:nvPr>
+        </p:nvSpPr>
+        <p:spPr/>
+        <p:txBody>
+          <a:bodyPr/>
+          <a:lstStyle/>
+          <a:p>
+            <a:fld id="{F7021451-1387-4CA6-816F-3879F97B5CBC}" type="slidenum">
+              <a:rPr lang="en-US"/>
+              <a:t>14</a:t>
             </a:fld>
             <a:endParaRPr lang="en-US"/>
           </a:p>
@@ -886,7 +1354,7 @@
               <a:t>• Two techniques worth investing in this week:
 •   1. Structured instructions — labeled sections beat prose walls
 •   2. Explicit output contracts — tell the model exactly what shape
-• Structure lands every day this week
+• Structure lands through the rest of the workshop
 • Structured outputs (typed models) deepens on Day 3
 • Best practice: define the shape, don't ask for it</a:t>
             </a:r>
@@ -976,12 +1444,11 @@
           <a:p>
             <a:r>
               <a:rPr lang="en-US" dirty="0"/>
-              <a:t>• The iteration loop is the most important slide in this module
-• 5 steps: eval set → run → read failures → change ONE thing → rerun
-• Push hard on 'change one thing'
-• Attendees will conflate multiple edits, then can't tell what worked
-• The habit starts today — Day 2 (retrieval eval) and Day 4 (workflow eval) reinforce
-• Show: 'don't tune prompts in your head'</a:t>
+              <a:t>• NEW 2026-08-19: framing slide that broadens Module 3 beyond just system prompts
+• The system prompt is important — but it's ~10% of what the model sees
+• The rest — history, tool outputs, retrieved chunks, injected context — is where real engineering happens
+• Set up the tools-vs-providers slide next
+• Anchor: 'if you only tune the system prompt, you're missing 90% of the surface area'</a:t>
             </a:r>
             <a:endParaRPr lang="en-US" dirty="0"/>
           </a:p>
@@ -1069,11 +1536,12 @@
           <a:p>
             <a:r>
               <a:rPr lang="en-US" dirty="0"/>
-              <a:t>• For a client-side / Path C agent, instructions live in your code (this slide)
-• For a Prompt agent (Path A, Module 6), instructions live in the portal
-• For a Hosted agent (Path B), instructions live in your code but Foundry runs it
-• Either way: write instructions with structure, not prose
-• Attendees see all three variants in the lab today</a:t>
+              <a:t>• The killer distinction of this module — memorize this table
+• Tools are reactive; context providers are proactive
+• Both are legitimate; the choice is about pattern not preference
+• Common failure: teams stuff everything into system prompt because they don't know providers exist
+• Common failure #2: teams write a 'tool' for something that should be a provider — costs latency + inconsistency
+• The rule of thumb is a direct quote from the Learn doc</a:t>
             </a:r>
             <a:endParaRPr lang="en-US" dirty="0"/>
           </a:p>
@@ -1161,12 +1629,15 @@
           <a:p>
             <a:r>
               <a:rPr lang="en-US" dirty="0"/>
-              <a:t>• THE point most attendees haven't internalized
-• MAF sends EVERY tool docstring to the model as part of the prompt
-• Bad docstring = model calls the wrong tool at the wrong time
-• Good docstring reads like a mini-prompt: what it does, when to use it, when NOT to use it
-• Show the create_ticket example — walk through what makes each line necessary
-• This is a Day 3 topic really, but planting it now pays off Day 2</a:t>
+              <a:t>• Adapt Learn's ASCII lifecycle diagram to real shapes
+• Two hook points: BEFORE (inject) and AFTER (extract)
+• This is a critical mental model — walk through one full turn aloud:
+•   1. User asks 'what's the return policy?'
+•   2. BEFORE: history provider adds last 3 turns; RAG provider searches for 'return policy' chunks
+•   3. Model gets all of that + the question, generates 'You can return items within 30 days...'
+•   4. AFTER: history provider saves both messages; memory provider might note the user asked about returns
+• Register once; automatic every run
+• Day 3 and Day 5 build on this pattern — memory, tracing, evaluation all hook into these phases</a:t>
             </a:r>
             <a:endParaRPr lang="en-US" dirty="0"/>
           </a:p>
@@ -1254,7 +1725,15 @@
           <a:p>
             <a:r>
               <a:rPr lang="en-US" dirty="0"/>
-              <a:t>Quick recap and move on. Prompt engineering is a discipline we practice all week, not one we teach once.</a:t>
+              <a:t>• DEMO 3.2 · ~4 min
+• Split terminal, left = tool_path.py, right = provider_path.py
+• Same question: 'What is my most recent order?'
+• Left: model reasons, calls get_user_orders, ~2-4s round trip
+• Right: provider already injected the data — ~1-2s straight to answer
+• Read both elapsed times aloud from the printed output
+• Fallback: pre-recorded video at demos/day1/recordings/module3-demo2-tool-vs-provider.mp4
+• Payoff line: 'Always-needed data goes in a provider. Sometimes-needed data is a tool.'
+• PRE-DELIVERY CHECK: verify ChatContextProvider / before_invoke API against current Learn docs</a:t>
             </a:r>
             <a:endParaRPr lang="en-US" dirty="0"/>
           </a:p>
@@ -1660,7 +2139,7 @@
                 <a:ea typeface="Calibri" pitchFamily="34" charset="-122"/>
                 <a:cs typeface="Calibri" pitchFamily="34" charset="-120"/>
               </a:rPr>
-              <a:t>DAY 1 · MODULE 3 · 25 MIN</a:t>
+              <a:t>DAY 1 · MODULE 3 · 30 MIN</a:t>
             </a:r>
             <a:endParaRPr lang="en-US" sz="1000" dirty="0"/>
           </a:p>
@@ -1699,7 +2178,7 @@
                 <a:ea typeface="Calibri" pitchFamily="34" charset="-122"/>
                 <a:cs typeface="Calibri" pitchFamily="34" charset="-120"/>
               </a:rPr>
-              <a:t>Prompt Engineering Fundamentals</a:t>
+              <a:t>Prompts &amp; Context Engineering</a:t>
             </a:r>
             <a:endParaRPr lang="en-US" sz="4000" dirty="0"/>
           </a:p>
@@ -1738,7 +2217,7 @@
                 <a:ea typeface="Calibri" pitchFamily="34" charset="-122"/>
                 <a:cs typeface="Calibri" pitchFamily="34" charset="-120"/>
               </a:rPr>
-              <a:t>The parts that still matter when you're building agents</a:t>
+              <a:t>Everything that goes into the model on every turn</a:t>
             </a:r>
             <a:endParaRPr lang="en-US" sz="1800" dirty="0"/>
           </a:p>
@@ -1780,6 +2259,2456 @@
               <a:t>Building AI Apps and Agents</a:t>
             </a:r>
             <a:endParaRPr lang="en-US" sz="1000" dirty="0"/>
+          </a:p>
+        </p:txBody>
+      </p:sp>
+    </p:spTree>
+  </p:cSld>
+  <p:clrMapOvr>
+    <a:masterClrMapping/>
+  </p:clrMapOvr>
+</p:sld>
+</file>
+
+<file path=ppt/slides/slide10.xml><?xml version="1.0" encoding="utf-8"?>
+<p:sld xmlns:a="http://schemas.openxmlformats.org/drawingml/2006/main" xmlns:r="http://schemas.openxmlformats.org/officeDocument/2006/relationships" xmlns:p="http://schemas.openxmlformats.org/presentationml/2006/main">
+  <p:cSld name="Slide 10">
+    <p:bg>
+      <p:bgPr>
+        <a:solidFill>
+          <a:srgbClr val="FFFFFF"/>
+        </a:solidFill>
+      </p:bgPr>
+    </p:bg>
+    <p:spTree>
+      <p:nvGrpSpPr>
+        <p:cNvPr id="1" name=""/>
+        <p:cNvGrpSpPr/>
+        <p:nvPr/>
+      </p:nvGrpSpPr>
+      <p:grpSpPr>
+        <a:xfrm>
+          <a:off x="0" y="0"/>
+          <a:ext cx="0" cy="0"/>
+          <a:chOff x="0" y="0"/>
+          <a:chExt cx="0" cy="0"/>
+        </a:xfrm>
+      </p:grpSpPr>
+      <p:sp>
+        <p:nvSpPr>
+          <p:cNvPr id="2" name="Shape 0"/>
+          <p:cNvSpPr/>
+          <p:nvPr/>
+        </p:nvSpPr>
+        <p:spPr>
+          <a:xfrm>
+            <a:off x="0" y="0"/>
+            <a:ext cx="54864" cy="5143500"/>
+          </a:xfrm>
+          <a:prstGeom prst="rect">
+            <a:avLst/>
+          </a:prstGeom>
+          <a:solidFill>
+            <a:srgbClr val="1E2761"/>
+          </a:solidFill>
+          <a:ln/>
+        </p:spPr>
+      </p:sp>
+      <p:sp>
+        <p:nvSpPr>
+          <p:cNvPr id="3" name="Text 1"/>
+          <p:cNvSpPr/>
+          <p:nvPr/>
+        </p:nvSpPr>
+        <p:spPr>
+          <a:xfrm>
+            <a:off x="5669280" y="274320"/>
+            <a:ext cx="3291840" cy="274320"/>
+          </a:xfrm>
+          <a:prstGeom prst="rect">
+            <a:avLst/>
+          </a:prstGeom>
+          <a:noFill/>
+          <a:ln/>
+        </p:spPr>
+        <p:txBody>
+          <a:bodyPr wrap="square" lIns="0" tIns="0" rIns="0" bIns="0" rtlCol="0" anchor="ctr"/>
+          <a:lstStyle/>
+          <a:p>
+            <a:pPr algn="r" indent="0" marL="0">
+              <a:buNone/>
+            </a:pPr>
+            <a:r>
+              <a:rPr lang="en-US" sz="1000" dirty="0">
+                <a:solidFill>
+                  <a:srgbClr val="6B7280"/>
+                </a:solidFill>
+                <a:latin typeface="Calibri" pitchFamily="34" charset="0"/>
+                <a:ea typeface="Calibri" pitchFamily="34" charset="-122"/>
+                <a:cs typeface="Calibri" pitchFamily="34" charset="-120"/>
+              </a:rPr>
+              <a:t>Day 1 · Module 3</a:t>
+            </a:r>
+            <a:endParaRPr lang="en-US" sz="1000" dirty="0"/>
+          </a:p>
+        </p:txBody>
+      </p:sp>
+      <p:sp>
+        <p:nvSpPr>
+          <p:cNvPr id="4" name="Text 2"/>
+          <p:cNvSpPr/>
+          <p:nvPr/>
+        </p:nvSpPr>
+        <p:spPr>
+          <a:xfrm>
+            <a:off x="365760" y="320040"/>
+            <a:ext cx="6217920" cy="640080"/>
+          </a:xfrm>
+          <a:prstGeom prst="rect">
+            <a:avLst/>
+          </a:prstGeom>
+          <a:noFill/>
+          <a:ln/>
+        </p:spPr>
+        <p:txBody>
+          <a:bodyPr wrap="square" lIns="0" tIns="0" rIns="0" bIns="0" rtlCol="0" anchor="ctr"/>
+          <a:lstStyle/>
+          <a:p>
+            <a:pPr indent="0" marL="0">
+              <a:buNone/>
+            </a:pPr>
+            <a:r>
+              <a:rPr lang="en-US" sz="2800" b="1" dirty="0">
+                <a:solidFill>
+                  <a:srgbClr val="1E2761"/>
+                </a:solidFill>
+                <a:latin typeface="Calibri" pitchFamily="34" charset="0"/>
+                <a:ea typeface="Calibri" pitchFamily="34" charset="-122"/>
+                <a:cs typeface="Calibri" pitchFamily="34" charset="-120"/>
+              </a:rPr>
+              <a:t>The tradeoffs</a:t>
+            </a:r>
+            <a:endParaRPr lang="en-US" sz="2800" dirty="0"/>
+          </a:p>
+        </p:txBody>
+      </p:sp>
+      <p:sp>
+        <p:nvSpPr>
+          <p:cNvPr id="5" name="Text 3"/>
+          <p:cNvSpPr/>
+          <p:nvPr/>
+        </p:nvSpPr>
+        <p:spPr>
+          <a:xfrm>
+            <a:off x="365760" y="1097280"/>
+            <a:ext cx="8412480" cy="457200"/>
+          </a:xfrm>
+          <a:prstGeom prst="rect">
+            <a:avLst/>
+          </a:prstGeom>
+          <a:noFill/>
+          <a:ln/>
+        </p:spPr>
+        <p:txBody>
+          <a:bodyPr wrap="square" rtlCol="0" anchor="ctr"/>
+          <a:lstStyle/>
+          <a:p>
+            <a:pPr indent="0" marL="0">
+              <a:buNone/>
+            </a:pPr>
+            <a:r>
+              <a:rPr lang="en-US" sz="1400" dirty="0">
+                <a:solidFill>
+                  <a:srgbClr val="212121"/>
+                </a:solidFill>
+                <a:latin typeface="Calibri" pitchFamily="34" charset="0"/>
+                <a:ea typeface="Calibri" pitchFamily="34" charset="-122"/>
+                <a:cs typeface="Calibri" pitchFamily="34" charset="-120"/>
+              </a:rPr>
+              <a:t>More context isn't automatically better. Five things to design for:</a:t>
+            </a:r>
+            <a:endParaRPr lang="en-US" sz="1400" dirty="0"/>
+          </a:p>
+        </p:txBody>
+      </p:sp>
+      <p:graphicFrame>
+        <p:nvGraphicFramePr>
+          <p:cNvPr id="11" name="Table 0"/>
+          <p:cNvGraphicFramePr>
+            <a:graphicFrameLocks noGrp="1"/>
+          </p:cNvGraphicFramePr>
+          <p:nvPr>
+            <p:extLst>
+              <p:ext uri="{D42A27DB-BD31-4B8C-83A1-F6EECF244321}">
+                <p14:modId xmlns:p14="http://schemas.microsoft.com/office/powerpoint/2010/main" val="1579011935"/>
+              </p:ext>
+            </p:extLst>
+          </p:nvPr>
+        </p:nvGraphicFramePr>
+        <p:xfrm>
+          <a:off x="365760" y="1097280"/>
+          <a:ext cx="8412480" cy="914400"/>
+        </p:xfrm>
+        <a:graphic>
+          <a:graphicData uri="http://schemas.openxmlformats.org/drawingml/2006/table">
+            <a:tbl>
+              <a:tblPr/>
+              <a:tblGrid>
+                <a:gridCol w="2103120"/>
+                <a:gridCol w="6309360"/>
+              </a:tblGrid>
+              <a:tr h="548640">
+                <a:tc>
+                  <a:txBody>
+                    <a:bodyPr/>
+                    <a:lstStyle/>
+                    <a:p>
+                      <a:pPr indent="0" marL="0">
+                        <a:buNone/>
+                      </a:pPr>
+                      <a:r>
+                        <a:rPr lang="en-US" sz="1100" b="1" dirty="0">
+                          <a:solidFill>
+                            <a:srgbClr val="FFFFFF"/>
+                          </a:solidFill>
+                          <a:latin typeface="Calibri" pitchFamily="34" charset="0"/>
+                          <a:ea typeface="Calibri" pitchFamily="34" charset="-122"/>
+                          <a:cs typeface="Calibri" pitchFamily="34" charset="-120"/>
+                        </a:rPr>
+                        <a:t>Consideration</a:t>
+                      </a:r>
+                      <a:endParaRPr lang="en-US" sz="1100" dirty="0">
+                        <a:latin typeface="Calibri" charset="0"/>
+                        <a:ea typeface="Calibri" charset="0"/>
+                        <a:cs typeface="Calibri" charset="0"/>
+                      </a:endParaRPr>
+                    </a:p>
+                  </a:txBody>
+                  <a:tcPr marL="54864" marR="54864" marT="54864" marB="54864" anchor="ctr">
+                    <a:lnL w="6350" cap="flat" cmpd="sng" algn="ctr">
+                      <a:solidFill>
+                        <a:srgbClr val="D1D5DB"/>
+                      </a:solidFill>
+                      <a:prstDash val="solid"/>
+                      <a:round/>
+                      <a:headEnd type="none" w="med" len="med"/>
+                      <a:tailEnd type="none" w="med" len="med"/>
+                    </a:lnL>
+                    <a:lnR w="6350" cap="flat" cmpd="sng" algn="ctr">
+                      <a:solidFill>
+                        <a:srgbClr val="D1D5DB"/>
+                      </a:solidFill>
+                      <a:prstDash val="solid"/>
+                      <a:round/>
+                      <a:headEnd type="none" w="med" len="med"/>
+                      <a:tailEnd type="none" w="med" len="med"/>
+                    </a:lnR>
+                    <a:lnT w="6350" cap="flat" cmpd="sng" algn="ctr">
+                      <a:solidFill>
+                        <a:srgbClr val="D1D5DB"/>
+                      </a:solidFill>
+                      <a:prstDash val="solid"/>
+                      <a:round/>
+                      <a:headEnd type="none" w="med" len="med"/>
+                      <a:tailEnd type="none" w="med" len="med"/>
+                    </a:lnT>
+                    <a:lnB w="6350" cap="flat" cmpd="sng" algn="ctr">
+                      <a:solidFill>
+                        <a:srgbClr val="D1D5DB"/>
+                      </a:solidFill>
+                      <a:prstDash val="solid"/>
+                      <a:round/>
+                      <a:headEnd type="none" w="med" len="med"/>
+                      <a:tailEnd type="none" w="med" len="med"/>
+                    </a:lnB>
+                    <a:solidFill>
+                      <a:srgbClr val="1E2761"/>
+                    </a:solidFill>
+                  </a:tcPr>
+                </a:tc>
+                <a:tc>
+                  <a:txBody>
+                    <a:bodyPr/>
+                    <a:lstStyle/>
+                    <a:p>
+                      <a:pPr indent="0" marL="0">
+                        <a:buNone/>
+                      </a:pPr>
+                      <a:r>
+                        <a:rPr lang="en-US" sz="1100" b="1" dirty="0">
+                          <a:solidFill>
+                            <a:srgbClr val="FFFFFF"/>
+                          </a:solidFill>
+                          <a:latin typeface="Calibri" pitchFamily="34" charset="0"/>
+                          <a:ea typeface="Calibri" pitchFamily="34" charset="-122"/>
+                          <a:cs typeface="Calibri" pitchFamily="34" charset="-120"/>
+                        </a:rPr>
+                        <a:t>What can go wrong</a:t>
+                      </a:r>
+                      <a:endParaRPr lang="en-US" sz="1100" dirty="0">
+                        <a:latin typeface="Calibri" charset="0"/>
+                        <a:ea typeface="Calibri" charset="0"/>
+                        <a:cs typeface="Calibri" charset="0"/>
+                      </a:endParaRPr>
+                    </a:p>
+                  </a:txBody>
+                  <a:tcPr marL="54864" marR="54864" marT="54864" marB="54864" anchor="ctr">
+                    <a:lnL w="6350" cap="flat" cmpd="sng" algn="ctr">
+                      <a:solidFill>
+                        <a:srgbClr val="D1D5DB"/>
+                      </a:solidFill>
+                      <a:prstDash val="solid"/>
+                      <a:round/>
+                      <a:headEnd type="none" w="med" len="med"/>
+                      <a:tailEnd type="none" w="med" len="med"/>
+                    </a:lnL>
+                    <a:lnR w="6350" cap="flat" cmpd="sng" algn="ctr">
+                      <a:solidFill>
+                        <a:srgbClr val="D1D5DB"/>
+                      </a:solidFill>
+                      <a:prstDash val="solid"/>
+                      <a:round/>
+                      <a:headEnd type="none" w="med" len="med"/>
+                      <a:tailEnd type="none" w="med" len="med"/>
+                    </a:lnR>
+                    <a:lnT w="6350" cap="flat" cmpd="sng" algn="ctr">
+                      <a:solidFill>
+                        <a:srgbClr val="D1D5DB"/>
+                      </a:solidFill>
+                      <a:prstDash val="solid"/>
+                      <a:round/>
+                      <a:headEnd type="none" w="med" len="med"/>
+                      <a:tailEnd type="none" w="med" len="med"/>
+                    </a:lnT>
+                    <a:lnB w="6350" cap="flat" cmpd="sng" algn="ctr">
+                      <a:solidFill>
+                        <a:srgbClr val="D1D5DB"/>
+                      </a:solidFill>
+                      <a:prstDash val="solid"/>
+                      <a:round/>
+                      <a:headEnd type="none" w="med" len="med"/>
+                      <a:tailEnd type="none" w="med" len="med"/>
+                    </a:lnB>
+                    <a:solidFill>
+                      <a:srgbClr val="1E2761"/>
+                    </a:solidFill>
+                  </a:tcPr>
+                </a:tc>
+              </a:tr>
+              <a:tr h="548640">
+                <a:tc>
+                  <a:txBody>
+                    <a:bodyPr/>
+                    <a:lstStyle/>
+                    <a:p>
+                      <a:pPr indent="0" marL="0">
+                        <a:buNone/>
+                      </a:pPr>
+                      <a:r>
+                        <a:rPr lang="en-US" sz="1100" dirty="0">
+                          <a:solidFill>
+                            <a:srgbClr val="212121"/>
+                          </a:solidFill>
+                          <a:latin typeface="Calibri" pitchFamily="34" charset="0"/>
+                          <a:ea typeface="Calibri" pitchFamily="34" charset="-122"/>
+                          <a:cs typeface="Calibri" pitchFamily="34" charset="-120"/>
+                        </a:rPr>
+                        <a:t>Token budget</a:t>
+                      </a:r>
+                      <a:endParaRPr lang="en-US" sz="1100" dirty="0">
+                        <a:latin typeface="Calibri" charset="0"/>
+                        <a:ea typeface="Calibri" charset="0"/>
+                        <a:cs typeface="Calibri" charset="0"/>
+                      </a:endParaRPr>
+                    </a:p>
+                  </a:txBody>
+                  <a:tcPr marL="54864" marR="54864" marT="54864" marB="54864" anchor="ctr">
+                    <a:lnL w="6350" cap="flat" cmpd="sng" algn="ctr">
+                      <a:solidFill>
+                        <a:srgbClr val="D1D5DB"/>
+                      </a:solidFill>
+                      <a:prstDash val="solid"/>
+                      <a:round/>
+                      <a:headEnd type="none" w="med" len="med"/>
+                      <a:tailEnd type="none" w="med" len="med"/>
+                    </a:lnL>
+                    <a:lnR w="6350" cap="flat" cmpd="sng" algn="ctr">
+                      <a:solidFill>
+                        <a:srgbClr val="D1D5DB"/>
+                      </a:solidFill>
+                      <a:prstDash val="solid"/>
+                      <a:round/>
+                      <a:headEnd type="none" w="med" len="med"/>
+                      <a:tailEnd type="none" w="med" len="med"/>
+                    </a:lnR>
+                    <a:lnT w="6350" cap="flat" cmpd="sng" algn="ctr">
+                      <a:solidFill>
+                        <a:srgbClr val="D1D5DB"/>
+                      </a:solidFill>
+                      <a:prstDash val="solid"/>
+                      <a:round/>
+                      <a:headEnd type="none" w="med" len="med"/>
+                      <a:tailEnd type="none" w="med" len="med"/>
+                    </a:lnT>
+                    <a:lnB w="6350" cap="flat" cmpd="sng" algn="ctr">
+                      <a:solidFill>
+                        <a:srgbClr val="D1D5DB"/>
+                      </a:solidFill>
+                      <a:prstDash val="solid"/>
+                      <a:round/>
+                      <a:headEnd type="none" w="med" len="med"/>
+                      <a:tailEnd type="none" w="med" len="med"/>
+                    </a:lnB>
+                    <a:solidFill>
+                      <a:srgbClr val="FFFFFF"/>
+                    </a:solidFill>
+                  </a:tcPr>
+                </a:tc>
+                <a:tc>
+                  <a:txBody>
+                    <a:bodyPr/>
+                    <a:lstStyle/>
+                    <a:p>
+                      <a:pPr indent="0" marL="0">
+                        <a:buNone/>
+                      </a:pPr>
+                      <a:r>
+                        <a:rPr lang="en-US" sz="1100" dirty="0">
+                          <a:solidFill>
+                            <a:srgbClr val="212121"/>
+                          </a:solidFill>
+                          <a:latin typeface="Calibri" pitchFamily="34" charset="0"/>
+                          <a:ea typeface="Calibri" pitchFamily="34" charset="-122"/>
+                          <a:cs typeface="Calibri" pitchFamily="34" charset="-120"/>
+                        </a:rPr>
+                        <a:t>Injected context consumes tokens every turn. Unbounded → truncation, important info lost.</a:t>
+                      </a:r>
+                      <a:endParaRPr lang="en-US" sz="1100" dirty="0">
+                        <a:latin typeface="Calibri" charset="0"/>
+                        <a:ea typeface="Calibri" charset="0"/>
+                        <a:cs typeface="Calibri" charset="0"/>
+                      </a:endParaRPr>
+                    </a:p>
+                  </a:txBody>
+                  <a:tcPr marL="54864" marR="54864" marT="54864" marB="54864" anchor="ctr">
+                    <a:lnL w="6350" cap="flat" cmpd="sng" algn="ctr">
+                      <a:solidFill>
+                        <a:srgbClr val="D1D5DB"/>
+                      </a:solidFill>
+                      <a:prstDash val="solid"/>
+                      <a:round/>
+                      <a:headEnd type="none" w="med" len="med"/>
+                      <a:tailEnd type="none" w="med" len="med"/>
+                    </a:lnL>
+                    <a:lnR w="6350" cap="flat" cmpd="sng" algn="ctr">
+                      <a:solidFill>
+                        <a:srgbClr val="D1D5DB"/>
+                      </a:solidFill>
+                      <a:prstDash val="solid"/>
+                      <a:round/>
+                      <a:headEnd type="none" w="med" len="med"/>
+                      <a:tailEnd type="none" w="med" len="med"/>
+                    </a:lnR>
+                    <a:lnT w="6350" cap="flat" cmpd="sng" algn="ctr">
+                      <a:solidFill>
+                        <a:srgbClr val="D1D5DB"/>
+                      </a:solidFill>
+                      <a:prstDash val="solid"/>
+                      <a:round/>
+                      <a:headEnd type="none" w="med" len="med"/>
+                      <a:tailEnd type="none" w="med" len="med"/>
+                    </a:lnT>
+                    <a:lnB w="6350" cap="flat" cmpd="sng" algn="ctr">
+                      <a:solidFill>
+                        <a:srgbClr val="D1D5DB"/>
+                      </a:solidFill>
+                      <a:prstDash val="solid"/>
+                      <a:round/>
+                      <a:headEnd type="none" w="med" len="med"/>
+                      <a:tailEnd type="none" w="med" len="med"/>
+                    </a:lnB>
+                    <a:solidFill>
+                      <a:srgbClr val="FFFFFF"/>
+                    </a:solidFill>
+                  </a:tcPr>
+                </a:tc>
+              </a:tr>
+              <a:tr h="548640">
+                <a:tc>
+                  <a:txBody>
+                    <a:bodyPr/>
+                    <a:lstStyle/>
+                    <a:p>
+                      <a:pPr indent="0" marL="0">
+                        <a:buNone/>
+                      </a:pPr>
+                      <a:r>
+                        <a:rPr lang="en-US" sz="1100" dirty="0">
+                          <a:solidFill>
+                            <a:srgbClr val="212121"/>
+                          </a:solidFill>
+                          <a:latin typeface="Calibri" pitchFamily="34" charset="0"/>
+                          <a:ea typeface="Calibri" pitchFamily="34" charset="-122"/>
+                          <a:cs typeface="Calibri" pitchFamily="34" charset="-120"/>
+                        </a:rPr>
+                        <a:t>Retrieval latency</a:t>
+                      </a:r>
+                      <a:endParaRPr lang="en-US" sz="1100" dirty="0">
+                        <a:latin typeface="Calibri" charset="0"/>
+                        <a:ea typeface="Calibri" charset="0"/>
+                        <a:cs typeface="Calibri" charset="0"/>
+                      </a:endParaRPr>
+                    </a:p>
+                  </a:txBody>
+                  <a:tcPr marL="54864" marR="54864" marT="54864" marB="54864" anchor="ctr">
+                    <a:lnL w="6350" cap="flat" cmpd="sng" algn="ctr">
+                      <a:solidFill>
+                        <a:srgbClr val="D1D5DB"/>
+                      </a:solidFill>
+                      <a:prstDash val="solid"/>
+                      <a:round/>
+                      <a:headEnd type="none" w="med" len="med"/>
+                      <a:tailEnd type="none" w="med" len="med"/>
+                    </a:lnL>
+                    <a:lnR w="6350" cap="flat" cmpd="sng" algn="ctr">
+                      <a:solidFill>
+                        <a:srgbClr val="D1D5DB"/>
+                      </a:solidFill>
+                      <a:prstDash val="solid"/>
+                      <a:round/>
+                      <a:headEnd type="none" w="med" len="med"/>
+                      <a:tailEnd type="none" w="med" len="med"/>
+                    </a:lnR>
+                    <a:lnT w="6350" cap="flat" cmpd="sng" algn="ctr">
+                      <a:solidFill>
+                        <a:srgbClr val="D1D5DB"/>
+                      </a:solidFill>
+                      <a:prstDash val="solid"/>
+                      <a:round/>
+                      <a:headEnd type="none" w="med" len="med"/>
+                      <a:tailEnd type="none" w="med" len="med"/>
+                    </a:lnT>
+                    <a:lnB w="6350" cap="flat" cmpd="sng" algn="ctr">
+                      <a:solidFill>
+                        <a:srgbClr val="D1D5DB"/>
+                      </a:solidFill>
+                      <a:prstDash val="solid"/>
+                      <a:round/>
+                      <a:headEnd type="none" w="med" len="med"/>
+                      <a:tailEnd type="none" w="med" len="med"/>
+                    </a:lnB>
+                    <a:solidFill>
+                      <a:srgbClr val="F3F4F6"/>
+                    </a:solidFill>
+                  </a:tcPr>
+                </a:tc>
+                <a:tc>
+                  <a:txBody>
+                    <a:bodyPr/>
+                    <a:lstStyle/>
+                    <a:p>
+                      <a:pPr indent="0" marL="0">
+                        <a:buNone/>
+                      </a:pPr>
+                      <a:r>
+                        <a:rPr lang="en-US" sz="1100" dirty="0">
+                          <a:solidFill>
+                            <a:srgbClr val="212121"/>
+                          </a:solidFill>
+                          <a:latin typeface="Calibri" pitchFamily="34" charset="0"/>
+                          <a:ea typeface="Calibri" pitchFamily="34" charset="-122"/>
+                          <a:cs typeface="Calibri" pitchFamily="34" charset="-120"/>
+                        </a:rPr>
+                        <a:t>Providers hitting DBs / search / APIs add latency to every call. Cache, pool, async.</a:t>
+                      </a:r>
+                      <a:endParaRPr lang="en-US" sz="1100" dirty="0">
+                        <a:latin typeface="Calibri" charset="0"/>
+                        <a:ea typeface="Calibri" charset="0"/>
+                        <a:cs typeface="Calibri" charset="0"/>
+                      </a:endParaRPr>
+                    </a:p>
+                  </a:txBody>
+                  <a:tcPr marL="54864" marR="54864" marT="54864" marB="54864" anchor="ctr">
+                    <a:lnL w="6350" cap="flat" cmpd="sng" algn="ctr">
+                      <a:solidFill>
+                        <a:srgbClr val="D1D5DB"/>
+                      </a:solidFill>
+                      <a:prstDash val="solid"/>
+                      <a:round/>
+                      <a:headEnd type="none" w="med" len="med"/>
+                      <a:tailEnd type="none" w="med" len="med"/>
+                    </a:lnL>
+                    <a:lnR w="6350" cap="flat" cmpd="sng" algn="ctr">
+                      <a:solidFill>
+                        <a:srgbClr val="D1D5DB"/>
+                      </a:solidFill>
+                      <a:prstDash val="solid"/>
+                      <a:round/>
+                      <a:headEnd type="none" w="med" len="med"/>
+                      <a:tailEnd type="none" w="med" len="med"/>
+                    </a:lnR>
+                    <a:lnT w="6350" cap="flat" cmpd="sng" algn="ctr">
+                      <a:solidFill>
+                        <a:srgbClr val="D1D5DB"/>
+                      </a:solidFill>
+                      <a:prstDash val="solid"/>
+                      <a:round/>
+                      <a:headEnd type="none" w="med" len="med"/>
+                      <a:tailEnd type="none" w="med" len="med"/>
+                    </a:lnT>
+                    <a:lnB w="6350" cap="flat" cmpd="sng" algn="ctr">
+                      <a:solidFill>
+                        <a:srgbClr val="D1D5DB"/>
+                      </a:solidFill>
+                      <a:prstDash val="solid"/>
+                      <a:round/>
+                      <a:headEnd type="none" w="med" len="med"/>
+                      <a:tailEnd type="none" w="med" len="med"/>
+                    </a:lnB>
+                    <a:solidFill>
+                      <a:srgbClr val="F3F4F6"/>
+                    </a:solidFill>
+                  </a:tcPr>
+                </a:tc>
+              </a:tr>
+              <a:tr h="548640">
+                <a:tc>
+                  <a:txBody>
+                    <a:bodyPr/>
+                    <a:lstStyle/>
+                    <a:p>
+                      <a:pPr indent="0" marL="0">
+                        <a:buNone/>
+                      </a:pPr>
+                      <a:r>
+                        <a:rPr lang="en-US" sz="1100" dirty="0">
+                          <a:solidFill>
+                            <a:srgbClr val="212121"/>
+                          </a:solidFill>
+                          <a:latin typeface="Calibri" pitchFamily="34" charset="0"/>
+                          <a:ea typeface="Calibri" pitchFamily="34" charset="-122"/>
+                          <a:cs typeface="Calibri" pitchFamily="34" charset="-120"/>
+                        </a:rPr>
+                        <a:t>Relevance</a:t>
+                      </a:r>
+                      <a:endParaRPr lang="en-US" sz="1100" dirty="0">
+                        <a:latin typeface="Calibri" charset="0"/>
+                        <a:ea typeface="Calibri" charset="0"/>
+                        <a:cs typeface="Calibri" charset="0"/>
+                      </a:endParaRPr>
+                    </a:p>
+                  </a:txBody>
+                  <a:tcPr marL="54864" marR="54864" marT="54864" marB="54864" anchor="ctr">
+                    <a:lnL w="6350" cap="flat" cmpd="sng" algn="ctr">
+                      <a:solidFill>
+                        <a:srgbClr val="D1D5DB"/>
+                      </a:solidFill>
+                      <a:prstDash val="solid"/>
+                      <a:round/>
+                      <a:headEnd type="none" w="med" len="med"/>
+                      <a:tailEnd type="none" w="med" len="med"/>
+                    </a:lnL>
+                    <a:lnR w="6350" cap="flat" cmpd="sng" algn="ctr">
+                      <a:solidFill>
+                        <a:srgbClr val="D1D5DB"/>
+                      </a:solidFill>
+                      <a:prstDash val="solid"/>
+                      <a:round/>
+                      <a:headEnd type="none" w="med" len="med"/>
+                      <a:tailEnd type="none" w="med" len="med"/>
+                    </a:lnR>
+                    <a:lnT w="6350" cap="flat" cmpd="sng" algn="ctr">
+                      <a:solidFill>
+                        <a:srgbClr val="D1D5DB"/>
+                      </a:solidFill>
+                      <a:prstDash val="solid"/>
+                      <a:round/>
+                      <a:headEnd type="none" w="med" len="med"/>
+                      <a:tailEnd type="none" w="med" len="med"/>
+                    </a:lnT>
+                    <a:lnB w="6350" cap="flat" cmpd="sng" algn="ctr">
+                      <a:solidFill>
+                        <a:srgbClr val="D1D5DB"/>
+                      </a:solidFill>
+                      <a:prstDash val="solid"/>
+                      <a:round/>
+                      <a:headEnd type="none" w="med" len="med"/>
+                      <a:tailEnd type="none" w="med" len="med"/>
+                    </a:lnB>
+                    <a:solidFill>
+                      <a:srgbClr val="FFFFFF"/>
+                    </a:solidFill>
+                  </a:tcPr>
+                </a:tc>
+                <a:tc>
+                  <a:txBody>
+                    <a:bodyPr/>
+                    <a:lstStyle/>
+                    <a:p>
+                      <a:pPr indent="0" marL="0">
+                        <a:buNone/>
+                      </a:pPr>
+                      <a:r>
+                        <a:rPr lang="en-US" sz="1100" dirty="0">
+                          <a:solidFill>
+                            <a:srgbClr val="212121"/>
+                          </a:solidFill>
+                          <a:latin typeface="Calibri" pitchFamily="34" charset="0"/>
+                          <a:ea typeface="Calibri" pitchFamily="34" charset="-122"/>
+                          <a:cs typeface="Calibri" pitchFamily="34" charset="-120"/>
+                        </a:rPr>
+                        <a:t>Irrelevant context doesn't just waste tokens — it degrades responses by diluting signal.</a:t>
+                      </a:r>
+                      <a:endParaRPr lang="en-US" sz="1100" dirty="0">
+                        <a:latin typeface="Calibri" charset="0"/>
+                        <a:ea typeface="Calibri" charset="0"/>
+                        <a:cs typeface="Calibri" charset="0"/>
+                      </a:endParaRPr>
+                    </a:p>
+                  </a:txBody>
+                  <a:tcPr marL="54864" marR="54864" marT="54864" marB="54864" anchor="ctr">
+                    <a:lnL w="6350" cap="flat" cmpd="sng" algn="ctr">
+                      <a:solidFill>
+                        <a:srgbClr val="D1D5DB"/>
+                      </a:solidFill>
+                      <a:prstDash val="solid"/>
+                      <a:round/>
+                      <a:headEnd type="none" w="med" len="med"/>
+                      <a:tailEnd type="none" w="med" len="med"/>
+                    </a:lnL>
+                    <a:lnR w="6350" cap="flat" cmpd="sng" algn="ctr">
+                      <a:solidFill>
+                        <a:srgbClr val="D1D5DB"/>
+                      </a:solidFill>
+                      <a:prstDash val="solid"/>
+                      <a:round/>
+                      <a:headEnd type="none" w="med" len="med"/>
+                      <a:tailEnd type="none" w="med" len="med"/>
+                    </a:lnR>
+                    <a:lnT w="6350" cap="flat" cmpd="sng" algn="ctr">
+                      <a:solidFill>
+                        <a:srgbClr val="D1D5DB"/>
+                      </a:solidFill>
+                      <a:prstDash val="solid"/>
+                      <a:round/>
+                      <a:headEnd type="none" w="med" len="med"/>
+                      <a:tailEnd type="none" w="med" len="med"/>
+                    </a:lnT>
+                    <a:lnB w="6350" cap="flat" cmpd="sng" algn="ctr">
+                      <a:solidFill>
+                        <a:srgbClr val="D1D5DB"/>
+                      </a:solidFill>
+                      <a:prstDash val="solid"/>
+                      <a:round/>
+                      <a:headEnd type="none" w="med" len="med"/>
+                      <a:tailEnd type="none" w="med" len="med"/>
+                    </a:lnB>
+                    <a:solidFill>
+                      <a:srgbClr val="FFFFFF"/>
+                    </a:solidFill>
+                  </a:tcPr>
+                </a:tc>
+              </a:tr>
+              <a:tr h="548640">
+                <a:tc>
+                  <a:txBody>
+                    <a:bodyPr/>
+                    <a:lstStyle/>
+                    <a:p>
+                      <a:pPr indent="0" marL="0">
+                        <a:buNone/>
+                      </a:pPr>
+                      <a:r>
+                        <a:rPr lang="en-US" sz="1100" dirty="0">
+                          <a:solidFill>
+                            <a:srgbClr val="212121"/>
+                          </a:solidFill>
+                          <a:latin typeface="Calibri" pitchFamily="34" charset="0"/>
+                          <a:ea typeface="Calibri" pitchFamily="34" charset="-122"/>
+                          <a:cs typeface="Calibri" pitchFamily="34" charset="-120"/>
+                        </a:rPr>
+                        <a:t>Staleness</a:t>
+                      </a:r>
+                      <a:endParaRPr lang="en-US" sz="1100" dirty="0">
+                        <a:latin typeface="Calibri" charset="0"/>
+                        <a:ea typeface="Calibri" charset="0"/>
+                        <a:cs typeface="Calibri" charset="0"/>
+                      </a:endParaRPr>
+                    </a:p>
+                  </a:txBody>
+                  <a:tcPr marL="54864" marR="54864" marT="54864" marB="54864" anchor="ctr">
+                    <a:lnL w="6350" cap="flat" cmpd="sng" algn="ctr">
+                      <a:solidFill>
+                        <a:srgbClr val="D1D5DB"/>
+                      </a:solidFill>
+                      <a:prstDash val="solid"/>
+                      <a:round/>
+                      <a:headEnd type="none" w="med" len="med"/>
+                      <a:tailEnd type="none" w="med" len="med"/>
+                    </a:lnL>
+                    <a:lnR w="6350" cap="flat" cmpd="sng" algn="ctr">
+                      <a:solidFill>
+                        <a:srgbClr val="D1D5DB"/>
+                      </a:solidFill>
+                      <a:prstDash val="solid"/>
+                      <a:round/>
+                      <a:headEnd type="none" w="med" len="med"/>
+                      <a:tailEnd type="none" w="med" len="med"/>
+                    </a:lnR>
+                    <a:lnT w="6350" cap="flat" cmpd="sng" algn="ctr">
+                      <a:solidFill>
+                        <a:srgbClr val="D1D5DB"/>
+                      </a:solidFill>
+                      <a:prstDash val="solid"/>
+                      <a:round/>
+                      <a:headEnd type="none" w="med" len="med"/>
+                      <a:tailEnd type="none" w="med" len="med"/>
+                    </a:lnT>
+                    <a:lnB w="6350" cap="flat" cmpd="sng" algn="ctr">
+                      <a:solidFill>
+                        <a:srgbClr val="D1D5DB"/>
+                      </a:solidFill>
+                      <a:prstDash val="solid"/>
+                      <a:round/>
+                      <a:headEnd type="none" w="med" len="med"/>
+                      <a:tailEnd type="none" w="med" len="med"/>
+                    </a:lnB>
+                    <a:solidFill>
+                      <a:srgbClr val="F3F4F6"/>
+                    </a:solidFill>
+                  </a:tcPr>
+                </a:tc>
+                <a:tc>
+                  <a:txBody>
+                    <a:bodyPr/>
+                    <a:lstStyle/>
+                    <a:p>
+                      <a:pPr indent="0" marL="0">
+                        <a:buNone/>
+                      </a:pPr>
+                      <a:r>
+                        <a:rPr lang="en-US" sz="1100" dirty="0">
+                          <a:solidFill>
+                            <a:srgbClr val="212121"/>
+                          </a:solidFill>
+                          <a:latin typeface="Calibri" pitchFamily="34" charset="0"/>
+                          <a:ea typeface="Calibri" pitchFamily="34" charset="-122"/>
+                          <a:cs typeface="Calibri" pitchFamily="34" charset="-120"/>
+                        </a:rPr>
+                        <a:t>Cached or preloaded context goes stale. Design refresh cadence deliberately.</a:t>
+                      </a:r>
+                      <a:endParaRPr lang="en-US" sz="1100" dirty="0">
+                        <a:latin typeface="Calibri" charset="0"/>
+                        <a:ea typeface="Calibri" charset="0"/>
+                        <a:cs typeface="Calibri" charset="0"/>
+                      </a:endParaRPr>
+                    </a:p>
+                  </a:txBody>
+                  <a:tcPr marL="54864" marR="54864" marT="54864" marB="54864" anchor="ctr">
+                    <a:lnL w="6350" cap="flat" cmpd="sng" algn="ctr">
+                      <a:solidFill>
+                        <a:srgbClr val="D1D5DB"/>
+                      </a:solidFill>
+                      <a:prstDash val="solid"/>
+                      <a:round/>
+                      <a:headEnd type="none" w="med" len="med"/>
+                      <a:tailEnd type="none" w="med" len="med"/>
+                    </a:lnL>
+                    <a:lnR w="6350" cap="flat" cmpd="sng" algn="ctr">
+                      <a:solidFill>
+                        <a:srgbClr val="D1D5DB"/>
+                      </a:solidFill>
+                      <a:prstDash val="solid"/>
+                      <a:round/>
+                      <a:headEnd type="none" w="med" len="med"/>
+                      <a:tailEnd type="none" w="med" len="med"/>
+                    </a:lnR>
+                    <a:lnT w="6350" cap="flat" cmpd="sng" algn="ctr">
+                      <a:solidFill>
+                        <a:srgbClr val="D1D5DB"/>
+                      </a:solidFill>
+                      <a:prstDash val="solid"/>
+                      <a:round/>
+                      <a:headEnd type="none" w="med" len="med"/>
+                      <a:tailEnd type="none" w="med" len="med"/>
+                    </a:lnT>
+                    <a:lnB w="6350" cap="flat" cmpd="sng" algn="ctr">
+                      <a:solidFill>
+                        <a:srgbClr val="D1D5DB"/>
+                      </a:solidFill>
+                      <a:prstDash val="solid"/>
+                      <a:round/>
+                      <a:headEnd type="none" w="med" len="med"/>
+                      <a:tailEnd type="none" w="med" len="med"/>
+                    </a:lnB>
+                    <a:solidFill>
+                      <a:srgbClr val="F3F4F6"/>
+                    </a:solidFill>
+                  </a:tcPr>
+                </a:tc>
+              </a:tr>
+              <a:tr h="548640">
+                <a:tc>
+                  <a:txBody>
+                    <a:bodyPr/>
+                    <a:lstStyle/>
+                    <a:p>
+                      <a:pPr indent="0" marL="0">
+                        <a:buNone/>
+                      </a:pPr>
+                      <a:r>
+                        <a:rPr lang="en-US" sz="1100" dirty="0">
+                          <a:solidFill>
+                            <a:srgbClr val="212121"/>
+                          </a:solidFill>
+                          <a:latin typeface="Calibri" pitchFamily="34" charset="0"/>
+                          <a:ea typeface="Calibri" pitchFamily="34" charset="-122"/>
+                          <a:cs typeface="Calibri" pitchFamily="34" charset="-120"/>
+                        </a:rPr>
+                        <a:t>Composability</a:t>
+                      </a:r>
+                      <a:endParaRPr lang="en-US" sz="1100" dirty="0">
+                        <a:latin typeface="Calibri" charset="0"/>
+                        <a:ea typeface="Calibri" charset="0"/>
+                        <a:cs typeface="Calibri" charset="0"/>
+                      </a:endParaRPr>
+                    </a:p>
+                  </a:txBody>
+                  <a:tcPr marL="54864" marR="54864" marT="54864" marB="54864" anchor="ctr">
+                    <a:lnL w="6350" cap="flat" cmpd="sng" algn="ctr">
+                      <a:solidFill>
+                        <a:srgbClr val="D1D5DB"/>
+                      </a:solidFill>
+                      <a:prstDash val="solid"/>
+                      <a:round/>
+                      <a:headEnd type="none" w="med" len="med"/>
+                      <a:tailEnd type="none" w="med" len="med"/>
+                    </a:lnL>
+                    <a:lnR w="6350" cap="flat" cmpd="sng" algn="ctr">
+                      <a:solidFill>
+                        <a:srgbClr val="D1D5DB"/>
+                      </a:solidFill>
+                      <a:prstDash val="solid"/>
+                      <a:round/>
+                      <a:headEnd type="none" w="med" len="med"/>
+                      <a:tailEnd type="none" w="med" len="med"/>
+                    </a:lnR>
+                    <a:lnT w="6350" cap="flat" cmpd="sng" algn="ctr">
+                      <a:solidFill>
+                        <a:srgbClr val="D1D5DB"/>
+                      </a:solidFill>
+                      <a:prstDash val="solid"/>
+                      <a:round/>
+                      <a:headEnd type="none" w="med" len="med"/>
+                      <a:tailEnd type="none" w="med" len="med"/>
+                    </a:lnT>
+                    <a:lnB w="6350" cap="flat" cmpd="sng" algn="ctr">
+                      <a:solidFill>
+                        <a:srgbClr val="D1D5DB"/>
+                      </a:solidFill>
+                      <a:prstDash val="solid"/>
+                      <a:round/>
+                      <a:headEnd type="none" w="med" len="med"/>
+                      <a:tailEnd type="none" w="med" len="med"/>
+                    </a:lnB>
+                    <a:solidFill>
+                      <a:srgbClr val="FFFFFF"/>
+                    </a:solidFill>
+                  </a:tcPr>
+                </a:tc>
+                <a:tc>
+                  <a:txBody>
+                    <a:bodyPr/>
+                    <a:lstStyle/>
+                    <a:p>
+                      <a:pPr indent="0" marL="0">
+                        <a:buNone/>
+                      </a:pPr>
+                      <a:r>
+                        <a:rPr lang="en-US" sz="1100" dirty="0">
+                          <a:solidFill>
+                            <a:srgbClr val="212121"/>
+                          </a:solidFill>
+                          <a:latin typeface="Calibri" pitchFamily="34" charset="0"/>
+                          <a:ea typeface="Calibri" pitchFamily="34" charset="-122"/>
+                          <a:cs typeface="Calibri" pitchFamily="34" charset="-120"/>
+                        </a:rPr>
+                        <a:t>Multiple providers writing the same window interact unexpectedly. Test them together.</a:t>
+                      </a:r>
+                      <a:endParaRPr lang="en-US" sz="1100" dirty="0">
+                        <a:latin typeface="Calibri" charset="0"/>
+                        <a:ea typeface="Calibri" charset="0"/>
+                        <a:cs typeface="Calibri" charset="0"/>
+                      </a:endParaRPr>
+                    </a:p>
+                  </a:txBody>
+                  <a:tcPr marL="54864" marR="54864" marT="54864" marB="54864" anchor="ctr">
+                    <a:lnL w="6350" cap="flat" cmpd="sng" algn="ctr">
+                      <a:solidFill>
+                        <a:srgbClr val="D1D5DB"/>
+                      </a:solidFill>
+                      <a:prstDash val="solid"/>
+                      <a:round/>
+                      <a:headEnd type="none" w="med" len="med"/>
+                      <a:tailEnd type="none" w="med" len="med"/>
+                    </a:lnL>
+                    <a:lnR w="6350" cap="flat" cmpd="sng" algn="ctr">
+                      <a:solidFill>
+                        <a:srgbClr val="D1D5DB"/>
+                      </a:solidFill>
+                      <a:prstDash val="solid"/>
+                      <a:round/>
+                      <a:headEnd type="none" w="med" len="med"/>
+                      <a:tailEnd type="none" w="med" len="med"/>
+                    </a:lnR>
+                    <a:lnT w="6350" cap="flat" cmpd="sng" algn="ctr">
+                      <a:solidFill>
+                        <a:srgbClr val="D1D5DB"/>
+                      </a:solidFill>
+                      <a:prstDash val="solid"/>
+                      <a:round/>
+                      <a:headEnd type="none" w="med" len="med"/>
+                      <a:tailEnd type="none" w="med" len="med"/>
+                    </a:lnT>
+                    <a:lnB w="6350" cap="flat" cmpd="sng" algn="ctr">
+                      <a:solidFill>
+                        <a:srgbClr val="D1D5DB"/>
+                      </a:solidFill>
+                      <a:prstDash val="solid"/>
+                      <a:round/>
+                      <a:headEnd type="none" w="med" len="med"/>
+                      <a:tailEnd type="none" w="med" len="med"/>
+                    </a:lnB>
+                    <a:solidFill>
+                      <a:srgbClr val="FFFFFF"/>
+                    </a:solidFill>
+                  </a:tcPr>
+                </a:tc>
+              </a:tr>
+            </a:tbl>
+          </a:graphicData>
+        </a:graphic>
+      </p:graphicFrame>
+      <p:sp>
+        <p:nvSpPr>
+          <p:cNvPr id="7" name="Text 4"/>
+          <p:cNvSpPr/>
+          <p:nvPr/>
+        </p:nvSpPr>
+        <p:spPr>
+          <a:xfrm>
+            <a:off x="365760" y="4892040"/>
+            <a:ext cx="8412480" cy="365760"/>
+          </a:xfrm>
+          <a:prstGeom prst="rect">
+            <a:avLst/>
+          </a:prstGeom>
+          <a:noFill/>
+          <a:ln/>
+        </p:spPr>
+        <p:txBody>
+          <a:bodyPr wrap="square" rtlCol="0" anchor="ctr"/>
+          <a:lstStyle/>
+          <a:p>
+            <a:pPr indent="0" marL="0">
+              <a:buNone/>
+            </a:pPr>
+            <a:r>
+              <a:rPr lang="en-US" sz="1200" i="1" dirty="0">
+                <a:solidFill>
+                  <a:srgbClr val="6B7280"/>
+                </a:solidFill>
+                <a:latin typeface="Calibri" pitchFamily="34" charset="0"/>
+                <a:ea typeface="Calibri" pitchFamily="34" charset="-122"/>
+                <a:cs typeface="Calibri" pitchFamily="34" charset="-120"/>
+              </a:rPr>
+              <a:t>Compaction (summarizing older history) is the escape valve when context grows. Day 3 memory module covers it.</a:t>
+            </a:r>
+            <a:endParaRPr lang="en-US" sz="1200" dirty="0"/>
+          </a:p>
+        </p:txBody>
+      </p:sp>
+    </p:spTree>
+  </p:cSld>
+  <p:clrMapOvr>
+    <a:masterClrMapping/>
+  </p:clrMapOvr>
+</p:sld>
+</file>
+
+<file path=ppt/slides/slide11.xml><?xml version="1.0" encoding="utf-8"?>
+<p:sld xmlns:a="http://schemas.openxmlformats.org/drawingml/2006/main" xmlns:r="http://schemas.openxmlformats.org/officeDocument/2006/relationships" xmlns:p="http://schemas.openxmlformats.org/presentationml/2006/main">
+  <p:cSld name="Slide 11">
+    <p:bg>
+      <p:bgPr>
+        <a:solidFill>
+          <a:srgbClr val="FFFFFF"/>
+        </a:solidFill>
+      </p:bgPr>
+    </p:bg>
+    <p:spTree>
+      <p:nvGrpSpPr>
+        <p:cNvPr id="1" name=""/>
+        <p:cNvGrpSpPr/>
+        <p:nvPr/>
+      </p:nvGrpSpPr>
+      <p:grpSpPr>
+        <a:xfrm>
+          <a:off x="0" y="0"/>
+          <a:ext cx="0" cy="0"/>
+          <a:chOff x="0" y="0"/>
+          <a:chExt cx="0" cy="0"/>
+        </a:xfrm>
+      </p:grpSpPr>
+      <p:sp>
+        <p:nvSpPr>
+          <p:cNvPr id="2" name="Shape 0"/>
+          <p:cNvSpPr/>
+          <p:nvPr/>
+        </p:nvSpPr>
+        <p:spPr>
+          <a:xfrm>
+            <a:off x="0" y="0"/>
+            <a:ext cx="54864" cy="5143500"/>
+          </a:xfrm>
+          <a:prstGeom prst="rect">
+            <a:avLst/>
+          </a:prstGeom>
+          <a:solidFill>
+            <a:srgbClr val="1E2761"/>
+          </a:solidFill>
+          <a:ln/>
+        </p:spPr>
+      </p:sp>
+      <p:sp>
+        <p:nvSpPr>
+          <p:cNvPr id="3" name="Text 1"/>
+          <p:cNvSpPr/>
+          <p:nvPr/>
+        </p:nvSpPr>
+        <p:spPr>
+          <a:xfrm>
+            <a:off x="5669280" y="274320"/>
+            <a:ext cx="3291840" cy="274320"/>
+          </a:xfrm>
+          <a:prstGeom prst="rect">
+            <a:avLst/>
+          </a:prstGeom>
+          <a:noFill/>
+          <a:ln/>
+        </p:spPr>
+        <p:txBody>
+          <a:bodyPr wrap="square" lIns="0" tIns="0" rIns="0" bIns="0" rtlCol="0" anchor="ctr"/>
+          <a:lstStyle/>
+          <a:p>
+            <a:pPr algn="r" indent="0" marL="0">
+              <a:buNone/>
+            </a:pPr>
+            <a:r>
+              <a:rPr lang="en-US" sz="1000" dirty="0">
+                <a:solidFill>
+                  <a:srgbClr val="6B7280"/>
+                </a:solidFill>
+                <a:latin typeface="Calibri" pitchFamily="34" charset="0"/>
+                <a:ea typeface="Calibri" pitchFamily="34" charset="-122"/>
+                <a:cs typeface="Calibri" pitchFamily="34" charset="-120"/>
+              </a:rPr>
+              <a:t>Day 1 · Module 3</a:t>
+            </a:r>
+            <a:endParaRPr lang="en-US" sz="1000" dirty="0"/>
+          </a:p>
+        </p:txBody>
+      </p:sp>
+      <p:sp>
+        <p:nvSpPr>
+          <p:cNvPr id="4" name="Text 2"/>
+          <p:cNvSpPr/>
+          <p:nvPr/>
+        </p:nvSpPr>
+        <p:spPr>
+          <a:xfrm>
+            <a:off x="365760" y="320040"/>
+            <a:ext cx="6217920" cy="640080"/>
+          </a:xfrm>
+          <a:prstGeom prst="rect">
+            <a:avLst/>
+          </a:prstGeom>
+          <a:noFill/>
+          <a:ln/>
+        </p:spPr>
+        <p:txBody>
+          <a:bodyPr wrap="square" lIns="0" tIns="0" rIns="0" bIns="0" rtlCol="0" anchor="ctr"/>
+          <a:lstStyle/>
+          <a:p>
+            <a:pPr indent="0" marL="0">
+              <a:buNone/>
+            </a:pPr>
+            <a:r>
+              <a:rPr lang="en-US" sz="2800" b="1" dirty="0">
+                <a:solidFill>
+                  <a:srgbClr val="1E2761"/>
+                </a:solidFill>
+                <a:latin typeface="Calibri" pitchFamily="34" charset="0"/>
+                <a:ea typeface="Calibri" pitchFamily="34" charset="-122"/>
+                <a:cs typeface="Calibri" pitchFamily="34" charset="-120"/>
+              </a:rPr>
+              <a:t>Iteration loop</a:t>
+            </a:r>
+            <a:endParaRPr lang="en-US" sz="2800" dirty="0"/>
+          </a:p>
+        </p:txBody>
+      </p:sp>
+      <p:sp>
+        <p:nvSpPr>
+          <p:cNvPr id="5" name="Text 3"/>
+          <p:cNvSpPr/>
+          <p:nvPr/>
+        </p:nvSpPr>
+        <p:spPr>
+          <a:xfrm>
+            <a:off x="365760" y="1097280"/>
+            <a:ext cx="8412480" cy="3749040"/>
+          </a:xfrm>
+          <a:prstGeom prst="rect">
+            <a:avLst/>
+          </a:prstGeom>
+          <a:noFill/>
+          <a:ln/>
+        </p:spPr>
+        <p:txBody>
+          <a:bodyPr wrap="square" rtlCol="0" anchor="ctr"/>
+          <a:lstStyle/>
+          <a:p>
+            <a:pPr marL="342900" indent="-342900">
+              <a:spcAft>
+                <a:spcPts val="600"/>
+              </a:spcAft>
+              <a:buSzPct val="100000"/>
+              <a:buChar char="•"/>
+            </a:pPr>
+            <a:r>
+              <a:rPr lang="en-US" sz="1500" dirty="0">
+                <a:solidFill>
+                  <a:srgbClr val="212121"/>
+                </a:solidFill>
+                <a:latin typeface="Calibri" pitchFamily="34" charset="0"/>
+                <a:ea typeface="Calibri" pitchFamily="34" charset="-122"/>
+                <a:cs typeface="Calibri" pitchFamily="34" charset="-120"/>
+              </a:rPr>
+              <a:t>Pick a small eval set (5–20 realistic inputs with expected behaviors)</a:t>
+            </a:r>
+            <a:endParaRPr lang="en-US" sz="1500" dirty="0"/>
+          </a:p>
+          <a:p>
+            <a:pPr marL="342900" indent="-342900">
+              <a:spcAft>
+                <a:spcPts val="600"/>
+              </a:spcAft>
+              <a:buSzPct val="100000"/>
+              <a:buChar char="•"/>
+            </a:pPr>
+            <a:r>
+              <a:rPr lang="en-US" sz="1500" dirty="0">
+                <a:solidFill>
+                  <a:srgbClr val="212121"/>
+                </a:solidFill>
+                <a:latin typeface="Calibri" pitchFamily="34" charset="0"/>
+                <a:ea typeface="Calibri" pitchFamily="34" charset="-122"/>
+                <a:cs typeface="Calibri" pitchFamily="34" charset="-120"/>
+              </a:rPr>
+              <a:t>Run the current prompt against it</a:t>
+            </a:r>
+            <a:endParaRPr lang="en-US" sz="1500" dirty="0"/>
+          </a:p>
+          <a:p>
+            <a:pPr marL="342900" indent="-342900">
+              <a:spcAft>
+                <a:spcPts val="600"/>
+              </a:spcAft>
+              <a:buSzPct val="100000"/>
+              <a:buChar char="•"/>
+            </a:pPr>
+            <a:r>
+              <a:rPr lang="en-US" sz="1500" dirty="0">
+                <a:solidFill>
+                  <a:srgbClr val="212121"/>
+                </a:solidFill>
+                <a:latin typeface="Calibri" pitchFamily="34" charset="0"/>
+                <a:ea typeface="Calibri" pitchFamily="34" charset="-122"/>
+                <a:cs typeface="Calibri" pitchFamily="34" charset="-120"/>
+              </a:rPr>
+              <a:t>Read the failures</a:t>
+            </a:r>
+            <a:endParaRPr lang="en-US" sz="1500" dirty="0"/>
+          </a:p>
+          <a:p>
+            <a:pPr marL="342900" indent="-342900">
+              <a:spcAft>
+                <a:spcPts val="600"/>
+              </a:spcAft>
+              <a:buSzPct val="100000"/>
+              <a:buChar char="•"/>
+            </a:pPr>
+            <a:r>
+              <a:rPr lang="en-US" sz="1500" dirty="0">
+                <a:solidFill>
+                  <a:srgbClr val="212121"/>
+                </a:solidFill>
+                <a:latin typeface="Calibri" pitchFamily="34" charset="0"/>
+                <a:ea typeface="Calibri" pitchFamily="34" charset="-122"/>
+                <a:cs typeface="Calibri" pitchFamily="34" charset="-120"/>
+              </a:rPr>
+              <a:t>Change one thing</a:t>
+            </a:r>
+            <a:endParaRPr lang="en-US" sz="1500" dirty="0"/>
+          </a:p>
+          <a:p>
+            <a:pPr marL="342900" indent="-342900">
+              <a:spcAft>
+                <a:spcPts val="600"/>
+              </a:spcAft>
+              <a:buSzPct val="100000"/>
+              <a:buChar char="•"/>
+            </a:pPr>
+            <a:r>
+              <a:rPr lang="en-US" sz="1500" dirty="0">
+                <a:solidFill>
+                  <a:srgbClr val="212121"/>
+                </a:solidFill>
+                <a:latin typeface="Calibri" pitchFamily="34" charset="0"/>
+                <a:ea typeface="Calibri" pitchFamily="34" charset="-122"/>
+                <a:cs typeface="Calibri" pitchFamily="34" charset="-120"/>
+              </a:rPr>
+              <a:t>Rerun</a:t>
+            </a:r>
+            <a:endParaRPr lang="en-US" sz="1500" dirty="0"/>
+          </a:p>
+        </p:txBody>
+      </p:sp>
+      <p:sp>
+        <p:nvSpPr>
+          <p:cNvPr id="6" name="Text 4"/>
+          <p:cNvSpPr/>
+          <p:nvPr/>
+        </p:nvSpPr>
+        <p:spPr>
+          <a:xfrm>
+            <a:off x="365760" y="4160520"/>
+            <a:ext cx="8412480" cy="457200"/>
+          </a:xfrm>
+          <a:prstGeom prst="rect">
+            <a:avLst/>
+          </a:prstGeom>
+          <a:noFill/>
+          <a:ln/>
+        </p:spPr>
+        <p:txBody>
+          <a:bodyPr wrap="square" rtlCol="0" anchor="ctr"/>
+          <a:lstStyle/>
+          <a:p>
+            <a:pPr indent="0" marL="0">
+              <a:buNone/>
+            </a:pPr>
+            <a:r>
+              <a:rPr lang="en-US" sz="1400" i="1" dirty="0">
+                <a:solidFill>
+                  <a:srgbClr val="6B7280"/>
+                </a:solidFill>
+                <a:latin typeface="Calibri" pitchFamily="34" charset="0"/>
+                <a:ea typeface="Calibri" pitchFamily="34" charset="-122"/>
+                <a:cs typeface="Calibri" pitchFamily="34" charset="-120"/>
+              </a:rPr>
+              <a:t>You'll see this loop again on Day 2 (retrieval eval) and Day 4 (workflow eval). The habit starts today.</a:t>
+            </a:r>
+            <a:endParaRPr lang="en-US" sz="1400" dirty="0"/>
+          </a:p>
+        </p:txBody>
+      </p:sp>
+    </p:spTree>
+  </p:cSld>
+  <p:clrMapOvr>
+    <a:masterClrMapping/>
+  </p:clrMapOvr>
+</p:sld>
+</file>
+
+<file path=ppt/slides/slide12.xml><?xml version="1.0" encoding="utf-8"?>
+<p:sld xmlns:a="http://schemas.openxmlformats.org/drawingml/2006/main" xmlns:r="http://schemas.openxmlformats.org/officeDocument/2006/relationships" xmlns:p="http://schemas.openxmlformats.org/presentationml/2006/main">
+  <p:cSld name="Slide 12">
+    <p:bg>
+      <p:bgPr>
+        <a:solidFill>
+          <a:srgbClr val="FFFFFF"/>
+        </a:solidFill>
+      </p:bgPr>
+    </p:bg>
+    <p:spTree>
+      <p:nvGrpSpPr>
+        <p:cNvPr id="1" name=""/>
+        <p:cNvGrpSpPr/>
+        <p:nvPr/>
+      </p:nvGrpSpPr>
+      <p:grpSpPr>
+        <a:xfrm>
+          <a:off x="0" y="0"/>
+          <a:ext cx="0" cy="0"/>
+          <a:chOff x="0" y="0"/>
+          <a:chExt cx="0" cy="0"/>
+        </a:xfrm>
+      </p:grpSpPr>
+      <p:sp>
+        <p:nvSpPr>
+          <p:cNvPr id="2" name="Shape 0"/>
+          <p:cNvSpPr/>
+          <p:nvPr/>
+        </p:nvSpPr>
+        <p:spPr>
+          <a:xfrm>
+            <a:off x="0" y="0"/>
+            <a:ext cx="54864" cy="5143500"/>
+          </a:xfrm>
+          <a:prstGeom prst="rect">
+            <a:avLst/>
+          </a:prstGeom>
+          <a:solidFill>
+            <a:srgbClr val="1E2761"/>
+          </a:solidFill>
+          <a:ln/>
+        </p:spPr>
+      </p:sp>
+      <p:sp>
+        <p:nvSpPr>
+          <p:cNvPr id="3" name="Text 1"/>
+          <p:cNvSpPr/>
+          <p:nvPr/>
+        </p:nvSpPr>
+        <p:spPr>
+          <a:xfrm>
+            <a:off x="5669280" y="274320"/>
+            <a:ext cx="3291840" cy="274320"/>
+          </a:xfrm>
+          <a:prstGeom prst="rect">
+            <a:avLst/>
+          </a:prstGeom>
+          <a:noFill/>
+          <a:ln/>
+        </p:spPr>
+        <p:txBody>
+          <a:bodyPr wrap="square" lIns="0" tIns="0" rIns="0" bIns="0" rtlCol="0" anchor="ctr"/>
+          <a:lstStyle/>
+          <a:p>
+            <a:pPr algn="r" indent="0" marL="0">
+              <a:buNone/>
+            </a:pPr>
+            <a:r>
+              <a:rPr lang="en-US" sz="1000" dirty="0">
+                <a:solidFill>
+                  <a:srgbClr val="6B7280"/>
+                </a:solidFill>
+                <a:latin typeface="Calibri" pitchFamily="34" charset="0"/>
+                <a:ea typeface="Calibri" pitchFamily="34" charset="-122"/>
+                <a:cs typeface="Calibri" pitchFamily="34" charset="-120"/>
+              </a:rPr>
+              <a:t>Day 1 · Module 3</a:t>
+            </a:r>
+            <a:endParaRPr lang="en-US" sz="1000" dirty="0"/>
+          </a:p>
+        </p:txBody>
+      </p:sp>
+      <p:sp>
+        <p:nvSpPr>
+          <p:cNvPr id="4" name="Text 2"/>
+          <p:cNvSpPr/>
+          <p:nvPr/>
+        </p:nvSpPr>
+        <p:spPr>
+          <a:xfrm>
+            <a:off x="365760" y="320040"/>
+            <a:ext cx="6217920" cy="640080"/>
+          </a:xfrm>
+          <a:prstGeom prst="rect">
+            <a:avLst/>
+          </a:prstGeom>
+          <a:noFill/>
+          <a:ln/>
+        </p:spPr>
+        <p:txBody>
+          <a:bodyPr wrap="square" lIns="0" tIns="0" rIns="0" bIns="0" rtlCol="0" anchor="ctr"/>
+          <a:lstStyle/>
+          <a:p>
+            <a:pPr indent="0" marL="0">
+              <a:buNone/>
+            </a:pPr>
+            <a:r>
+              <a:rPr lang="en-US" sz="2800" b="1" dirty="0">
+                <a:solidFill>
+                  <a:srgbClr val="1E2761"/>
+                </a:solidFill>
+                <a:latin typeface="Calibri" pitchFamily="34" charset="0"/>
+                <a:ea typeface="Calibri" pitchFamily="34" charset="-122"/>
+                <a:cs typeface="Calibri" pitchFamily="34" charset="-120"/>
+              </a:rPr>
+              <a:t>Prompts inside MAF</a:t>
+            </a:r>
+            <a:endParaRPr lang="en-US" sz="2800" dirty="0"/>
+          </a:p>
+        </p:txBody>
+      </p:sp>
+      <p:sp>
+        <p:nvSpPr>
+          <p:cNvPr id="5" name="Shape 3"/>
+          <p:cNvSpPr/>
+          <p:nvPr/>
+        </p:nvSpPr>
+        <p:spPr>
+          <a:xfrm>
+            <a:off x="365760" y="1097280"/>
+            <a:ext cx="8412480" cy="3474720"/>
+          </a:xfrm>
+          <a:prstGeom prst="rect">
+            <a:avLst/>
+          </a:prstGeom>
+          <a:solidFill>
+            <a:srgbClr val="F3F4F6"/>
+          </a:solidFill>
+          <a:ln w="6350">
+            <a:solidFill>
+              <a:srgbClr val="D1D5DB"/>
+            </a:solidFill>
+            <a:prstDash val="solid"/>
+          </a:ln>
+        </p:spPr>
+      </p:sp>
+      <p:sp>
+        <p:nvSpPr>
+          <p:cNvPr id="6" name="Text 4"/>
+          <p:cNvSpPr/>
+          <p:nvPr/>
+        </p:nvSpPr>
+        <p:spPr>
+          <a:xfrm>
+            <a:off x="502920" y="1188720"/>
+            <a:ext cx="8138160" cy="3291840"/>
+          </a:xfrm>
+          <a:prstGeom prst="rect">
+            <a:avLst/>
+          </a:prstGeom>
+          <a:noFill/>
+          <a:ln/>
+        </p:spPr>
+        <p:txBody>
+          <a:bodyPr wrap="square" lIns="0" tIns="0" rIns="0" bIns="0" rtlCol="0" anchor="t"/>
+          <a:lstStyle/>
+          <a:p>
+            <a:pPr indent="0" marL="0">
+              <a:buNone/>
+            </a:pPr>
+            <a:r>
+              <a:rPr lang="en-US" sz="1300" dirty="0">
+                <a:solidFill>
+                  <a:srgbClr val="212121"/>
+                </a:solidFill>
+                <a:latin typeface="Consolas" pitchFamily="34" charset="0"/>
+                <a:ea typeface="Consolas" pitchFamily="34" charset="-122"/>
+                <a:cs typeface="Consolas" pitchFamily="34" charset="-120"/>
+              </a:rPr>
+              <a:t>from agent_framework import Agent</a:t>
+            </a:r>
+            <a:endParaRPr lang="en-US" sz="1300" dirty="0"/>
+          </a:p>
+          <a:p>
+            <a:pPr indent="0" marL="0">
+              <a:buNone/>
+            </a:pPr>
+            <a:r>
+              <a:rPr lang="en-US" sz="1300" dirty="0">
+                <a:solidFill>
+                  <a:srgbClr val="212121"/>
+                </a:solidFill>
+                <a:latin typeface="Consolas" pitchFamily="34" charset="0"/>
+                <a:ea typeface="Consolas" pitchFamily="34" charset="-122"/>
+                <a:cs typeface="Consolas" pitchFamily="34" charset="-120"/>
+              </a:rPr>
+              <a:t>from agent_framework.foundry import FoundryChatClient</a:t>
+            </a:r>
+            <a:endParaRPr lang="en-US" sz="1300" dirty="0"/>
+          </a:p>
+          <a:p>
+            <a:pPr indent="0" marL="0">
+              <a:buNone/>
+            </a:pPr>
+            <a:r>
+              <a:rPr lang="en-US" sz="1300" dirty="0">
+                <a:solidFill>
+                  <a:srgbClr val="212121"/>
+                </a:solidFill>
+                <a:latin typeface="Consolas" pitchFamily="34" charset="0"/>
+                <a:ea typeface="Consolas" pitchFamily="34" charset="-122"/>
+                <a:cs typeface="Consolas" pitchFamily="34" charset="-120"/>
+              </a:rPr>
+              <a:t>from azure.identity import AzureCliCredential</a:t>
+            </a:r>
+            <a:endParaRPr lang="en-US" sz="1300" dirty="0"/>
+          </a:p>
+          <a:p>
+            <a:pPr indent="0" marL="0">
+              <a:buNone/>
+            </a:pPr>
+            <a:endParaRPr lang="en-US" sz="1300" dirty="0"/>
+          </a:p>
+          <a:p>
+            <a:pPr indent="0" marL="0">
+              <a:buNone/>
+            </a:pPr>
+            <a:r>
+              <a:rPr lang="en-US" sz="1300" dirty="0">
+                <a:solidFill>
+                  <a:srgbClr val="212121"/>
+                </a:solidFill>
+                <a:latin typeface="Consolas" pitchFamily="34" charset="0"/>
+                <a:ea typeface="Consolas" pitchFamily="34" charset="-122"/>
+                <a:cs typeface="Consolas" pitchFamily="34" charset="-120"/>
+              </a:rPr>
+              <a:t>agent = Agent(</a:t>
+            </a:r>
+            <a:endParaRPr lang="en-US" sz="1300" dirty="0"/>
+          </a:p>
+          <a:p>
+            <a:pPr indent="0" marL="0">
+              <a:buNone/>
+            </a:pPr>
+            <a:r>
+              <a:rPr lang="en-US" sz="1300" dirty="0">
+                <a:solidFill>
+                  <a:srgbClr val="212121"/>
+                </a:solidFill>
+                <a:latin typeface="Consolas" pitchFamily="34" charset="0"/>
+                <a:ea typeface="Consolas" pitchFamily="34" charset="-122"/>
+                <a:cs typeface="Consolas" pitchFamily="34" charset="-120"/>
+              </a:rPr>
+              <a:t>    client=FoundryChatClient(credential=AzureCliCredential()),</a:t>
+            </a:r>
+            <a:endParaRPr lang="en-US" sz="1300" dirty="0"/>
+          </a:p>
+          <a:p>
+            <a:pPr indent="0" marL="0">
+              <a:buNone/>
+            </a:pPr>
+            <a:r>
+              <a:rPr lang="en-US" sz="1300" dirty="0">
+                <a:solidFill>
+                  <a:srgbClr val="212121"/>
+                </a:solidFill>
+                <a:latin typeface="Consolas" pitchFamily="34" charset="0"/>
+                <a:ea typeface="Consolas" pitchFamily="34" charset="-122"/>
+                <a:cs typeface="Consolas" pitchFamily="34" charset="-120"/>
+              </a:rPr>
+              <a:t>    name="DocsAssistant",</a:t>
+            </a:r>
+            <a:endParaRPr lang="en-US" sz="1300" dirty="0"/>
+          </a:p>
+          <a:p>
+            <a:pPr indent="0" marL="0">
+              <a:buNone/>
+            </a:pPr>
+            <a:r>
+              <a:rPr lang="en-US" sz="1300" dirty="0">
+                <a:solidFill>
+                  <a:srgbClr val="212121"/>
+                </a:solidFill>
+                <a:latin typeface="Consolas" pitchFamily="34" charset="0"/>
+                <a:ea typeface="Consolas" pitchFamily="34" charset="-122"/>
+                <a:cs typeface="Consolas" pitchFamily="34" charset="-120"/>
+              </a:rPr>
+              <a:t>    instructions=(</a:t>
+            </a:r>
+            <a:endParaRPr lang="en-US" sz="1300" dirty="0"/>
+          </a:p>
+          <a:p>
+            <a:pPr indent="0" marL="0">
+              <a:buNone/>
+            </a:pPr>
+            <a:r>
+              <a:rPr lang="en-US" sz="1300" dirty="0">
+                <a:solidFill>
+                  <a:srgbClr val="212121"/>
+                </a:solidFill>
+                <a:latin typeface="Consolas" pitchFamily="34" charset="0"/>
+                <a:ea typeface="Consolas" pitchFamily="34" charset="-122"/>
+                <a:cs typeface="Consolas" pitchFamily="34" charset="-120"/>
+              </a:rPr>
+              <a:t>        "## Role\n"</a:t>
+            </a:r>
+            <a:endParaRPr lang="en-US" sz="1300" dirty="0"/>
+          </a:p>
+          <a:p>
+            <a:pPr indent="0" marL="0">
+              <a:buNone/>
+            </a:pPr>
+            <a:r>
+              <a:rPr lang="en-US" sz="1300" dirty="0">
+                <a:solidFill>
+                  <a:srgbClr val="212121"/>
+                </a:solidFill>
+                <a:latin typeface="Consolas" pitchFamily="34" charset="0"/>
+                <a:ea typeface="Consolas" pitchFamily="34" charset="-122"/>
+                <a:cs typeface="Consolas" pitchFamily="34" charset="-120"/>
+              </a:rPr>
+              <a:t>        "You are a technical documentation assistant.\n\n"</a:t>
+            </a:r>
+            <a:endParaRPr lang="en-US" sz="1300" dirty="0"/>
+          </a:p>
+          <a:p>
+            <a:pPr indent="0" marL="0">
+              <a:buNone/>
+            </a:pPr>
+            <a:r>
+              <a:rPr lang="en-US" sz="1300" dirty="0">
+                <a:solidFill>
+                  <a:srgbClr val="212121"/>
+                </a:solidFill>
+                <a:latin typeface="Consolas" pitchFamily="34" charset="0"/>
+                <a:ea typeface="Consolas" pitchFamily="34" charset="-122"/>
+                <a:cs typeface="Consolas" pitchFamily="34" charset="-120"/>
+              </a:rPr>
+              <a:t>        "## Rules\n"</a:t>
+            </a:r>
+            <a:endParaRPr lang="en-US" sz="1300" dirty="0"/>
+          </a:p>
+          <a:p>
+            <a:pPr indent="0" marL="0">
+              <a:buNone/>
+            </a:pPr>
+            <a:r>
+              <a:rPr lang="en-US" sz="1300" dirty="0">
+                <a:solidFill>
+                  <a:srgbClr val="212121"/>
+                </a:solidFill>
+                <a:latin typeface="Consolas" pitchFamily="34" charset="0"/>
+                <a:ea typeface="Consolas" pitchFamily="34" charset="-122"/>
+                <a:cs typeface="Consolas" pitchFamily="34" charset="-120"/>
+              </a:rPr>
+              <a:t>        "- Cite sources for factual claims.\n"</a:t>
+            </a:r>
+            <a:endParaRPr lang="en-US" sz="1300" dirty="0"/>
+          </a:p>
+          <a:p>
+            <a:pPr indent="0" marL="0">
+              <a:buNone/>
+            </a:pPr>
+            <a:r>
+              <a:rPr lang="en-US" sz="1300" dirty="0">
+                <a:solidFill>
+                  <a:srgbClr val="212121"/>
+                </a:solidFill>
+                <a:latin typeface="Consolas" pitchFamily="34" charset="0"/>
+                <a:ea typeface="Consolas" pitchFamily="34" charset="-122"/>
+                <a:cs typeface="Consolas" pitchFamily="34" charset="-120"/>
+              </a:rPr>
+              <a:t>        "- Say 'I don't know' when you don't.\n"</a:t>
+            </a:r>
+            <a:endParaRPr lang="en-US" sz="1300" dirty="0"/>
+          </a:p>
+          <a:p>
+            <a:pPr indent="0" marL="0">
+              <a:buNone/>
+            </a:pPr>
+            <a:r>
+              <a:rPr lang="en-US" sz="1300" dirty="0">
+                <a:solidFill>
+                  <a:srgbClr val="212121"/>
+                </a:solidFill>
+                <a:latin typeface="Consolas" pitchFamily="34" charset="0"/>
+                <a:ea typeface="Consolas" pitchFamily="34" charset="-122"/>
+                <a:cs typeface="Consolas" pitchFamily="34" charset="-120"/>
+              </a:rPr>
+              <a:t>    ),</a:t>
+            </a:r>
+            <a:endParaRPr lang="en-US" sz="1300" dirty="0"/>
+          </a:p>
+          <a:p>
+            <a:pPr indent="0" marL="0">
+              <a:buNone/>
+            </a:pPr>
+            <a:r>
+              <a:rPr lang="en-US" sz="1300" dirty="0">
+                <a:solidFill>
+                  <a:srgbClr val="212121"/>
+                </a:solidFill>
+                <a:latin typeface="Consolas" pitchFamily="34" charset="0"/>
+                <a:ea typeface="Consolas" pitchFamily="34" charset="-122"/>
+                <a:cs typeface="Consolas" pitchFamily="34" charset="-120"/>
+              </a:rPr>
+              <a:t>)</a:t>
+            </a:r>
+            <a:endParaRPr lang="en-US" sz="1300" dirty="0"/>
+          </a:p>
+        </p:txBody>
+      </p:sp>
+    </p:spTree>
+  </p:cSld>
+  <p:clrMapOvr>
+    <a:masterClrMapping/>
+  </p:clrMapOvr>
+</p:sld>
+</file>
+
+<file path=ppt/slides/slide13.xml><?xml version="1.0" encoding="utf-8"?>
+<p:sld xmlns:a="http://schemas.openxmlformats.org/drawingml/2006/main" xmlns:r="http://schemas.openxmlformats.org/officeDocument/2006/relationships" xmlns:p="http://schemas.openxmlformats.org/presentationml/2006/main">
+  <p:cSld name="Slide 13">
+    <p:bg>
+      <p:bgPr>
+        <a:solidFill>
+          <a:srgbClr val="FFFFFF"/>
+        </a:solidFill>
+      </p:bgPr>
+    </p:bg>
+    <p:spTree>
+      <p:nvGrpSpPr>
+        <p:cNvPr id="1" name=""/>
+        <p:cNvGrpSpPr/>
+        <p:nvPr/>
+      </p:nvGrpSpPr>
+      <p:grpSpPr>
+        <a:xfrm>
+          <a:off x="0" y="0"/>
+          <a:ext cx="0" cy="0"/>
+          <a:chOff x="0" y="0"/>
+          <a:chExt cx="0" cy="0"/>
+        </a:xfrm>
+      </p:grpSpPr>
+      <p:sp>
+        <p:nvSpPr>
+          <p:cNvPr id="2" name="Shape 0"/>
+          <p:cNvSpPr/>
+          <p:nvPr/>
+        </p:nvSpPr>
+        <p:spPr>
+          <a:xfrm>
+            <a:off x="0" y="0"/>
+            <a:ext cx="54864" cy="5143500"/>
+          </a:xfrm>
+          <a:prstGeom prst="rect">
+            <a:avLst/>
+          </a:prstGeom>
+          <a:solidFill>
+            <a:srgbClr val="1E2761"/>
+          </a:solidFill>
+          <a:ln/>
+        </p:spPr>
+      </p:sp>
+      <p:sp>
+        <p:nvSpPr>
+          <p:cNvPr id="3" name="Text 1"/>
+          <p:cNvSpPr/>
+          <p:nvPr/>
+        </p:nvSpPr>
+        <p:spPr>
+          <a:xfrm>
+            <a:off x="5669280" y="274320"/>
+            <a:ext cx="3291840" cy="274320"/>
+          </a:xfrm>
+          <a:prstGeom prst="rect">
+            <a:avLst/>
+          </a:prstGeom>
+          <a:noFill/>
+          <a:ln/>
+        </p:spPr>
+        <p:txBody>
+          <a:bodyPr wrap="square" lIns="0" tIns="0" rIns="0" bIns="0" rtlCol="0" anchor="ctr"/>
+          <a:lstStyle/>
+          <a:p>
+            <a:pPr algn="r" indent="0" marL="0">
+              <a:buNone/>
+            </a:pPr>
+            <a:r>
+              <a:rPr lang="en-US" sz="1000" dirty="0">
+                <a:solidFill>
+                  <a:srgbClr val="6B7280"/>
+                </a:solidFill>
+                <a:latin typeface="Calibri" pitchFamily="34" charset="0"/>
+                <a:ea typeface="Calibri" pitchFamily="34" charset="-122"/>
+                <a:cs typeface="Calibri" pitchFamily="34" charset="-120"/>
+              </a:rPr>
+              <a:t>Day 1 · Module 3</a:t>
+            </a:r>
+            <a:endParaRPr lang="en-US" sz="1000" dirty="0"/>
+          </a:p>
+        </p:txBody>
+      </p:sp>
+      <p:sp>
+        <p:nvSpPr>
+          <p:cNvPr id="4" name="Text 2"/>
+          <p:cNvSpPr/>
+          <p:nvPr/>
+        </p:nvSpPr>
+        <p:spPr>
+          <a:xfrm>
+            <a:off x="365760" y="320040"/>
+            <a:ext cx="6217920" cy="640080"/>
+          </a:xfrm>
+          <a:prstGeom prst="rect">
+            <a:avLst/>
+          </a:prstGeom>
+          <a:noFill/>
+          <a:ln/>
+        </p:spPr>
+        <p:txBody>
+          <a:bodyPr wrap="square" lIns="0" tIns="0" rIns="0" bIns="0" rtlCol="0" anchor="ctr"/>
+          <a:lstStyle/>
+          <a:p>
+            <a:pPr indent="0" marL="0">
+              <a:buNone/>
+            </a:pPr>
+            <a:r>
+              <a:rPr lang="en-US" sz="2800" b="1" dirty="0">
+                <a:solidFill>
+                  <a:srgbClr val="1E2761"/>
+                </a:solidFill>
+                <a:latin typeface="Calibri" pitchFamily="34" charset="0"/>
+                <a:ea typeface="Calibri" pitchFamily="34" charset="-122"/>
+                <a:cs typeface="Calibri" pitchFamily="34" charset="-120"/>
+              </a:rPr>
+              <a:t>Tool descriptions are prompts too</a:t>
+            </a:r>
+            <a:endParaRPr lang="en-US" sz="2800" dirty="0"/>
+          </a:p>
+        </p:txBody>
+      </p:sp>
+      <p:sp>
+        <p:nvSpPr>
+          <p:cNvPr id="5" name="Shape 3"/>
+          <p:cNvSpPr/>
+          <p:nvPr/>
+        </p:nvSpPr>
+        <p:spPr>
+          <a:xfrm>
+            <a:off x="365760" y="1097280"/>
+            <a:ext cx="8412480" cy="3200400"/>
+          </a:xfrm>
+          <a:prstGeom prst="rect">
+            <a:avLst/>
+          </a:prstGeom>
+          <a:solidFill>
+            <a:srgbClr val="F3F4F6"/>
+          </a:solidFill>
+          <a:ln w="6350">
+            <a:solidFill>
+              <a:srgbClr val="D1D5DB"/>
+            </a:solidFill>
+            <a:prstDash val="solid"/>
+          </a:ln>
+        </p:spPr>
+      </p:sp>
+      <p:sp>
+        <p:nvSpPr>
+          <p:cNvPr id="6" name="Text 4"/>
+          <p:cNvSpPr/>
+          <p:nvPr/>
+        </p:nvSpPr>
+        <p:spPr>
+          <a:xfrm>
+            <a:off x="502920" y="1188720"/>
+            <a:ext cx="8138160" cy="3017520"/>
+          </a:xfrm>
+          <a:prstGeom prst="rect">
+            <a:avLst/>
+          </a:prstGeom>
+          <a:noFill/>
+          <a:ln/>
+        </p:spPr>
+        <p:txBody>
+          <a:bodyPr wrap="square" lIns="0" tIns="0" rIns="0" bIns="0" rtlCol="0" anchor="t"/>
+          <a:lstStyle/>
+          <a:p>
+            <a:pPr indent="0" marL="0">
+              <a:buNone/>
+            </a:pPr>
+            <a:r>
+              <a:rPr lang="en-US" sz="1300" dirty="0">
+                <a:solidFill>
+                  <a:srgbClr val="212121"/>
+                </a:solidFill>
+                <a:latin typeface="Consolas" pitchFamily="34" charset="0"/>
+                <a:ea typeface="Consolas" pitchFamily="34" charset="-122"/>
+                <a:cs typeface="Consolas" pitchFamily="34" charset="-120"/>
+              </a:rPr>
+              <a:t>@tool</a:t>
+            </a:r>
+            <a:endParaRPr lang="en-US" sz="1300" dirty="0"/>
+          </a:p>
+          <a:p>
+            <a:pPr indent="0" marL="0">
+              <a:buNone/>
+            </a:pPr>
+            <a:r>
+              <a:rPr lang="en-US" sz="1300" dirty="0">
+                <a:solidFill>
+                  <a:srgbClr val="212121"/>
+                </a:solidFill>
+                <a:latin typeface="Consolas" pitchFamily="34" charset="0"/>
+                <a:ea typeface="Consolas" pitchFamily="34" charset="-122"/>
+                <a:cs typeface="Consolas" pitchFamily="34" charset="-120"/>
+              </a:rPr>
+              <a:t>def create_ticket(title: str, body: str, priority: str) -&gt; str:</a:t>
+            </a:r>
+            <a:endParaRPr lang="en-US" sz="1300" dirty="0"/>
+          </a:p>
+          <a:p>
+            <a:pPr indent="0" marL="0">
+              <a:buNone/>
+            </a:pPr>
+            <a:r>
+              <a:rPr lang="en-US" sz="1300" dirty="0">
+                <a:solidFill>
+                  <a:srgbClr val="212121"/>
+                </a:solidFill>
+                <a:latin typeface="Consolas" pitchFamily="34" charset="0"/>
+                <a:ea typeface="Consolas" pitchFamily="34" charset="-122"/>
+                <a:cs typeface="Consolas" pitchFamily="34" charset="-120"/>
+              </a:rPr>
+              <a:t>    """Create a support ticket.</a:t>
+            </a:r>
+            <a:endParaRPr lang="en-US" sz="1300" dirty="0"/>
+          </a:p>
+          <a:p>
+            <a:pPr indent="0" marL="0">
+              <a:buNone/>
+            </a:pPr>
+            <a:endParaRPr lang="en-US" sz="1300" dirty="0"/>
+          </a:p>
+          <a:p>
+            <a:pPr indent="0" marL="0">
+              <a:buNone/>
+            </a:pPr>
+            <a:r>
+              <a:rPr lang="en-US" sz="1300" dirty="0">
+                <a:solidFill>
+                  <a:srgbClr val="212121"/>
+                </a:solidFill>
+                <a:latin typeface="Consolas" pitchFamily="34" charset="0"/>
+                <a:ea typeface="Consolas" pitchFamily="34" charset="-122"/>
+                <a:cs typeface="Consolas" pitchFamily="34" charset="-120"/>
+              </a:rPr>
+              <a:t>    Use this when the user reports a problem that needs a human</a:t>
+            </a:r>
+            <a:endParaRPr lang="en-US" sz="1300" dirty="0"/>
+          </a:p>
+          <a:p>
+            <a:pPr indent="0" marL="0">
+              <a:buNone/>
+            </a:pPr>
+            <a:r>
+              <a:rPr lang="en-US" sz="1300" dirty="0">
+                <a:solidFill>
+                  <a:srgbClr val="212121"/>
+                </a:solidFill>
+                <a:latin typeface="Consolas" pitchFamily="34" charset="0"/>
+                <a:ea typeface="Consolas" pitchFamily="34" charset="-122"/>
+                <a:cs typeface="Consolas" pitchFamily="34" charset="-120"/>
+              </a:rPr>
+              <a:t>    engineer to resolve. Do NOT use for questions you can answer</a:t>
+            </a:r>
+            <a:endParaRPr lang="en-US" sz="1300" dirty="0"/>
+          </a:p>
+          <a:p>
+            <a:pPr indent="0" marL="0">
+              <a:buNone/>
+            </a:pPr>
+            <a:r>
+              <a:rPr lang="en-US" sz="1300" dirty="0">
+                <a:solidFill>
+                  <a:srgbClr val="212121"/>
+                </a:solidFill>
+                <a:latin typeface="Consolas" pitchFamily="34" charset="0"/>
+                <a:ea typeface="Consolas" pitchFamily="34" charset="-122"/>
+                <a:cs typeface="Consolas" pitchFamily="34" charset="-120"/>
+              </a:rPr>
+              <a:t>    from documentation. Priority must be one of low, med, high.</a:t>
+            </a:r>
+            <a:endParaRPr lang="en-US" sz="1300" dirty="0"/>
+          </a:p>
+          <a:p>
+            <a:pPr indent="0" marL="0">
+              <a:buNone/>
+            </a:pPr>
+            <a:r>
+              <a:rPr lang="en-US" sz="1300" dirty="0">
+                <a:solidFill>
+                  <a:srgbClr val="212121"/>
+                </a:solidFill>
+                <a:latin typeface="Consolas" pitchFamily="34" charset="0"/>
+                <a:ea typeface="Consolas" pitchFamily="34" charset="-122"/>
+                <a:cs typeface="Consolas" pitchFamily="34" charset="-120"/>
+              </a:rPr>
+              <a:t>    """</a:t>
+            </a:r>
+            <a:endParaRPr lang="en-US" sz="1300" dirty="0"/>
+          </a:p>
+          <a:p>
+            <a:pPr indent="0" marL="0">
+              <a:buNone/>
+            </a:pPr>
+            <a:r>
+              <a:rPr lang="en-US" sz="1300" dirty="0">
+                <a:solidFill>
+                  <a:srgbClr val="212121"/>
+                </a:solidFill>
+                <a:latin typeface="Consolas" pitchFamily="34" charset="0"/>
+                <a:ea typeface="Consolas" pitchFamily="34" charset="-122"/>
+                <a:cs typeface="Consolas" pitchFamily="34" charset="-120"/>
+              </a:rPr>
+              <a:t>    ...</a:t>
+            </a:r>
+            <a:endParaRPr lang="en-US" sz="1300" dirty="0"/>
+          </a:p>
+        </p:txBody>
+      </p:sp>
+      <p:sp>
+        <p:nvSpPr>
+          <p:cNvPr id="7" name="Text 5"/>
+          <p:cNvSpPr/>
+          <p:nvPr/>
+        </p:nvSpPr>
+        <p:spPr>
+          <a:xfrm>
+            <a:off x="365760" y="4434840"/>
+            <a:ext cx="8412480" cy="365760"/>
+          </a:xfrm>
+          <a:prstGeom prst="rect">
+            <a:avLst/>
+          </a:prstGeom>
+          <a:noFill/>
+          <a:ln/>
+        </p:spPr>
+        <p:txBody>
+          <a:bodyPr wrap="square" rtlCol="0" anchor="ctr"/>
+          <a:lstStyle/>
+          <a:p>
+            <a:pPr indent="0" marL="0">
+              <a:buNone/>
+            </a:pPr>
+            <a:r>
+              <a:rPr lang="en-US" sz="1400" b="1" i="1" dirty="0">
+                <a:solidFill>
+                  <a:srgbClr val="1E2761"/>
+                </a:solidFill>
+                <a:latin typeface="Calibri" pitchFamily="34" charset="0"/>
+                <a:ea typeface="Calibri" pitchFamily="34" charset="-122"/>
+                <a:cs typeface="Calibri" pitchFamily="34" charset="-120"/>
+              </a:rPr>
+              <a:t>Bad docstrings = the model calls the wrong tool at the wrong time.</a:t>
+            </a:r>
+            <a:endParaRPr lang="en-US" sz="1400" dirty="0"/>
+          </a:p>
+        </p:txBody>
+      </p:sp>
+    </p:spTree>
+  </p:cSld>
+  <p:clrMapOvr>
+    <a:masterClrMapping/>
+  </p:clrMapOvr>
+</p:sld>
+</file>
+
+<file path=ppt/slides/slide14.xml><?xml version="1.0" encoding="utf-8"?>
+<p:sld xmlns:a="http://schemas.openxmlformats.org/drawingml/2006/main" xmlns:r="http://schemas.openxmlformats.org/officeDocument/2006/relationships" xmlns:p="http://schemas.openxmlformats.org/presentationml/2006/main">
+  <p:cSld name="Slide 14">
+    <p:bg>
+      <p:bgPr>
+        <a:solidFill>
+          <a:srgbClr val="FFFFFF"/>
+        </a:solidFill>
+      </p:bgPr>
+    </p:bg>
+    <p:spTree>
+      <p:nvGrpSpPr>
+        <p:cNvPr id="1" name=""/>
+        <p:cNvGrpSpPr/>
+        <p:nvPr/>
+      </p:nvGrpSpPr>
+      <p:grpSpPr>
+        <a:xfrm>
+          <a:off x="0" y="0"/>
+          <a:ext cx="0" cy="0"/>
+          <a:chOff x="0" y="0"/>
+          <a:chExt cx="0" cy="0"/>
+        </a:xfrm>
+      </p:grpSpPr>
+      <p:sp>
+        <p:nvSpPr>
+          <p:cNvPr id="2" name="Shape 0"/>
+          <p:cNvSpPr/>
+          <p:nvPr/>
+        </p:nvSpPr>
+        <p:spPr>
+          <a:xfrm>
+            <a:off x="0" y="0"/>
+            <a:ext cx="54864" cy="5143500"/>
+          </a:xfrm>
+          <a:prstGeom prst="rect">
+            <a:avLst/>
+          </a:prstGeom>
+          <a:solidFill>
+            <a:srgbClr val="1E2761"/>
+          </a:solidFill>
+          <a:ln/>
+        </p:spPr>
+      </p:sp>
+      <p:sp>
+        <p:nvSpPr>
+          <p:cNvPr id="3" name="Text 1"/>
+          <p:cNvSpPr/>
+          <p:nvPr/>
+        </p:nvSpPr>
+        <p:spPr>
+          <a:xfrm>
+            <a:off x="5669280" y="274320"/>
+            <a:ext cx="3291840" cy="274320"/>
+          </a:xfrm>
+          <a:prstGeom prst="rect">
+            <a:avLst/>
+          </a:prstGeom>
+          <a:noFill/>
+          <a:ln/>
+        </p:spPr>
+        <p:txBody>
+          <a:bodyPr wrap="square" lIns="0" tIns="0" rIns="0" bIns="0" rtlCol="0" anchor="ctr"/>
+          <a:lstStyle/>
+          <a:p>
+            <a:pPr algn="r" indent="0" marL="0">
+              <a:buNone/>
+            </a:pPr>
+            <a:r>
+              <a:rPr lang="en-US" sz="1000" dirty="0">
+                <a:solidFill>
+                  <a:srgbClr val="6B7280"/>
+                </a:solidFill>
+                <a:latin typeface="Calibri" pitchFamily="34" charset="0"/>
+                <a:ea typeface="Calibri" pitchFamily="34" charset="-122"/>
+                <a:cs typeface="Calibri" pitchFamily="34" charset="-120"/>
+              </a:rPr>
+              <a:t>Day 1 · Module 3</a:t>
+            </a:r>
+            <a:endParaRPr lang="en-US" sz="1000" dirty="0"/>
+          </a:p>
+        </p:txBody>
+      </p:sp>
+      <p:sp>
+        <p:nvSpPr>
+          <p:cNvPr id="4" name="Text 2"/>
+          <p:cNvSpPr/>
+          <p:nvPr/>
+        </p:nvSpPr>
+        <p:spPr>
+          <a:xfrm>
+            <a:off x="365760" y="320040"/>
+            <a:ext cx="6217920" cy="640080"/>
+          </a:xfrm>
+          <a:prstGeom prst="rect">
+            <a:avLst/>
+          </a:prstGeom>
+          <a:noFill/>
+          <a:ln/>
+        </p:spPr>
+        <p:txBody>
+          <a:bodyPr wrap="square" lIns="0" tIns="0" rIns="0" bIns="0" rtlCol="0" anchor="ctr"/>
+          <a:lstStyle/>
+          <a:p>
+            <a:pPr indent="0" marL="0">
+              <a:buNone/>
+            </a:pPr>
+            <a:r>
+              <a:rPr lang="en-US" sz="2800" b="1" dirty="0">
+                <a:solidFill>
+                  <a:srgbClr val="1E2761"/>
+                </a:solidFill>
+                <a:latin typeface="Calibri" pitchFamily="34" charset="0"/>
+                <a:ea typeface="Calibri" pitchFamily="34" charset="-122"/>
+                <a:cs typeface="Calibri" pitchFamily="34" charset="-120"/>
+              </a:rPr>
+              <a:t>Takeaways</a:t>
+            </a:r>
+            <a:endParaRPr lang="en-US" sz="2800" dirty="0"/>
+          </a:p>
+        </p:txBody>
+      </p:sp>
+      <p:sp>
+        <p:nvSpPr>
+          <p:cNvPr id="5" name="Text 3"/>
+          <p:cNvSpPr/>
+          <p:nvPr/>
+        </p:nvSpPr>
+        <p:spPr>
+          <a:xfrm>
+            <a:off x="365760" y="1097280"/>
+            <a:ext cx="8412480" cy="3108960"/>
+          </a:xfrm>
+          <a:prstGeom prst="rect">
+            <a:avLst/>
+          </a:prstGeom>
+          <a:noFill/>
+          <a:ln/>
+        </p:spPr>
+        <p:txBody>
+          <a:bodyPr wrap="square" rtlCol="0" anchor="ctr"/>
+          <a:lstStyle/>
+          <a:p>
+            <a:pPr marL="342900" indent="-342900">
+              <a:spcAft>
+                <a:spcPts val="600"/>
+              </a:spcAft>
+              <a:buSzPct val="100000"/>
+              <a:buChar char="•"/>
+            </a:pPr>
+            <a:r>
+              <a:rPr lang="en-US" sz="1500" dirty="0">
+                <a:solidFill>
+                  <a:srgbClr val="212121"/>
+                </a:solidFill>
+                <a:latin typeface="Calibri" pitchFamily="34" charset="0"/>
+                <a:ea typeface="Calibri" pitchFamily="34" charset="-122"/>
+                <a:cs typeface="Calibri" pitchFamily="34" charset="-120"/>
+              </a:rPr>
+              <a:t>Prompts still matter — you'll just write fewer of them, more carefully.</a:t>
+            </a:r>
+            <a:endParaRPr lang="en-US" sz="1500" dirty="0"/>
+          </a:p>
+          <a:p>
+            <a:pPr marL="342900" indent="-342900">
+              <a:spcAft>
+                <a:spcPts val="600"/>
+              </a:spcAft>
+              <a:buSzPct val="100000"/>
+              <a:buChar char="•"/>
+            </a:pPr>
+            <a:r>
+              <a:rPr lang="en-US" sz="1500" dirty="0">
+                <a:solidFill>
+                  <a:srgbClr val="212121"/>
+                </a:solidFill>
+                <a:latin typeface="Calibri" pitchFamily="34" charset="0"/>
+                <a:ea typeface="Calibri" pitchFamily="34" charset="-122"/>
+                <a:cs typeface="Calibri" pitchFamily="34" charset="-120"/>
+              </a:rPr>
+              <a:t>Structure &gt; prose. Contracts &gt; pleas.</a:t>
+            </a:r>
+            <a:endParaRPr lang="en-US" sz="1500" dirty="0"/>
+          </a:p>
+          <a:p>
+            <a:pPr marL="342900" indent="-342900">
+              <a:spcAft>
+                <a:spcPts val="600"/>
+              </a:spcAft>
+              <a:buSzPct val="100000"/>
+              <a:buChar char="•"/>
+            </a:pPr>
+            <a:r>
+              <a:rPr lang="en-US" sz="1500" dirty="0">
+                <a:solidFill>
+                  <a:srgbClr val="212121"/>
+                </a:solidFill>
+                <a:latin typeface="Calibri" pitchFamily="34" charset="0"/>
+                <a:ea typeface="Calibri" pitchFamily="34" charset="-122"/>
+                <a:cs typeface="Calibri" pitchFamily="34" charset="-120"/>
+              </a:rPr>
+              <a:t>Iterate against an eval set, not intuition.</a:t>
+            </a:r>
+            <a:endParaRPr lang="en-US" sz="1500" dirty="0"/>
+          </a:p>
+          <a:p>
+            <a:pPr marL="342900" indent="-342900">
+              <a:spcAft>
+                <a:spcPts val="600"/>
+              </a:spcAft>
+              <a:buSzPct val="100000"/>
+              <a:buChar char="•"/>
+            </a:pPr>
+            <a:r>
+              <a:rPr lang="en-US" sz="1500" dirty="0">
+                <a:solidFill>
+                  <a:srgbClr val="212121"/>
+                </a:solidFill>
+                <a:latin typeface="Calibri" pitchFamily="34" charset="0"/>
+                <a:ea typeface="Calibri" pitchFamily="34" charset="-122"/>
+                <a:cs typeface="Calibri" pitchFamily="34" charset="-120"/>
+              </a:rPr>
+              <a:t>Every instruction, tool docstring, and output schema is a prompt.</a:t>
+            </a:r>
+            <a:endParaRPr lang="en-US" sz="1500" dirty="0"/>
+          </a:p>
+        </p:txBody>
+      </p:sp>
+      <p:sp>
+        <p:nvSpPr>
+          <p:cNvPr id="6" name="Shape 4"/>
+          <p:cNvSpPr/>
+          <p:nvPr/>
+        </p:nvSpPr>
+        <p:spPr>
+          <a:xfrm>
+            <a:off x="365760" y="4343400"/>
+            <a:ext cx="8412480" cy="457200"/>
+          </a:xfrm>
+          <a:prstGeom prst="rect">
+            <a:avLst/>
+          </a:prstGeom>
+          <a:solidFill>
+            <a:srgbClr val="CADCFC"/>
+          </a:solidFill>
+          <a:ln/>
+        </p:spPr>
+      </p:sp>
+      <p:sp>
+        <p:nvSpPr>
+          <p:cNvPr id="7" name="Text 5"/>
+          <p:cNvSpPr/>
+          <p:nvPr/>
+        </p:nvSpPr>
+        <p:spPr>
+          <a:xfrm>
+            <a:off x="502920" y="4370832"/>
+            <a:ext cx="8138160" cy="402336"/>
+          </a:xfrm>
+          <a:prstGeom prst="rect">
+            <a:avLst/>
+          </a:prstGeom>
+          <a:noFill/>
+          <a:ln/>
+        </p:spPr>
+        <p:txBody>
+          <a:bodyPr wrap="square" lIns="0" tIns="0" rIns="0" bIns="0" rtlCol="0" anchor="ctr"/>
+          <a:lstStyle/>
+          <a:p>
+            <a:pPr indent="0" marL="0">
+              <a:buNone/>
+            </a:pPr>
+            <a:r>
+              <a:rPr lang="en-US" sz="1600" b="1" dirty="0">
+                <a:solidFill>
+                  <a:srgbClr val="1E2761"/>
+                </a:solidFill>
+                <a:latin typeface="Calibri" pitchFamily="34" charset="0"/>
+                <a:ea typeface="Calibri" pitchFamily="34" charset="-122"/>
+                <a:cs typeface="Calibri" pitchFamily="34" charset="-120"/>
+              </a:rPr>
+              <a:t>Next: </a:t>
+            </a:r>
+            <a:pPr indent="0" marL="0">
+              <a:buNone/>
+            </a:pPr>
+            <a:r>
+              <a:rPr lang="en-US" sz="1600" dirty="0">
+                <a:solidFill>
+                  <a:srgbClr val="1E2761"/>
+                </a:solidFill>
+                <a:latin typeface="Calibri" pitchFamily="34" charset="0"/>
+                <a:ea typeface="Calibri" pitchFamily="34" charset="-122"/>
+                <a:cs typeface="Calibri" pitchFamily="34" charset="-120"/>
+              </a:rPr>
+              <a:t>MAF 101 — the core primitives you'll use through the rest of the workshop.</a:t>
+            </a:r>
+            <a:endParaRPr lang="en-US" sz="1600" dirty="0"/>
           </a:p>
         </p:txBody>
       </p:sp>
@@ -3110,7 +6039,7 @@
                 <a:ea typeface="Calibri" pitchFamily="34" charset="-122"/>
                 <a:cs typeface="Calibri" pitchFamily="34" charset="-120"/>
               </a:rPr>
-              <a:t>Iteration loop</a:t>
+              <a:t>What's actually in the context window?</a:t>
             </a:r>
             <a:endParaRPr lang="en-US" sz="2800" dirty="0"/>
           </a:p>
@@ -3125,7 +6054,46 @@
         <p:spPr>
           <a:xfrm>
             <a:off x="365760" y="1097280"/>
-            <a:ext cx="8412480" cy="3749040"/>
+            <a:ext cx="8412480" cy="457200"/>
+          </a:xfrm>
+          <a:prstGeom prst="rect">
+            <a:avLst/>
+          </a:prstGeom>
+          <a:noFill/>
+          <a:ln/>
+        </p:spPr>
+        <p:txBody>
+          <a:bodyPr wrap="square" rtlCol="0" anchor="ctr"/>
+          <a:lstStyle/>
+          <a:p>
+            <a:pPr indent="0" marL="0">
+              <a:buNone/>
+            </a:pPr>
+            <a:r>
+              <a:rPr lang="en-US" sz="1500" dirty="0">
+                <a:solidFill>
+                  <a:srgbClr val="212121"/>
+                </a:solidFill>
+                <a:latin typeface="Calibri" pitchFamily="34" charset="0"/>
+                <a:ea typeface="Calibri" pitchFamily="34" charset="-122"/>
+                <a:cs typeface="Calibri" pitchFamily="34" charset="-120"/>
+              </a:rPr>
+              <a:t>Prompts are one input. On every turn the model actually sees:</a:t>
+            </a:r>
+            <a:endParaRPr lang="en-US" sz="1500" dirty="0"/>
+          </a:p>
+        </p:txBody>
+      </p:sp>
+      <p:sp>
+        <p:nvSpPr>
+          <p:cNvPr id="6" name="Text 4"/>
+          <p:cNvSpPr/>
+          <p:nvPr/>
+        </p:nvSpPr>
+        <p:spPr>
+          <a:xfrm>
+            <a:off x="365760" y="1554480"/>
+            <a:ext cx="8412480" cy="2560320"/>
           </a:xfrm>
           <a:prstGeom prst="rect">
             <a:avLst/>
@@ -3145,7 +6113,7 @@
               <a:buChar char="•"/>
             </a:pPr>
             <a:r>
-              <a:rPr lang="en-US" sz="1500" dirty="0">
+              <a:rPr lang="en-US" sz="1300" dirty="0">
                 <a:solidFill>
                   <a:srgbClr val="212121"/>
                 </a:solidFill>
@@ -3153,9 +6121,9 @@
                 <a:ea typeface="Calibri" pitchFamily="34" charset="-122"/>
                 <a:cs typeface="Calibri" pitchFamily="34" charset="-120"/>
               </a:rPr>
-              <a:t>Pick a small eval set (5–20 realistic inputs with expected behaviors)</a:t>
-            </a:r>
-            <a:endParaRPr lang="en-US" sz="1500" dirty="0"/>
+              <a:t>System instructions — the agent's persona, rules, output format</a:t>
+            </a:r>
+            <a:endParaRPr lang="en-US" sz="1300" dirty="0"/>
           </a:p>
           <a:p>
             <a:pPr marL="342900" indent="-342900">
@@ -3166,7 +6134,7 @@
               <a:buChar char="•"/>
             </a:pPr>
             <a:r>
-              <a:rPr lang="en-US" sz="1500" dirty="0">
+              <a:rPr lang="en-US" sz="1300" dirty="0">
                 <a:solidFill>
                   <a:srgbClr val="212121"/>
                 </a:solidFill>
@@ -3174,9 +6142,9 @@
                 <a:ea typeface="Calibri" pitchFamily="34" charset="-122"/>
                 <a:cs typeface="Calibri" pitchFamily="34" charset="-120"/>
               </a:rPr>
-              <a:t>Run the current prompt against it</a:t>
-            </a:r>
-            <a:endParaRPr lang="en-US" sz="1500" dirty="0"/>
+              <a:t>The user message — what the human just typed</a:t>
+            </a:r>
+            <a:endParaRPr lang="en-US" sz="1300" dirty="0"/>
           </a:p>
           <a:p>
             <a:pPr marL="342900" indent="-342900">
@@ -3187,7 +6155,7 @@
               <a:buChar char="•"/>
             </a:pPr>
             <a:r>
-              <a:rPr lang="en-US" sz="1500" dirty="0">
+              <a:rPr lang="en-US" sz="1300" dirty="0">
                 <a:solidFill>
                   <a:srgbClr val="212121"/>
                 </a:solidFill>
@@ -3195,9 +6163,9 @@
                 <a:ea typeface="Calibri" pitchFamily="34" charset="-122"/>
                 <a:cs typeface="Calibri" pitchFamily="34" charset="-120"/>
               </a:rPr>
-              <a:t>Read the failures</a:t>
-            </a:r>
-            <a:endParaRPr lang="en-US" sz="1500" dirty="0"/>
+              <a:t>Session history — prior turns, the multi-turn memory</a:t>
+            </a:r>
+            <a:endParaRPr lang="en-US" sz="1300" dirty="0"/>
           </a:p>
           <a:p>
             <a:pPr marL="342900" indent="-342900">
@@ -3208,7 +6176,7 @@
               <a:buChar char="•"/>
             </a:pPr>
             <a:r>
-              <a:rPr lang="en-US" sz="1500" dirty="0">
+              <a:rPr lang="en-US" sz="1300" dirty="0">
                 <a:solidFill>
                   <a:srgbClr val="212121"/>
                 </a:solidFill>
@@ -3216,9 +6184,9 @@
                 <a:ea typeface="Calibri" pitchFamily="34" charset="-122"/>
                 <a:cs typeface="Calibri" pitchFamily="34" charset="-120"/>
               </a:rPr>
-              <a:t>Change one thing</a:t>
-            </a:r>
-            <a:endParaRPr lang="en-US" sz="1500" dirty="0"/>
+              <a:t>Tool outputs — results from any tool the model called</a:t>
+            </a:r>
+            <a:endParaRPr lang="en-US" sz="1300" dirty="0"/>
           </a:p>
           <a:p>
             <a:pPr marL="342900" indent="-342900">
@@ -3229,7 +6197,7 @@
               <a:buChar char="•"/>
             </a:pPr>
             <a:r>
-              <a:rPr lang="en-US" sz="1500" dirty="0">
+              <a:rPr lang="en-US" sz="1300" dirty="0">
                 <a:solidFill>
                   <a:srgbClr val="212121"/>
                 </a:solidFill>
@@ -3237,22 +6205,43 @@
                 <a:ea typeface="Calibri" pitchFamily="34" charset="-122"/>
                 <a:cs typeface="Calibri" pitchFamily="34" charset="-120"/>
               </a:rPr>
-              <a:t>Rerun</a:t>
-            </a:r>
-            <a:endParaRPr lang="en-US" sz="1500" dirty="0"/>
-          </a:p>
-        </p:txBody>
-      </p:sp>
-      <p:sp>
-        <p:nvSpPr>
-          <p:cNvPr id="6" name="Text 4"/>
+              <a:t>Retrieved documents — chunks pulled from RAG / Foundry IQ</a:t>
+            </a:r>
+            <a:endParaRPr lang="en-US" sz="1300" dirty="0"/>
+          </a:p>
+          <a:p>
+            <a:pPr marL="342900" indent="-342900">
+              <a:spcAft>
+                <a:spcPts val="600"/>
+              </a:spcAft>
+              <a:buSzPct val="100000"/>
+              <a:buChar char="•"/>
+            </a:pPr>
+            <a:r>
+              <a:rPr lang="en-US" sz="1300" dirty="0">
+                <a:solidFill>
+                  <a:srgbClr val="212121"/>
+                </a:solidFill>
+                <a:latin typeface="Calibri" pitchFamily="34" charset="0"/>
+                <a:ea typeface="Calibri" pitchFamily="34" charset="-122"/>
+                <a:cs typeface="Calibri" pitchFamily="34" charset="-120"/>
+              </a:rPr>
+              <a:t>Injected context — anything a context provider added (user profile, time, memory)</a:t>
+            </a:r>
+            <a:endParaRPr lang="en-US" sz="1300" dirty="0"/>
+          </a:p>
+        </p:txBody>
+      </p:sp>
+      <p:sp>
+        <p:nvSpPr>
+          <p:cNvPr id="7" name="Text 5"/>
           <p:cNvSpPr/>
           <p:nvPr/>
         </p:nvSpPr>
         <p:spPr>
           <a:xfrm>
-            <a:off x="365760" y="4160520"/>
-            <a:ext cx="8412480" cy="457200"/>
+            <a:off x="365760" y="4206240"/>
+            <a:ext cx="8412480" cy="640080"/>
           </a:xfrm>
           <a:prstGeom prst="rect">
             <a:avLst/>
@@ -3268,7 +6257,46 @@
               <a:buNone/>
             </a:pPr>
             <a:r>
-              <a:rPr lang="en-US" sz="1400" i="1" dirty="0">
+              <a:rPr lang="en-US" sz="1400" b="1" i="1" dirty="0">
+                <a:solidFill>
+                  <a:srgbClr val="1E2761"/>
+                </a:solidFill>
+                <a:latin typeface="Calibri" pitchFamily="34" charset="0"/>
+                <a:ea typeface="Calibri" pitchFamily="34" charset="-122"/>
+                <a:cs typeface="Calibri" pitchFamily="34" charset="-120"/>
+              </a:rPr>
+              <a:t>The system prompt is what you write once. Everything else is what you have to design. That's context engineering.</a:t>
+            </a:r>
+            <a:endParaRPr lang="en-US" sz="1400" dirty="0"/>
+          </a:p>
+        </p:txBody>
+      </p:sp>
+      <p:sp>
+        <p:nvSpPr>
+          <p:cNvPr id="8" name="Text 6"/>
+          <p:cNvSpPr/>
+          <p:nvPr/>
+        </p:nvSpPr>
+        <p:spPr>
+          <a:xfrm>
+            <a:off x="365760" y="4937760"/>
+            <a:ext cx="8412480" cy="228600"/>
+          </a:xfrm>
+          <a:prstGeom prst="rect">
+            <a:avLst/>
+          </a:prstGeom>
+          <a:noFill/>
+          <a:ln/>
+        </p:spPr>
+        <p:txBody>
+          <a:bodyPr wrap="square" rtlCol="0" anchor="ctr"/>
+          <a:lstStyle/>
+          <a:p>
+            <a:pPr indent="0" marL="0">
+              <a:buNone/>
+            </a:pPr>
+            <a:r>
+              <a:rPr lang="en-US" sz="900" i="1" dirty="0">
                 <a:solidFill>
                   <a:srgbClr val="6B7280"/>
                 </a:solidFill>
@@ -3276,9 +6304,9 @@
                 <a:ea typeface="Calibri" pitchFamily="34" charset="-122"/>
                 <a:cs typeface="Calibri" pitchFamily="34" charset="-120"/>
               </a:rPr>
-              <a:t>You'll see this loop again on Day 2 (retrieval eval) and Day 4 (workflow eval). The habit starts today.</a:t>
-            </a:r>
-            <a:endParaRPr lang="en-US" sz="1400" dirty="0"/>
+              <a:t>Source: Microsoft Learn · aka.ms/agent-framework/journey/adding-context-providers</a:t>
+            </a:r>
+            <a:endParaRPr lang="en-US" sz="900" dirty="0"/>
           </a:p>
         </p:txBody>
       </p:sp>
@@ -3406,7 +6434,7 @@
                 <a:ea typeface="Calibri" pitchFamily="34" charset="-122"/>
                 <a:cs typeface="Calibri" pitchFamily="34" charset="-120"/>
               </a:rPr>
-              <a:t>Prompts inside MAF</a:t>
+              <a:t>Two ways to get information into the model</a:t>
             </a:r>
             <a:endParaRPr lang="en-US" sz="2800" dirty="0"/>
           </a:p>
@@ -3414,39 +6442,1320 @@
       </p:sp>
       <p:sp>
         <p:nvSpPr>
-          <p:cNvPr id="5" name="Shape 3"/>
+          <p:cNvPr id="5" name="Text 3"/>
           <p:cNvSpPr/>
           <p:nvPr/>
         </p:nvSpPr>
         <p:spPr>
           <a:xfrm>
             <a:off x="365760" y="1097280"/>
-            <a:ext cx="8412480" cy="3474720"/>
-          </a:xfrm>
-          <a:prstGeom prst="rect">
-            <a:avLst/>
-          </a:prstGeom>
-          <a:solidFill>
-            <a:srgbClr val="F3F4F6"/>
-          </a:solidFill>
-          <a:ln w="6350">
-            <a:solidFill>
-              <a:srgbClr val="D1D5DB"/>
-            </a:solidFill>
-            <a:prstDash val="solid"/>
-          </a:ln>
-        </p:spPr>
-      </p:sp>
-      <p:sp>
-        <p:nvSpPr>
-          <p:cNvPr id="6" name="Text 4"/>
+            <a:ext cx="8412480" cy="457200"/>
+          </a:xfrm>
+          <a:prstGeom prst="rect">
+            <a:avLst/>
+          </a:prstGeom>
+          <a:noFill/>
+          <a:ln/>
+        </p:spPr>
+        <p:txBody>
+          <a:bodyPr wrap="square" rtlCol="0" anchor="ctr"/>
+          <a:lstStyle/>
+          <a:p>
+            <a:pPr indent="0" marL="0">
+              <a:buNone/>
+            </a:pPr>
+            <a:r>
+              <a:rPr lang="en-US" sz="1400" dirty="0">
+                <a:solidFill>
+                  <a:srgbClr val="212121"/>
+                </a:solidFill>
+                <a:latin typeface="Calibri" pitchFamily="34" charset="0"/>
+                <a:ea typeface="Calibri" pitchFamily="34" charset="-122"/>
+                <a:cs typeface="Calibri" pitchFamily="34" charset="-120"/>
+              </a:rPr>
+              <a:t>Not everything belongs in the prompt. MAF gives you two distinct mechanisms:</a:t>
+            </a:r>
+            <a:endParaRPr lang="en-US" sz="1400" dirty="0"/>
+          </a:p>
+        </p:txBody>
+      </p:sp>
+      <p:graphicFrame>
+        <p:nvGraphicFramePr>
+          <p:cNvPr id="8" name="Table 0"/>
+          <p:cNvGraphicFramePr>
+            <a:graphicFrameLocks noGrp="1"/>
+          </p:cNvGraphicFramePr>
+          <p:nvPr>
+            <p:extLst>
+              <p:ext uri="{D42A27DB-BD31-4B8C-83A1-F6EECF244321}">
+                <p14:modId xmlns:p14="http://schemas.microsoft.com/office/powerpoint/2010/main" val="1579011935"/>
+              </p:ext>
+            </p:extLst>
+          </p:nvPr>
+        </p:nvGraphicFramePr>
+        <p:xfrm>
+          <a:off x="365760" y="1097280"/>
+          <a:ext cx="8412480" cy="914400"/>
+        </p:xfrm>
+        <a:graphic>
+          <a:graphicData uri="http://schemas.openxmlformats.org/drawingml/2006/table">
+            <a:tbl>
+              <a:tblPr/>
+              <a:tblGrid>
+                <a:gridCol w="1371600"/>
+                <a:gridCol w="3383280"/>
+                <a:gridCol w="3657600"/>
+              </a:tblGrid>
+              <a:tr h="502920">
+                <a:tc>
+                  <a:txBody>
+                    <a:bodyPr/>
+                    <a:lstStyle/>
+                    <a:p>
+                      <a:pPr indent="0" marL="0">
+                        <a:buNone/>
+                      </a:pPr>
+                      <a:r>
+                        <a:rPr lang="en-US" sz="1100" b="1" dirty="0">
+                          <a:solidFill>
+                            <a:srgbClr val="FFFFFF"/>
+                          </a:solidFill>
+                          <a:latin typeface="Calibri" pitchFamily="34" charset="0"/>
+                          <a:ea typeface="Calibri" pitchFamily="34" charset="-122"/>
+                          <a:cs typeface="Calibri" pitchFamily="34" charset="-120"/>
+                        </a:rPr>
+                        <a:t>Aspect</a:t>
+                      </a:r>
+                      <a:endParaRPr lang="en-US" sz="1100" dirty="0">
+                        <a:latin typeface="Calibri" charset="0"/>
+                        <a:ea typeface="Calibri" charset="0"/>
+                        <a:cs typeface="Calibri" charset="0"/>
+                      </a:endParaRPr>
+                    </a:p>
+                  </a:txBody>
+                  <a:tcPr marL="54864" marR="54864" marT="54864" marB="54864" anchor="ctr">
+                    <a:lnL w="6350" cap="flat" cmpd="sng" algn="ctr">
+                      <a:solidFill>
+                        <a:srgbClr val="D1D5DB"/>
+                      </a:solidFill>
+                      <a:prstDash val="solid"/>
+                      <a:round/>
+                      <a:headEnd type="none" w="med" len="med"/>
+                      <a:tailEnd type="none" w="med" len="med"/>
+                    </a:lnL>
+                    <a:lnR w="6350" cap="flat" cmpd="sng" algn="ctr">
+                      <a:solidFill>
+                        <a:srgbClr val="D1D5DB"/>
+                      </a:solidFill>
+                      <a:prstDash val="solid"/>
+                      <a:round/>
+                      <a:headEnd type="none" w="med" len="med"/>
+                      <a:tailEnd type="none" w="med" len="med"/>
+                    </a:lnR>
+                    <a:lnT w="6350" cap="flat" cmpd="sng" algn="ctr">
+                      <a:solidFill>
+                        <a:srgbClr val="D1D5DB"/>
+                      </a:solidFill>
+                      <a:prstDash val="solid"/>
+                      <a:round/>
+                      <a:headEnd type="none" w="med" len="med"/>
+                      <a:tailEnd type="none" w="med" len="med"/>
+                    </a:lnT>
+                    <a:lnB w="6350" cap="flat" cmpd="sng" algn="ctr">
+                      <a:solidFill>
+                        <a:srgbClr val="D1D5DB"/>
+                      </a:solidFill>
+                      <a:prstDash val="solid"/>
+                      <a:round/>
+                      <a:headEnd type="none" w="med" len="med"/>
+                      <a:tailEnd type="none" w="med" len="med"/>
+                    </a:lnB>
+                    <a:solidFill>
+                      <a:srgbClr val="1E2761"/>
+                    </a:solidFill>
+                  </a:tcPr>
+                </a:tc>
+                <a:tc>
+                  <a:txBody>
+                    <a:bodyPr/>
+                    <a:lstStyle/>
+                    <a:p>
+                      <a:pPr indent="0" marL="0">
+                        <a:buNone/>
+                      </a:pPr>
+                      <a:r>
+                        <a:rPr lang="en-US" sz="1100" b="1" dirty="0">
+                          <a:solidFill>
+                            <a:srgbClr val="FFFFFF"/>
+                          </a:solidFill>
+                          <a:latin typeface="Calibri" pitchFamily="34" charset="0"/>
+                          <a:ea typeface="Calibri" pitchFamily="34" charset="-122"/>
+                          <a:cs typeface="Calibri" pitchFamily="34" charset="-120"/>
+                        </a:rPr>
+                        <a:t>Tools</a:t>
+                      </a:r>
+                      <a:endParaRPr lang="en-US" sz="1100" dirty="0">
+                        <a:latin typeface="Calibri" charset="0"/>
+                        <a:ea typeface="Calibri" charset="0"/>
+                        <a:cs typeface="Calibri" charset="0"/>
+                      </a:endParaRPr>
+                    </a:p>
+                  </a:txBody>
+                  <a:tcPr marL="54864" marR="54864" marT="54864" marB="54864" anchor="ctr">
+                    <a:lnL w="6350" cap="flat" cmpd="sng" algn="ctr">
+                      <a:solidFill>
+                        <a:srgbClr val="D1D5DB"/>
+                      </a:solidFill>
+                      <a:prstDash val="solid"/>
+                      <a:round/>
+                      <a:headEnd type="none" w="med" len="med"/>
+                      <a:tailEnd type="none" w="med" len="med"/>
+                    </a:lnL>
+                    <a:lnR w="6350" cap="flat" cmpd="sng" algn="ctr">
+                      <a:solidFill>
+                        <a:srgbClr val="D1D5DB"/>
+                      </a:solidFill>
+                      <a:prstDash val="solid"/>
+                      <a:round/>
+                      <a:headEnd type="none" w="med" len="med"/>
+                      <a:tailEnd type="none" w="med" len="med"/>
+                    </a:lnR>
+                    <a:lnT w="6350" cap="flat" cmpd="sng" algn="ctr">
+                      <a:solidFill>
+                        <a:srgbClr val="D1D5DB"/>
+                      </a:solidFill>
+                      <a:prstDash val="solid"/>
+                      <a:round/>
+                      <a:headEnd type="none" w="med" len="med"/>
+                      <a:tailEnd type="none" w="med" len="med"/>
+                    </a:lnT>
+                    <a:lnB w="6350" cap="flat" cmpd="sng" algn="ctr">
+                      <a:solidFill>
+                        <a:srgbClr val="D1D5DB"/>
+                      </a:solidFill>
+                      <a:prstDash val="solid"/>
+                      <a:round/>
+                      <a:headEnd type="none" w="med" len="med"/>
+                      <a:tailEnd type="none" w="med" len="med"/>
+                    </a:lnB>
+                    <a:solidFill>
+                      <a:srgbClr val="1E2761"/>
+                    </a:solidFill>
+                  </a:tcPr>
+                </a:tc>
+                <a:tc>
+                  <a:txBody>
+                    <a:bodyPr/>
+                    <a:lstStyle/>
+                    <a:p>
+                      <a:pPr indent="0" marL="0">
+                        <a:buNone/>
+                      </a:pPr>
+                      <a:r>
+                        <a:rPr lang="en-US" sz="1100" b="1" dirty="0">
+                          <a:solidFill>
+                            <a:srgbClr val="FFFFFF"/>
+                          </a:solidFill>
+                          <a:latin typeface="Calibri" pitchFamily="34" charset="0"/>
+                          <a:ea typeface="Calibri" pitchFamily="34" charset="-122"/>
+                          <a:cs typeface="Calibri" pitchFamily="34" charset="-120"/>
+                        </a:rPr>
+                        <a:t>Context providers</a:t>
+                      </a:r>
+                      <a:endParaRPr lang="en-US" sz="1100" dirty="0">
+                        <a:latin typeface="Calibri" charset="0"/>
+                        <a:ea typeface="Calibri" charset="0"/>
+                        <a:cs typeface="Calibri" charset="0"/>
+                      </a:endParaRPr>
+                    </a:p>
+                  </a:txBody>
+                  <a:tcPr marL="54864" marR="54864" marT="54864" marB="54864" anchor="ctr">
+                    <a:lnL w="6350" cap="flat" cmpd="sng" algn="ctr">
+                      <a:solidFill>
+                        <a:srgbClr val="D1D5DB"/>
+                      </a:solidFill>
+                      <a:prstDash val="solid"/>
+                      <a:round/>
+                      <a:headEnd type="none" w="med" len="med"/>
+                      <a:tailEnd type="none" w="med" len="med"/>
+                    </a:lnL>
+                    <a:lnR w="6350" cap="flat" cmpd="sng" algn="ctr">
+                      <a:solidFill>
+                        <a:srgbClr val="D1D5DB"/>
+                      </a:solidFill>
+                      <a:prstDash val="solid"/>
+                      <a:round/>
+                      <a:headEnd type="none" w="med" len="med"/>
+                      <a:tailEnd type="none" w="med" len="med"/>
+                    </a:lnR>
+                    <a:lnT w="6350" cap="flat" cmpd="sng" algn="ctr">
+                      <a:solidFill>
+                        <a:srgbClr val="D1D5DB"/>
+                      </a:solidFill>
+                      <a:prstDash val="solid"/>
+                      <a:round/>
+                      <a:headEnd type="none" w="med" len="med"/>
+                      <a:tailEnd type="none" w="med" len="med"/>
+                    </a:lnT>
+                    <a:lnB w="6350" cap="flat" cmpd="sng" algn="ctr">
+                      <a:solidFill>
+                        <a:srgbClr val="D1D5DB"/>
+                      </a:solidFill>
+                      <a:prstDash val="solid"/>
+                      <a:round/>
+                      <a:headEnd type="none" w="med" len="med"/>
+                      <a:tailEnd type="none" w="med" len="med"/>
+                    </a:lnB>
+                    <a:solidFill>
+                      <a:srgbClr val="1E2761"/>
+                    </a:solidFill>
+                  </a:tcPr>
+                </a:tc>
+              </a:tr>
+              <a:tr h="502920">
+                <a:tc>
+                  <a:txBody>
+                    <a:bodyPr/>
+                    <a:lstStyle/>
+                    <a:p>
+                      <a:pPr indent="0" marL="0">
+                        <a:buNone/>
+                      </a:pPr>
+                      <a:r>
+                        <a:rPr lang="en-US" sz="1100" dirty="0">
+                          <a:solidFill>
+                            <a:srgbClr val="212121"/>
+                          </a:solidFill>
+                          <a:latin typeface="Calibri" pitchFamily="34" charset="0"/>
+                          <a:ea typeface="Calibri" pitchFamily="34" charset="-122"/>
+                          <a:cs typeface="Calibri" pitchFamily="34" charset="-120"/>
+                        </a:rPr>
+                        <a:t>Trigger</a:t>
+                      </a:r>
+                      <a:endParaRPr lang="en-US" sz="1100" dirty="0">
+                        <a:latin typeface="Calibri" charset="0"/>
+                        <a:ea typeface="Calibri" charset="0"/>
+                        <a:cs typeface="Calibri" charset="0"/>
+                      </a:endParaRPr>
+                    </a:p>
+                  </a:txBody>
+                  <a:tcPr marL="54864" marR="54864" marT="54864" marB="54864" anchor="ctr">
+                    <a:lnL w="6350" cap="flat" cmpd="sng" algn="ctr">
+                      <a:solidFill>
+                        <a:srgbClr val="D1D5DB"/>
+                      </a:solidFill>
+                      <a:prstDash val="solid"/>
+                      <a:round/>
+                      <a:headEnd type="none" w="med" len="med"/>
+                      <a:tailEnd type="none" w="med" len="med"/>
+                    </a:lnL>
+                    <a:lnR w="6350" cap="flat" cmpd="sng" algn="ctr">
+                      <a:solidFill>
+                        <a:srgbClr val="D1D5DB"/>
+                      </a:solidFill>
+                      <a:prstDash val="solid"/>
+                      <a:round/>
+                      <a:headEnd type="none" w="med" len="med"/>
+                      <a:tailEnd type="none" w="med" len="med"/>
+                    </a:lnR>
+                    <a:lnT w="6350" cap="flat" cmpd="sng" algn="ctr">
+                      <a:solidFill>
+                        <a:srgbClr val="D1D5DB"/>
+                      </a:solidFill>
+                      <a:prstDash val="solid"/>
+                      <a:round/>
+                      <a:headEnd type="none" w="med" len="med"/>
+                      <a:tailEnd type="none" w="med" len="med"/>
+                    </a:lnT>
+                    <a:lnB w="6350" cap="flat" cmpd="sng" algn="ctr">
+                      <a:solidFill>
+                        <a:srgbClr val="D1D5DB"/>
+                      </a:solidFill>
+                      <a:prstDash val="solid"/>
+                      <a:round/>
+                      <a:headEnd type="none" w="med" len="med"/>
+                      <a:tailEnd type="none" w="med" len="med"/>
+                    </a:lnB>
+                    <a:solidFill>
+                      <a:srgbClr val="FFFFFF"/>
+                    </a:solidFill>
+                  </a:tcPr>
+                </a:tc>
+                <a:tc>
+                  <a:txBody>
+                    <a:bodyPr/>
+                    <a:lstStyle/>
+                    <a:p>
+                      <a:pPr indent="0" marL="0">
+                        <a:buNone/>
+                      </a:pPr>
+                      <a:r>
+                        <a:rPr lang="en-US" sz="1100" dirty="0">
+                          <a:solidFill>
+                            <a:srgbClr val="212121"/>
+                          </a:solidFill>
+                          <a:latin typeface="Calibri" pitchFamily="34" charset="0"/>
+                          <a:ea typeface="Calibri" pitchFamily="34" charset="-122"/>
+                          <a:cs typeface="Calibri" pitchFamily="34" charset="-120"/>
+                        </a:rPr>
+                        <a:t>Reactive — model decides when to call</a:t>
+                      </a:r>
+                      <a:endParaRPr lang="en-US" sz="1100" dirty="0">
+                        <a:latin typeface="Calibri" charset="0"/>
+                        <a:ea typeface="Calibri" charset="0"/>
+                        <a:cs typeface="Calibri" charset="0"/>
+                      </a:endParaRPr>
+                    </a:p>
+                  </a:txBody>
+                  <a:tcPr marL="54864" marR="54864" marT="54864" marB="54864" anchor="ctr">
+                    <a:lnL w="6350" cap="flat" cmpd="sng" algn="ctr">
+                      <a:solidFill>
+                        <a:srgbClr val="D1D5DB"/>
+                      </a:solidFill>
+                      <a:prstDash val="solid"/>
+                      <a:round/>
+                      <a:headEnd type="none" w="med" len="med"/>
+                      <a:tailEnd type="none" w="med" len="med"/>
+                    </a:lnL>
+                    <a:lnR w="6350" cap="flat" cmpd="sng" algn="ctr">
+                      <a:solidFill>
+                        <a:srgbClr val="D1D5DB"/>
+                      </a:solidFill>
+                      <a:prstDash val="solid"/>
+                      <a:round/>
+                      <a:headEnd type="none" w="med" len="med"/>
+                      <a:tailEnd type="none" w="med" len="med"/>
+                    </a:lnR>
+                    <a:lnT w="6350" cap="flat" cmpd="sng" algn="ctr">
+                      <a:solidFill>
+                        <a:srgbClr val="D1D5DB"/>
+                      </a:solidFill>
+                      <a:prstDash val="solid"/>
+                      <a:round/>
+                      <a:headEnd type="none" w="med" len="med"/>
+                      <a:tailEnd type="none" w="med" len="med"/>
+                    </a:lnT>
+                    <a:lnB w="6350" cap="flat" cmpd="sng" algn="ctr">
+                      <a:solidFill>
+                        <a:srgbClr val="D1D5DB"/>
+                      </a:solidFill>
+                      <a:prstDash val="solid"/>
+                      <a:round/>
+                      <a:headEnd type="none" w="med" len="med"/>
+                      <a:tailEnd type="none" w="med" len="med"/>
+                    </a:lnB>
+                    <a:solidFill>
+                      <a:srgbClr val="FFFFFF"/>
+                    </a:solidFill>
+                  </a:tcPr>
+                </a:tc>
+                <a:tc>
+                  <a:txBody>
+                    <a:bodyPr/>
+                    <a:lstStyle/>
+                    <a:p>
+                      <a:pPr indent="0" marL="0">
+                        <a:buNone/>
+                      </a:pPr>
+                      <a:r>
+                        <a:rPr lang="en-US" sz="1100" dirty="0">
+                          <a:solidFill>
+                            <a:srgbClr val="212121"/>
+                          </a:solidFill>
+                          <a:latin typeface="Calibri" pitchFamily="34" charset="0"/>
+                          <a:ea typeface="Calibri" pitchFamily="34" charset="-122"/>
+                          <a:cs typeface="Calibri" pitchFamily="34" charset="-120"/>
+                        </a:rPr>
+                        <a:t>Proactive — runs on every invocation</a:t>
+                      </a:r>
+                      <a:endParaRPr lang="en-US" sz="1100" dirty="0">
+                        <a:latin typeface="Calibri" charset="0"/>
+                        <a:ea typeface="Calibri" charset="0"/>
+                        <a:cs typeface="Calibri" charset="0"/>
+                      </a:endParaRPr>
+                    </a:p>
+                  </a:txBody>
+                  <a:tcPr marL="54864" marR="54864" marT="54864" marB="54864" anchor="ctr">
+                    <a:lnL w="6350" cap="flat" cmpd="sng" algn="ctr">
+                      <a:solidFill>
+                        <a:srgbClr val="D1D5DB"/>
+                      </a:solidFill>
+                      <a:prstDash val="solid"/>
+                      <a:round/>
+                      <a:headEnd type="none" w="med" len="med"/>
+                      <a:tailEnd type="none" w="med" len="med"/>
+                    </a:lnL>
+                    <a:lnR w="6350" cap="flat" cmpd="sng" algn="ctr">
+                      <a:solidFill>
+                        <a:srgbClr val="D1D5DB"/>
+                      </a:solidFill>
+                      <a:prstDash val="solid"/>
+                      <a:round/>
+                      <a:headEnd type="none" w="med" len="med"/>
+                      <a:tailEnd type="none" w="med" len="med"/>
+                    </a:lnR>
+                    <a:lnT w="6350" cap="flat" cmpd="sng" algn="ctr">
+                      <a:solidFill>
+                        <a:srgbClr val="D1D5DB"/>
+                      </a:solidFill>
+                      <a:prstDash val="solid"/>
+                      <a:round/>
+                      <a:headEnd type="none" w="med" len="med"/>
+                      <a:tailEnd type="none" w="med" len="med"/>
+                    </a:lnT>
+                    <a:lnB w="6350" cap="flat" cmpd="sng" algn="ctr">
+                      <a:solidFill>
+                        <a:srgbClr val="D1D5DB"/>
+                      </a:solidFill>
+                      <a:prstDash val="solid"/>
+                      <a:round/>
+                      <a:headEnd type="none" w="med" len="med"/>
+                      <a:tailEnd type="none" w="med" len="med"/>
+                    </a:lnB>
+                    <a:solidFill>
+                      <a:srgbClr val="FFFFFF"/>
+                    </a:solidFill>
+                  </a:tcPr>
+                </a:tc>
+              </a:tr>
+              <a:tr h="502920">
+                <a:tc>
+                  <a:txBody>
+                    <a:bodyPr/>
+                    <a:lstStyle/>
+                    <a:p>
+                      <a:pPr indent="0" marL="0">
+                        <a:buNone/>
+                      </a:pPr>
+                      <a:r>
+                        <a:rPr lang="en-US" sz="1100" dirty="0">
+                          <a:solidFill>
+                            <a:srgbClr val="212121"/>
+                          </a:solidFill>
+                          <a:latin typeface="Calibri" pitchFamily="34" charset="0"/>
+                          <a:ea typeface="Calibri" pitchFamily="34" charset="-122"/>
+                          <a:cs typeface="Calibri" pitchFamily="34" charset="-120"/>
+                        </a:rPr>
+                        <a:t>Control</a:t>
+                      </a:r>
+                      <a:endParaRPr lang="en-US" sz="1100" dirty="0">
+                        <a:latin typeface="Calibri" charset="0"/>
+                        <a:ea typeface="Calibri" charset="0"/>
+                        <a:cs typeface="Calibri" charset="0"/>
+                      </a:endParaRPr>
+                    </a:p>
+                  </a:txBody>
+                  <a:tcPr marL="54864" marR="54864" marT="54864" marB="54864" anchor="ctr">
+                    <a:lnL w="6350" cap="flat" cmpd="sng" algn="ctr">
+                      <a:solidFill>
+                        <a:srgbClr val="D1D5DB"/>
+                      </a:solidFill>
+                      <a:prstDash val="solid"/>
+                      <a:round/>
+                      <a:headEnd type="none" w="med" len="med"/>
+                      <a:tailEnd type="none" w="med" len="med"/>
+                    </a:lnL>
+                    <a:lnR w="6350" cap="flat" cmpd="sng" algn="ctr">
+                      <a:solidFill>
+                        <a:srgbClr val="D1D5DB"/>
+                      </a:solidFill>
+                      <a:prstDash val="solid"/>
+                      <a:round/>
+                      <a:headEnd type="none" w="med" len="med"/>
+                      <a:tailEnd type="none" w="med" len="med"/>
+                    </a:lnR>
+                    <a:lnT w="6350" cap="flat" cmpd="sng" algn="ctr">
+                      <a:solidFill>
+                        <a:srgbClr val="D1D5DB"/>
+                      </a:solidFill>
+                      <a:prstDash val="solid"/>
+                      <a:round/>
+                      <a:headEnd type="none" w="med" len="med"/>
+                      <a:tailEnd type="none" w="med" len="med"/>
+                    </a:lnT>
+                    <a:lnB w="6350" cap="flat" cmpd="sng" algn="ctr">
+                      <a:solidFill>
+                        <a:srgbClr val="D1D5DB"/>
+                      </a:solidFill>
+                      <a:prstDash val="solid"/>
+                      <a:round/>
+                      <a:headEnd type="none" w="med" len="med"/>
+                      <a:tailEnd type="none" w="med" len="med"/>
+                    </a:lnB>
+                    <a:solidFill>
+                      <a:srgbClr val="F3F4F6"/>
+                    </a:solidFill>
+                  </a:tcPr>
+                </a:tc>
+                <a:tc>
+                  <a:txBody>
+                    <a:bodyPr/>
+                    <a:lstStyle/>
+                    <a:p>
+                      <a:pPr indent="0" marL="0">
+                        <a:buNone/>
+                      </a:pPr>
+                      <a:r>
+                        <a:rPr lang="en-US" sz="1100" dirty="0">
+                          <a:solidFill>
+                            <a:srgbClr val="212121"/>
+                          </a:solidFill>
+                          <a:latin typeface="Calibri" pitchFamily="34" charset="0"/>
+                          <a:ea typeface="Calibri" pitchFamily="34" charset="-122"/>
+                          <a:cs typeface="Calibri" pitchFamily="34" charset="-120"/>
+                        </a:rPr>
+                        <a:t>Model-driven (which tool, when, args)</a:t>
+                      </a:r>
+                      <a:endParaRPr lang="en-US" sz="1100" dirty="0">
+                        <a:latin typeface="Calibri" charset="0"/>
+                        <a:ea typeface="Calibri" charset="0"/>
+                        <a:cs typeface="Calibri" charset="0"/>
+                      </a:endParaRPr>
+                    </a:p>
+                  </a:txBody>
+                  <a:tcPr marL="54864" marR="54864" marT="54864" marB="54864" anchor="ctr">
+                    <a:lnL w="6350" cap="flat" cmpd="sng" algn="ctr">
+                      <a:solidFill>
+                        <a:srgbClr val="D1D5DB"/>
+                      </a:solidFill>
+                      <a:prstDash val="solid"/>
+                      <a:round/>
+                      <a:headEnd type="none" w="med" len="med"/>
+                      <a:tailEnd type="none" w="med" len="med"/>
+                    </a:lnL>
+                    <a:lnR w="6350" cap="flat" cmpd="sng" algn="ctr">
+                      <a:solidFill>
+                        <a:srgbClr val="D1D5DB"/>
+                      </a:solidFill>
+                      <a:prstDash val="solid"/>
+                      <a:round/>
+                      <a:headEnd type="none" w="med" len="med"/>
+                      <a:tailEnd type="none" w="med" len="med"/>
+                    </a:lnR>
+                    <a:lnT w="6350" cap="flat" cmpd="sng" algn="ctr">
+                      <a:solidFill>
+                        <a:srgbClr val="D1D5DB"/>
+                      </a:solidFill>
+                      <a:prstDash val="solid"/>
+                      <a:round/>
+                      <a:headEnd type="none" w="med" len="med"/>
+                      <a:tailEnd type="none" w="med" len="med"/>
+                    </a:lnT>
+                    <a:lnB w="6350" cap="flat" cmpd="sng" algn="ctr">
+                      <a:solidFill>
+                        <a:srgbClr val="D1D5DB"/>
+                      </a:solidFill>
+                      <a:prstDash val="solid"/>
+                      <a:round/>
+                      <a:headEnd type="none" w="med" len="med"/>
+                      <a:tailEnd type="none" w="med" len="med"/>
+                    </a:lnB>
+                    <a:solidFill>
+                      <a:srgbClr val="F3F4F6"/>
+                    </a:solidFill>
+                  </a:tcPr>
+                </a:tc>
+                <a:tc>
+                  <a:txBody>
+                    <a:bodyPr/>
+                    <a:lstStyle/>
+                    <a:p>
+                      <a:pPr indent="0" marL="0">
+                        <a:buNone/>
+                      </a:pPr>
+                      <a:r>
+                        <a:rPr lang="en-US" sz="1100" dirty="0">
+                          <a:solidFill>
+                            <a:srgbClr val="212121"/>
+                          </a:solidFill>
+                          <a:latin typeface="Calibri" pitchFamily="34" charset="0"/>
+                          <a:ea typeface="Calibri" pitchFamily="34" charset="-122"/>
+                          <a:cs typeface="Calibri" pitchFamily="34" charset="-120"/>
+                        </a:rPr>
+                        <a:t>Developer-driven (always available)</a:t>
+                      </a:r>
+                      <a:endParaRPr lang="en-US" sz="1100" dirty="0">
+                        <a:latin typeface="Calibri" charset="0"/>
+                        <a:ea typeface="Calibri" charset="0"/>
+                        <a:cs typeface="Calibri" charset="0"/>
+                      </a:endParaRPr>
+                    </a:p>
+                  </a:txBody>
+                  <a:tcPr marL="54864" marR="54864" marT="54864" marB="54864" anchor="ctr">
+                    <a:lnL w="6350" cap="flat" cmpd="sng" algn="ctr">
+                      <a:solidFill>
+                        <a:srgbClr val="D1D5DB"/>
+                      </a:solidFill>
+                      <a:prstDash val="solid"/>
+                      <a:round/>
+                      <a:headEnd type="none" w="med" len="med"/>
+                      <a:tailEnd type="none" w="med" len="med"/>
+                    </a:lnL>
+                    <a:lnR w="6350" cap="flat" cmpd="sng" algn="ctr">
+                      <a:solidFill>
+                        <a:srgbClr val="D1D5DB"/>
+                      </a:solidFill>
+                      <a:prstDash val="solid"/>
+                      <a:round/>
+                      <a:headEnd type="none" w="med" len="med"/>
+                      <a:tailEnd type="none" w="med" len="med"/>
+                    </a:lnR>
+                    <a:lnT w="6350" cap="flat" cmpd="sng" algn="ctr">
+                      <a:solidFill>
+                        <a:srgbClr val="D1D5DB"/>
+                      </a:solidFill>
+                      <a:prstDash val="solid"/>
+                      <a:round/>
+                      <a:headEnd type="none" w="med" len="med"/>
+                      <a:tailEnd type="none" w="med" len="med"/>
+                    </a:lnT>
+                    <a:lnB w="6350" cap="flat" cmpd="sng" algn="ctr">
+                      <a:solidFill>
+                        <a:srgbClr val="D1D5DB"/>
+                      </a:solidFill>
+                      <a:prstDash val="solid"/>
+                      <a:round/>
+                      <a:headEnd type="none" w="med" len="med"/>
+                      <a:tailEnd type="none" w="med" len="med"/>
+                    </a:lnB>
+                    <a:solidFill>
+                      <a:srgbClr val="F3F4F6"/>
+                    </a:solidFill>
+                  </a:tcPr>
+                </a:tc>
+              </a:tr>
+              <a:tr h="502920">
+                <a:tc>
+                  <a:txBody>
+                    <a:bodyPr/>
+                    <a:lstStyle/>
+                    <a:p>
+                      <a:pPr indent="0" marL="0">
+                        <a:buNone/>
+                      </a:pPr>
+                      <a:r>
+                        <a:rPr lang="en-US" sz="1100" dirty="0">
+                          <a:solidFill>
+                            <a:srgbClr val="212121"/>
+                          </a:solidFill>
+                          <a:latin typeface="Calibri" pitchFamily="34" charset="0"/>
+                          <a:ea typeface="Calibri" pitchFamily="34" charset="-122"/>
+                          <a:cs typeface="Calibri" pitchFamily="34" charset="-120"/>
+                        </a:rPr>
+                        <a:t>Visibility</a:t>
+                      </a:r>
+                      <a:endParaRPr lang="en-US" sz="1100" dirty="0">
+                        <a:latin typeface="Calibri" charset="0"/>
+                        <a:ea typeface="Calibri" charset="0"/>
+                        <a:cs typeface="Calibri" charset="0"/>
+                      </a:endParaRPr>
+                    </a:p>
+                  </a:txBody>
+                  <a:tcPr marL="54864" marR="54864" marT="54864" marB="54864" anchor="ctr">
+                    <a:lnL w="6350" cap="flat" cmpd="sng" algn="ctr">
+                      <a:solidFill>
+                        <a:srgbClr val="D1D5DB"/>
+                      </a:solidFill>
+                      <a:prstDash val="solid"/>
+                      <a:round/>
+                      <a:headEnd type="none" w="med" len="med"/>
+                      <a:tailEnd type="none" w="med" len="med"/>
+                    </a:lnL>
+                    <a:lnR w="6350" cap="flat" cmpd="sng" algn="ctr">
+                      <a:solidFill>
+                        <a:srgbClr val="D1D5DB"/>
+                      </a:solidFill>
+                      <a:prstDash val="solid"/>
+                      <a:round/>
+                      <a:headEnd type="none" w="med" len="med"/>
+                      <a:tailEnd type="none" w="med" len="med"/>
+                    </a:lnR>
+                    <a:lnT w="6350" cap="flat" cmpd="sng" algn="ctr">
+                      <a:solidFill>
+                        <a:srgbClr val="D1D5DB"/>
+                      </a:solidFill>
+                      <a:prstDash val="solid"/>
+                      <a:round/>
+                      <a:headEnd type="none" w="med" len="med"/>
+                      <a:tailEnd type="none" w="med" len="med"/>
+                    </a:lnT>
+                    <a:lnB w="6350" cap="flat" cmpd="sng" algn="ctr">
+                      <a:solidFill>
+                        <a:srgbClr val="D1D5DB"/>
+                      </a:solidFill>
+                      <a:prstDash val="solid"/>
+                      <a:round/>
+                      <a:headEnd type="none" w="med" len="med"/>
+                      <a:tailEnd type="none" w="med" len="med"/>
+                    </a:lnB>
+                    <a:solidFill>
+                      <a:srgbClr val="FFFFFF"/>
+                    </a:solidFill>
+                  </a:tcPr>
+                </a:tc>
+                <a:tc>
+                  <a:txBody>
+                    <a:bodyPr/>
+                    <a:lstStyle/>
+                    <a:p>
+                      <a:pPr indent="0" marL="0">
+                        <a:buNone/>
+                      </a:pPr>
+                      <a:r>
+                        <a:rPr lang="en-US" sz="1100" dirty="0">
+                          <a:solidFill>
+                            <a:srgbClr val="212121"/>
+                          </a:solidFill>
+                          <a:latin typeface="Calibri" pitchFamily="34" charset="0"/>
+                          <a:ea typeface="Calibri" pitchFamily="34" charset="-122"/>
+                          <a:cs typeface="Calibri" pitchFamily="34" charset="-120"/>
+                        </a:rPr>
+                        <a:t>Model must judge tool relevance</a:t>
+                      </a:r>
+                      <a:endParaRPr lang="en-US" sz="1100" dirty="0">
+                        <a:latin typeface="Calibri" charset="0"/>
+                        <a:ea typeface="Calibri" charset="0"/>
+                        <a:cs typeface="Calibri" charset="0"/>
+                      </a:endParaRPr>
+                    </a:p>
+                  </a:txBody>
+                  <a:tcPr marL="54864" marR="54864" marT="54864" marB="54864" anchor="ctr">
+                    <a:lnL w="6350" cap="flat" cmpd="sng" algn="ctr">
+                      <a:solidFill>
+                        <a:srgbClr val="D1D5DB"/>
+                      </a:solidFill>
+                      <a:prstDash val="solid"/>
+                      <a:round/>
+                      <a:headEnd type="none" w="med" len="med"/>
+                      <a:tailEnd type="none" w="med" len="med"/>
+                    </a:lnL>
+                    <a:lnR w="6350" cap="flat" cmpd="sng" algn="ctr">
+                      <a:solidFill>
+                        <a:srgbClr val="D1D5DB"/>
+                      </a:solidFill>
+                      <a:prstDash val="solid"/>
+                      <a:round/>
+                      <a:headEnd type="none" w="med" len="med"/>
+                      <a:tailEnd type="none" w="med" len="med"/>
+                    </a:lnR>
+                    <a:lnT w="6350" cap="flat" cmpd="sng" algn="ctr">
+                      <a:solidFill>
+                        <a:srgbClr val="D1D5DB"/>
+                      </a:solidFill>
+                      <a:prstDash val="solid"/>
+                      <a:round/>
+                      <a:headEnd type="none" w="med" len="med"/>
+                      <a:tailEnd type="none" w="med" len="med"/>
+                    </a:lnT>
+                    <a:lnB w="6350" cap="flat" cmpd="sng" algn="ctr">
+                      <a:solidFill>
+                        <a:srgbClr val="D1D5DB"/>
+                      </a:solidFill>
+                      <a:prstDash val="solid"/>
+                      <a:round/>
+                      <a:headEnd type="none" w="med" len="med"/>
+                      <a:tailEnd type="none" w="med" len="med"/>
+                    </a:lnB>
+                    <a:solidFill>
+                      <a:srgbClr val="FFFFFF"/>
+                    </a:solidFill>
+                  </a:tcPr>
+                </a:tc>
+                <a:tc>
+                  <a:txBody>
+                    <a:bodyPr/>
+                    <a:lstStyle/>
+                    <a:p>
+                      <a:pPr indent="0" marL="0">
+                        <a:buNone/>
+                      </a:pPr>
+                      <a:r>
+                        <a:rPr lang="en-US" sz="1100" dirty="0">
+                          <a:solidFill>
+                            <a:srgbClr val="212121"/>
+                          </a:solidFill>
+                          <a:latin typeface="Calibri" pitchFamily="34" charset="0"/>
+                          <a:ea typeface="Calibri" pitchFamily="34" charset="-122"/>
+                          <a:cs typeface="Calibri" pitchFamily="34" charset="-120"/>
+                        </a:rPr>
+                        <a:t>Injected as part of the prompt</a:t>
+                      </a:r>
+                      <a:endParaRPr lang="en-US" sz="1100" dirty="0">
+                        <a:latin typeface="Calibri" charset="0"/>
+                        <a:ea typeface="Calibri" charset="0"/>
+                        <a:cs typeface="Calibri" charset="0"/>
+                      </a:endParaRPr>
+                    </a:p>
+                  </a:txBody>
+                  <a:tcPr marL="54864" marR="54864" marT="54864" marB="54864" anchor="ctr">
+                    <a:lnL w="6350" cap="flat" cmpd="sng" algn="ctr">
+                      <a:solidFill>
+                        <a:srgbClr val="D1D5DB"/>
+                      </a:solidFill>
+                      <a:prstDash val="solid"/>
+                      <a:round/>
+                      <a:headEnd type="none" w="med" len="med"/>
+                      <a:tailEnd type="none" w="med" len="med"/>
+                    </a:lnL>
+                    <a:lnR w="6350" cap="flat" cmpd="sng" algn="ctr">
+                      <a:solidFill>
+                        <a:srgbClr val="D1D5DB"/>
+                      </a:solidFill>
+                      <a:prstDash val="solid"/>
+                      <a:round/>
+                      <a:headEnd type="none" w="med" len="med"/>
+                      <a:tailEnd type="none" w="med" len="med"/>
+                    </a:lnR>
+                    <a:lnT w="6350" cap="flat" cmpd="sng" algn="ctr">
+                      <a:solidFill>
+                        <a:srgbClr val="D1D5DB"/>
+                      </a:solidFill>
+                      <a:prstDash val="solid"/>
+                      <a:round/>
+                      <a:headEnd type="none" w="med" len="med"/>
+                      <a:tailEnd type="none" w="med" len="med"/>
+                    </a:lnT>
+                    <a:lnB w="6350" cap="flat" cmpd="sng" algn="ctr">
+                      <a:solidFill>
+                        <a:srgbClr val="D1D5DB"/>
+                      </a:solidFill>
+                      <a:prstDash val="solid"/>
+                      <a:round/>
+                      <a:headEnd type="none" w="med" len="med"/>
+                      <a:tailEnd type="none" w="med" len="med"/>
+                    </a:lnB>
+                    <a:solidFill>
+                      <a:srgbClr val="FFFFFF"/>
+                    </a:solidFill>
+                  </a:tcPr>
+                </a:tc>
+              </a:tr>
+              <a:tr h="502920">
+                <a:tc>
+                  <a:txBody>
+                    <a:bodyPr/>
+                    <a:lstStyle/>
+                    <a:p>
+                      <a:pPr indent="0" marL="0">
+                        <a:buNone/>
+                      </a:pPr>
+                      <a:r>
+                        <a:rPr lang="en-US" sz="1100" dirty="0">
+                          <a:solidFill>
+                            <a:srgbClr val="212121"/>
+                          </a:solidFill>
+                          <a:latin typeface="Calibri" pitchFamily="34" charset="0"/>
+                          <a:ea typeface="Calibri" pitchFamily="34" charset="-122"/>
+                          <a:cs typeface="Calibri" pitchFamily="34" charset="-120"/>
+                        </a:rPr>
+                        <a:t>Use case</a:t>
+                      </a:r>
+                      <a:endParaRPr lang="en-US" sz="1100" dirty="0">
+                        <a:latin typeface="Calibri" charset="0"/>
+                        <a:ea typeface="Calibri" charset="0"/>
+                        <a:cs typeface="Calibri" charset="0"/>
+                      </a:endParaRPr>
+                    </a:p>
+                  </a:txBody>
+                  <a:tcPr marL="54864" marR="54864" marT="54864" marB="54864" anchor="ctr">
+                    <a:lnL w="6350" cap="flat" cmpd="sng" algn="ctr">
+                      <a:solidFill>
+                        <a:srgbClr val="D1D5DB"/>
+                      </a:solidFill>
+                      <a:prstDash val="solid"/>
+                      <a:round/>
+                      <a:headEnd type="none" w="med" len="med"/>
+                      <a:tailEnd type="none" w="med" len="med"/>
+                    </a:lnL>
+                    <a:lnR w="6350" cap="flat" cmpd="sng" algn="ctr">
+                      <a:solidFill>
+                        <a:srgbClr val="D1D5DB"/>
+                      </a:solidFill>
+                      <a:prstDash val="solid"/>
+                      <a:round/>
+                      <a:headEnd type="none" w="med" len="med"/>
+                      <a:tailEnd type="none" w="med" len="med"/>
+                    </a:lnR>
+                    <a:lnT w="6350" cap="flat" cmpd="sng" algn="ctr">
+                      <a:solidFill>
+                        <a:srgbClr val="D1D5DB"/>
+                      </a:solidFill>
+                      <a:prstDash val="solid"/>
+                      <a:round/>
+                      <a:headEnd type="none" w="med" len="med"/>
+                      <a:tailEnd type="none" w="med" len="med"/>
+                    </a:lnT>
+                    <a:lnB w="6350" cap="flat" cmpd="sng" algn="ctr">
+                      <a:solidFill>
+                        <a:srgbClr val="D1D5DB"/>
+                      </a:solidFill>
+                      <a:prstDash val="solid"/>
+                      <a:round/>
+                      <a:headEnd type="none" w="med" len="med"/>
+                      <a:tailEnd type="none" w="med" len="med"/>
+                    </a:lnB>
+                    <a:solidFill>
+                      <a:srgbClr val="F3F4F6"/>
+                    </a:solidFill>
+                  </a:tcPr>
+                </a:tc>
+                <a:tc>
+                  <a:txBody>
+                    <a:bodyPr/>
+                    <a:lstStyle/>
+                    <a:p>
+                      <a:pPr indent="0" marL="0">
+                        <a:buNone/>
+                      </a:pPr>
+                      <a:r>
+                        <a:rPr lang="en-US" sz="1100" dirty="0">
+                          <a:solidFill>
+                            <a:srgbClr val="212121"/>
+                          </a:solidFill>
+                          <a:latin typeface="Calibri" pitchFamily="34" charset="0"/>
+                          <a:ea typeface="Calibri" pitchFamily="34" charset="-122"/>
+                          <a:cs typeface="Calibri" pitchFamily="34" charset="-120"/>
+                        </a:rPr>
+                        <a:t>On-demand actions and lookups</a:t>
+                      </a:r>
+                      <a:endParaRPr lang="en-US" sz="1100" dirty="0">
+                        <a:latin typeface="Calibri" charset="0"/>
+                        <a:ea typeface="Calibri" charset="0"/>
+                        <a:cs typeface="Calibri" charset="0"/>
+                      </a:endParaRPr>
+                    </a:p>
+                  </a:txBody>
+                  <a:tcPr marL="54864" marR="54864" marT="54864" marB="54864" anchor="ctr">
+                    <a:lnL w="6350" cap="flat" cmpd="sng" algn="ctr">
+                      <a:solidFill>
+                        <a:srgbClr val="D1D5DB"/>
+                      </a:solidFill>
+                      <a:prstDash val="solid"/>
+                      <a:round/>
+                      <a:headEnd type="none" w="med" len="med"/>
+                      <a:tailEnd type="none" w="med" len="med"/>
+                    </a:lnL>
+                    <a:lnR w="6350" cap="flat" cmpd="sng" algn="ctr">
+                      <a:solidFill>
+                        <a:srgbClr val="D1D5DB"/>
+                      </a:solidFill>
+                      <a:prstDash val="solid"/>
+                      <a:round/>
+                      <a:headEnd type="none" w="med" len="med"/>
+                      <a:tailEnd type="none" w="med" len="med"/>
+                    </a:lnR>
+                    <a:lnT w="6350" cap="flat" cmpd="sng" algn="ctr">
+                      <a:solidFill>
+                        <a:srgbClr val="D1D5DB"/>
+                      </a:solidFill>
+                      <a:prstDash val="solid"/>
+                      <a:round/>
+                      <a:headEnd type="none" w="med" len="med"/>
+                      <a:tailEnd type="none" w="med" len="med"/>
+                    </a:lnT>
+                    <a:lnB w="6350" cap="flat" cmpd="sng" algn="ctr">
+                      <a:solidFill>
+                        <a:srgbClr val="D1D5DB"/>
+                      </a:solidFill>
+                      <a:prstDash val="solid"/>
+                      <a:round/>
+                      <a:headEnd type="none" w="med" len="med"/>
+                      <a:tailEnd type="none" w="med" len="med"/>
+                    </a:lnB>
+                    <a:solidFill>
+                      <a:srgbClr val="F3F4F6"/>
+                    </a:solidFill>
+                  </a:tcPr>
+                </a:tc>
+                <a:tc>
+                  <a:txBody>
+                    <a:bodyPr/>
+                    <a:lstStyle/>
+                    <a:p>
+                      <a:pPr indent="0" marL="0">
+                        <a:buNone/>
+                      </a:pPr>
+                      <a:r>
+                        <a:rPr lang="en-US" sz="1100" dirty="0">
+                          <a:solidFill>
+                            <a:srgbClr val="212121"/>
+                          </a:solidFill>
+                          <a:latin typeface="Calibri" pitchFamily="34" charset="0"/>
+                          <a:ea typeface="Calibri" pitchFamily="34" charset="-122"/>
+                          <a:cs typeface="Calibri" pitchFamily="34" charset="-120"/>
+                        </a:rPr>
+                        <a:t>Always-present context</a:t>
+                      </a:r>
+                      <a:endParaRPr lang="en-US" sz="1100" dirty="0">
+                        <a:latin typeface="Calibri" charset="0"/>
+                        <a:ea typeface="Calibri" charset="0"/>
+                        <a:cs typeface="Calibri" charset="0"/>
+                      </a:endParaRPr>
+                    </a:p>
+                  </a:txBody>
+                  <a:tcPr marL="54864" marR="54864" marT="54864" marB="54864" anchor="ctr">
+                    <a:lnL w="6350" cap="flat" cmpd="sng" algn="ctr">
+                      <a:solidFill>
+                        <a:srgbClr val="D1D5DB"/>
+                      </a:solidFill>
+                      <a:prstDash val="solid"/>
+                      <a:round/>
+                      <a:headEnd type="none" w="med" len="med"/>
+                      <a:tailEnd type="none" w="med" len="med"/>
+                    </a:lnL>
+                    <a:lnR w="6350" cap="flat" cmpd="sng" algn="ctr">
+                      <a:solidFill>
+                        <a:srgbClr val="D1D5DB"/>
+                      </a:solidFill>
+                      <a:prstDash val="solid"/>
+                      <a:round/>
+                      <a:headEnd type="none" w="med" len="med"/>
+                      <a:tailEnd type="none" w="med" len="med"/>
+                    </a:lnR>
+                    <a:lnT w="6350" cap="flat" cmpd="sng" algn="ctr">
+                      <a:solidFill>
+                        <a:srgbClr val="D1D5DB"/>
+                      </a:solidFill>
+                      <a:prstDash val="solid"/>
+                      <a:round/>
+                      <a:headEnd type="none" w="med" len="med"/>
+                      <a:tailEnd type="none" w="med" len="med"/>
+                    </a:lnT>
+                    <a:lnB w="6350" cap="flat" cmpd="sng" algn="ctr">
+                      <a:solidFill>
+                        <a:srgbClr val="D1D5DB"/>
+                      </a:solidFill>
+                      <a:prstDash val="solid"/>
+                      <a:round/>
+                      <a:headEnd type="none" w="med" len="med"/>
+                      <a:tailEnd type="none" w="med" len="med"/>
+                    </a:lnB>
+                    <a:solidFill>
+                      <a:srgbClr val="F3F4F6"/>
+                    </a:solidFill>
+                  </a:tcPr>
+                </a:tc>
+              </a:tr>
+              <a:tr h="502920">
+                <a:tc>
+                  <a:txBody>
+                    <a:bodyPr/>
+                    <a:lstStyle/>
+                    <a:p>
+                      <a:pPr indent="0" marL="0">
+                        <a:buNone/>
+                      </a:pPr>
+                      <a:r>
+                        <a:rPr lang="en-US" sz="1100" dirty="0">
+                          <a:solidFill>
+                            <a:srgbClr val="212121"/>
+                          </a:solidFill>
+                          <a:latin typeface="Calibri" pitchFamily="34" charset="0"/>
+                          <a:ea typeface="Calibri" pitchFamily="34" charset="-122"/>
+                          <a:cs typeface="Calibri" pitchFamily="34" charset="-120"/>
+                        </a:rPr>
+                        <a:t>Token cost</a:t>
+                      </a:r>
+                      <a:endParaRPr lang="en-US" sz="1100" dirty="0">
+                        <a:latin typeface="Calibri" charset="0"/>
+                        <a:ea typeface="Calibri" charset="0"/>
+                        <a:cs typeface="Calibri" charset="0"/>
+                      </a:endParaRPr>
+                    </a:p>
+                  </a:txBody>
+                  <a:tcPr marL="54864" marR="54864" marT="54864" marB="54864" anchor="ctr">
+                    <a:lnL w="6350" cap="flat" cmpd="sng" algn="ctr">
+                      <a:solidFill>
+                        <a:srgbClr val="D1D5DB"/>
+                      </a:solidFill>
+                      <a:prstDash val="solid"/>
+                      <a:round/>
+                      <a:headEnd type="none" w="med" len="med"/>
+                      <a:tailEnd type="none" w="med" len="med"/>
+                    </a:lnL>
+                    <a:lnR w="6350" cap="flat" cmpd="sng" algn="ctr">
+                      <a:solidFill>
+                        <a:srgbClr val="D1D5DB"/>
+                      </a:solidFill>
+                      <a:prstDash val="solid"/>
+                      <a:round/>
+                      <a:headEnd type="none" w="med" len="med"/>
+                      <a:tailEnd type="none" w="med" len="med"/>
+                    </a:lnR>
+                    <a:lnT w="6350" cap="flat" cmpd="sng" algn="ctr">
+                      <a:solidFill>
+                        <a:srgbClr val="D1D5DB"/>
+                      </a:solidFill>
+                      <a:prstDash val="solid"/>
+                      <a:round/>
+                      <a:headEnd type="none" w="med" len="med"/>
+                      <a:tailEnd type="none" w="med" len="med"/>
+                    </a:lnT>
+                    <a:lnB w="6350" cap="flat" cmpd="sng" algn="ctr">
+                      <a:solidFill>
+                        <a:srgbClr val="D1D5DB"/>
+                      </a:solidFill>
+                      <a:prstDash val="solid"/>
+                      <a:round/>
+                      <a:headEnd type="none" w="med" len="med"/>
+                      <a:tailEnd type="none" w="med" len="med"/>
+                    </a:lnB>
+                    <a:solidFill>
+                      <a:srgbClr val="FFFFFF"/>
+                    </a:solidFill>
+                  </a:tcPr>
+                </a:tc>
+                <a:tc>
+                  <a:txBody>
+                    <a:bodyPr/>
+                    <a:lstStyle/>
+                    <a:p>
+                      <a:pPr indent="0" marL="0">
+                        <a:buNone/>
+                      </a:pPr>
+                      <a:r>
+                        <a:rPr lang="en-US" sz="1100" dirty="0">
+                          <a:solidFill>
+                            <a:srgbClr val="212121"/>
+                          </a:solidFill>
+                          <a:latin typeface="Calibri" pitchFamily="34" charset="0"/>
+                          <a:ea typeface="Calibri" pitchFamily="34" charset="-122"/>
+                          <a:cs typeface="Calibri" pitchFamily="34" charset="-120"/>
+                        </a:rPr>
+                        <a:t>Only when the tool is called</a:t>
+                      </a:r>
+                      <a:endParaRPr lang="en-US" sz="1100" dirty="0">
+                        <a:latin typeface="Calibri" charset="0"/>
+                        <a:ea typeface="Calibri" charset="0"/>
+                        <a:cs typeface="Calibri" charset="0"/>
+                      </a:endParaRPr>
+                    </a:p>
+                  </a:txBody>
+                  <a:tcPr marL="54864" marR="54864" marT="54864" marB="54864" anchor="ctr">
+                    <a:lnL w="6350" cap="flat" cmpd="sng" algn="ctr">
+                      <a:solidFill>
+                        <a:srgbClr val="D1D5DB"/>
+                      </a:solidFill>
+                      <a:prstDash val="solid"/>
+                      <a:round/>
+                      <a:headEnd type="none" w="med" len="med"/>
+                      <a:tailEnd type="none" w="med" len="med"/>
+                    </a:lnL>
+                    <a:lnR w="6350" cap="flat" cmpd="sng" algn="ctr">
+                      <a:solidFill>
+                        <a:srgbClr val="D1D5DB"/>
+                      </a:solidFill>
+                      <a:prstDash val="solid"/>
+                      <a:round/>
+                      <a:headEnd type="none" w="med" len="med"/>
+                      <a:tailEnd type="none" w="med" len="med"/>
+                    </a:lnR>
+                    <a:lnT w="6350" cap="flat" cmpd="sng" algn="ctr">
+                      <a:solidFill>
+                        <a:srgbClr val="D1D5DB"/>
+                      </a:solidFill>
+                      <a:prstDash val="solid"/>
+                      <a:round/>
+                      <a:headEnd type="none" w="med" len="med"/>
+                      <a:tailEnd type="none" w="med" len="med"/>
+                    </a:lnT>
+                    <a:lnB w="6350" cap="flat" cmpd="sng" algn="ctr">
+                      <a:solidFill>
+                        <a:srgbClr val="D1D5DB"/>
+                      </a:solidFill>
+                      <a:prstDash val="solid"/>
+                      <a:round/>
+                      <a:headEnd type="none" w="med" len="med"/>
+                      <a:tailEnd type="none" w="med" len="med"/>
+                    </a:lnB>
+                    <a:solidFill>
+                      <a:srgbClr val="FFFFFF"/>
+                    </a:solidFill>
+                  </a:tcPr>
+                </a:tc>
+                <a:tc>
+                  <a:txBody>
+                    <a:bodyPr/>
+                    <a:lstStyle/>
+                    <a:p>
+                      <a:pPr indent="0" marL="0">
+                        <a:buNone/>
+                      </a:pPr>
+                      <a:r>
+                        <a:rPr lang="en-US" sz="1100" dirty="0">
+                          <a:solidFill>
+                            <a:srgbClr val="212121"/>
+                          </a:solidFill>
+                          <a:latin typeface="Calibri" pitchFamily="34" charset="0"/>
+                          <a:ea typeface="Calibri" pitchFamily="34" charset="-122"/>
+                          <a:cs typeface="Calibri" pitchFamily="34" charset="-120"/>
+                        </a:rPr>
+                        <a:t>Every invocation</a:t>
+                      </a:r>
+                      <a:endParaRPr lang="en-US" sz="1100" dirty="0">
+                        <a:latin typeface="Calibri" charset="0"/>
+                        <a:ea typeface="Calibri" charset="0"/>
+                        <a:cs typeface="Calibri" charset="0"/>
+                      </a:endParaRPr>
+                    </a:p>
+                  </a:txBody>
+                  <a:tcPr marL="54864" marR="54864" marT="54864" marB="54864" anchor="ctr">
+                    <a:lnL w="6350" cap="flat" cmpd="sng" algn="ctr">
+                      <a:solidFill>
+                        <a:srgbClr val="D1D5DB"/>
+                      </a:solidFill>
+                      <a:prstDash val="solid"/>
+                      <a:round/>
+                      <a:headEnd type="none" w="med" len="med"/>
+                      <a:tailEnd type="none" w="med" len="med"/>
+                    </a:lnL>
+                    <a:lnR w="6350" cap="flat" cmpd="sng" algn="ctr">
+                      <a:solidFill>
+                        <a:srgbClr val="D1D5DB"/>
+                      </a:solidFill>
+                      <a:prstDash val="solid"/>
+                      <a:round/>
+                      <a:headEnd type="none" w="med" len="med"/>
+                      <a:tailEnd type="none" w="med" len="med"/>
+                    </a:lnR>
+                    <a:lnT w="6350" cap="flat" cmpd="sng" algn="ctr">
+                      <a:solidFill>
+                        <a:srgbClr val="D1D5DB"/>
+                      </a:solidFill>
+                      <a:prstDash val="solid"/>
+                      <a:round/>
+                      <a:headEnd type="none" w="med" len="med"/>
+                      <a:tailEnd type="none" w="med" len="med"/>
+                    </a:lnT>
+                    <a:lnB w="6350" cap="flat" cmpd="sng" algn="ctr">
+                      <a:solidFill>
+                        <a:srgbClr val="D1D5DB"/>
+                      </a:solidFill>
+                      <a:prstDash val="solid"/>
+                      <a:round/>
+                      <a:headEnd type="none" w="med" len="med"/>
+                      <a:tailEnd type="none" w="med" len="med"/>
+                    </a:lnB>
+                    <a:solidFill>
+                      <a:srgbClr val="FFFFFF"/>
+                    </a:solidFill>
+                  </a:tcPr>
+                </a:tc>
+              </a:tr>
+            </a:tbl>
+          </a:graphicData>
+        </a:graphic>
+      </p:graphicFrame>
+      <p:sp>
+        <p:nvSpPr>
+          <p:cNvPr id="7" name="Text 4"/>
           <p:cNvSpPr/>
           <p:nvPr/>
         </p:nvSpPr>
         <p:spPr>
           <a:xfrm>
-            <a:off x="502920" y="1188720"/>
-            <a:ext cx="8138160" cy="3291840"/>
+            <a:off x="365760" y="4754880"/>
+            <a:ext cx="8412480" cy="457200"/>
           </a:xfrm>
           <a:prstGeom prst="rect">
             <a:avLst/>
@@ -3455,249 +7764,22 @@
           <a:ln/>
         </p:spPr>
         <p:txBody>
-          <a:bodyPr wrap="square" lIns="0" tIns="0" rIns="0" bIns="0" rtlCol="0" anchor="t"/>
+          <a:bodyPr wrap="square" rtlCol="0" anchor="ctr"/>
           <a:lstStyle/>
           <a:p>
             <a:pPr indent="0" marL="0">
               <a:buNone/>
             </a:pPr>
             <a:r>
-              <a:rPr lang="en-US" sz="1300" dirty="0">
-                <a:solidFill>
-                  <a:srgbClr val="212121"/>
-                </a:solidFill>
-                <a:latin typeface="Consolas" pitchFamily="34" charset="0"/>
-                <a:ea typeface="Consolas" pitchFamily="34" charset="-122"/>
-                <a:cs typeface="Consolas" pitchFamily="34" charset="-120"/>
-              </a:rPr>
-              <a:t>from agent_framework import Agent</a:t>
-            </a:r>
-            <a:endParaRPr lang="en-US" sz="1300" dirty="0"/>
-          </a:p>
-          <a:p>
-            <a:pPr indent="0" marL="0">
-              <a:buNone/>
-            </a:pPr>
-            <a:r>
-              <a:rPr lang="en-US" sz="1300" dirty="0">
-                <a:solidFill>
-                  <a:srgbClr val="212121"/>
-                </a:solidFill>
-                <a:latin typeface="Consolas" pitchFamily="34" charset="0"/>
-                <a:ea typeface="Consolas" pitchFamily="34" charset="-122"/>
-                <a:cs typeface="Consolas" pitchFamily="34" charset="-120"/>
-              </a:rPr>
-              <a:t>from agent_framework.foundry import FoundryChatClient</a:t>
-            </a:r>
-            <a:endParaRPr lang="en-US" sz="1300" dirty="0"/>
-          </a:p>
-          <a:p>
-            <a:pPr indent="0" marL="0">
-              <a:buNone/>
-            </a:pPr>
-            <a:r>
-              <a:rPr lang="en-US" sz="1300" dirty="0">
-                <a:solidFill>
-                  <a:srgbClr val="212121"/>
-                </a:solidFill>
-                <a:latin typeface="Consolas" pitchFamily="34" charset="0"/>
-                <a:ea typeface="Consolas" pitchFamily="34" charset="-122"/>
-                <a:cs typeface="Consolas" pitchFamily="34" charset="-120"/>
-              </a:rPr>
-              <a:t>from azure.identity import AzureCliCredential</a:t>
-            </a:r>
-            <a:endParaRPr lang="en-US" sz="1300" dirty="0"/>
-          </a:p>
-          <a:p>
-            <a:pPr indent="0" marL="0">
-              <a:buNone/>
-            </a:pPr>
-            <a:endParaRPr lang="en-US" sz="1300" dirty="0"/>
-          </a:p>
-          <a:p>
-            <a:pPr indent="0" marL="0">
-              <a:buNone/>
-            </a:pPr>
-            <a:r>
-              <a:rPr lang="en-US" sz="1300" dirty="0">
-                <a:solidFill>
-                  <a:srgbClr val="212121"/>
-                </a:solidFill>
-                <a:latin typeface="Consolas" pitchFamily="34" charset="0"/>
-                <a:ea typeface="Consolas" pitchFamily="34" charset="-122"/>
-                <a:cs typeface="Consolas" pitchFamily="34" charset="-120"/>
-              </a:rPr>
-              <a:t>agent = Agent(</a:t>
-            </a:r>
-            <a:endParaRPr lang="en-US" sz="1300" dirty="0"/>
-          </a:p>
-          <a:p>
-            <a:pPr indent="0" marL="0">
-              <a:buNone/>
-            </a:pPr>
-            <a:r>
-              <a:rPr lang="en-US" sz="1300" dirty="0">
-                <a:solidFill>
-                  <a:srgbClr val="212121"/>
-                </a:solidFill>
-                <a:latin typeface="Consolas" pitchFamily="34" charset="0"/>
-                <a:ea typeface="Consolas" pitchFamily="34" charset="-122"/>
-                <a:cs typeface="Consolas" pitchFamily="34" charset="-120"/>
-              </a:rPr>
-              <a:t>    client=FoundryChatClient(credential=AzureCliCredential()),</a:t>
-            </a:r>
-            <a:endParaRPr lang="en-US" sz="1300" dirty="0"/>
-          </a:p>
-          <a:p>
-            <a:pPr indent="0" marL="0">
-              <a:buNone/>
-            </a:pPr>
-            <a:r>
-              <a:rPr lang="en-US" sz="1300" dirty="0">
-                <a:solidFill>
-                  <a:srgbClr val="212121"/>
-                </a:solidFill>
-                <a:latin typeface="Consolas" pitchFamily="34" charset="0"/>
-                <a:ea typeface="Consolas" pitchFamily="34" charset="-122"/>
-                <a:cs typeface="Consolas" pitchFamily="34" charset="-120"/>
-              </a:rPr>
-              <a:t>    name="DocsAssistant",</a:t>
-            </a:r>
-            <a:endParaRPr lang="en-US" sz="1300" dirty="0"/>
-          </a:p>
-          <a:p>
-            <a:pPr indent="0" marL="0">
-              <a:buNone/>
-            </a:pPr>
-            <a:r>
-              <a:rPr lang="en-US" sz="1300" dirty="0">
-                <a:solidFill>
-                  <a:srgbClr val="212121"/>
-                </a:solidFill>
-                <a:latin typeface="Consolas" pitchFamily="34" charset="0"/>
-                <a:ea typeface="Consolas" pitchFamily="34" charset="-122"/>
-                <a:cs typeface="Consolas" pitchFamily="34" charset="-120"/>
-              </a:rPr>
-              <a:t>    instructions=(</a:t>
-            </a:r>
-            <a:endParaRPr lang="en-US" sz="1300" dirty="0"/>
-          </a:p>
-          <a:p>
-            <a:pPr indent="0" marL="0">
-              <a:buNone/>
-            </a:pPr>
-            <a:r>
-              <a:rPr lang="en-US" sz="1300" dirty="0">
-                <a:solidFill>
-                  <a:srgbClr val="212121"/>
-                </a:solidFill>
-                <a:latin typeface="Consolas" pitchFamily="34" charset="0"/>
-                <a:ea typeface="Consolas" pitchFamily="34" charset="-122"/>
-                <a:cs typeface="Consolas" pitchFamily="34" charset="-120"/>
-              </a:rPr>
-              <a:t>        "## Role\n"</a:t>
-            </a:r>
-            <a:endParaRPr lang="en-US" sz="1300" dirty="0"/>
-          </a:p>
-          <a:p>
-            <a:pPr indent="0" marL="0">
-              <a:buNone/>
-            </a:pPr>
-            <a:r>
-              <a:rPr lang="en-US" sz="1300" dirty="0">
-                <a:solidFill>
-                  <a:srgbClr val="212121"/>
-                </a:solidFill>
-                <a:latin typeface="Consolas" pitchFamily="34" charset="0"/>
-                <a:ea typeface="Consolas" pitchFamily="34" charset="-122"/>
-                <a:cs typeface="Consolas" pitchFamily="34" charset="-120"/>
-              </a:rPr>
-              <a:t>        "You are a technical documentation assistant.\n\n"</a:t>
-            </a:r>
-            <a:endParaRPr lang="en-US" sz="1300" dirty="0"/>
-          </a:p>
-          <a:p>
-            <a:pPr indent="0" marL="0">
-              <a:buNone/>
-            </a:pPr>
-            <a:r>
-              <a:rPr lang="en-US" sz="1300" dirty="0">
-                <a:solidFill>
-                  <a:srgbClr val="212121"/>
-                </a:solidFill>
-                <a:latin typeface="Consolas" pitchFamily="34" charset="0"/>
-                <a:ea typeface="Consolas" pitchFamily="34" charset="-122"/>
-                <a:cs typeface="Consolas" pitchFamily="34" charset="-120"/>
-              </a:rPr>
-              <a:t>        "## Rules\n"</a:t>
-            </a:r>
-            <a:endParaRPr lang="en-US" sz="1300" dirty="0"/>
-          </a:p>
-          <a:p>
-            <a:pPr indent="0" marL="0">
-              <a:buNone/>
-            </a:pPr>
-            <a:r>
-              <a:rPr lang="en-US" sz="1300" dirty="0">
-                <a:solidFill>
-                  <a:srgbClr val="212121"/>
-                </a:solidFill>
-                <a:latin typeface="Consolas" pitchFamily="34" charset="0"/>
-                <a:ea typeface="Consolas" pitchFamily="34" charset="-122"/>
-                <a:cs typeface="Consolas" pitchFamily="34" charset="-120"/>
-              </a:rPr>
-              <a:t>        "- Cite sources for factual claims.\n"</a:t>
-            </a:r>
-            <a:endParaRPr lang="en-US" sz="1300" dirty="0"/>
-          </a:p>
-          <a:p>
-            <a:pPr indent="0" marL="0">
-              <a:buNone/>
-            </a:pPr>
-            <a:r>
-              <a:rPr lang="en-US" sz="1300" dirty="0">
-                <a:solidFill>
-                  <a:srgbClr val="212121"/>
-                </a:solidFill>
-                <a:latin typeface="Consolas" pitchFamily="34" charset="0"/>
-                <a:ea typeface="Consolas" pitchFamily="34" charset="-122"/>
-                <a:cs typeface="Consolas" pitchFamily="34" charset="-120"/>
-              </a:rPr>
-              <a:t>        "- Say 'I don't know' when you don't.\n"</a:t>
-            </a:r>
-            <a:endParaRPr lang="en-US" sz="1300" dirty="0"/>
-          </a:p>
-          <a:p>
-            <a:pPr indent="0" marL="0">
-              <a:buNone/>
-            </a:pPr>
-            <a:r>
-              <a:rPr lang="en-US" sz="1300" dirty="0">
-                <a:solidFill>
-                  <a:srgbClr val="212121"/>
-                </a:solidFill>
-                <a:latin typeface="Consolas" pitchFamily="34" charset="0"/>
-                <a:ea typeface="Consolas" pitchFamily="34" charset="-122"/>
-                <a:cs typeface="Consolas" pitchFamily="34" charset="-120"/>
-              </a:rPr>
-              <a:t>    ),</a:t>
-            </a:r>
-            <a:endParaRPr lang="en-US" sz="1300" dirty="0"/>
-          </a:p>
-          <a:p>
-            <a:pPr indent="0" marL="0">
-              <a:buNone/>
-            </a:pPr>
-            <a:r>
-              <a:rPr lang="en-US" sz="1300" dirty="0">
-                <a:solidFill>
-                  <a:srgbClr val="212121"/>
-                </a:solidFill>
-                <a:latin typeface="Consolas" pitchFamily="34" charset="0"/>
-                <a:ea typeface="Consolas" pitchFamily="34" charset="-122"/>
-                <a:cs typeface="Consolas" pitchFamily="34" charset="-120"/>
-              </a:rPr>
-              <a:t>)</a:t>
+              <a:rPr lang="en-US" sz="1300" b="1" i="1" dirty="0">
+                <a:solidFill>
+                  <a:srgbClr val="1E2761"/>
+                </a:solidFill>
+                <a:latin typeface="Calibri" pitchFamily="34" charset="0"/>
+                <a:ea typeface="Calibri" pitchFamily="34" charset="-122"/>
+                <a:cs typeface="Calibri" pitchFamily="34" charset="-120"/>
+              </a:rPr>
+              <a:t>Rule of thumb: if the agent should have this info every single time, use a provider. If only when relevant, use a tool.</a:t>
             </a:r>
             <a:endParaRPr lang="en-US" sz="1300" dirty="0"/>
           </a:p>
@@ -3827,7 +7909,7 @@
                 <a:ea typeface="Calibri" pitchFamily="34" charset="-122"/>
                 <a:cs typeface="Calibri" pitchFamily="34" charset="-120"/>
               </a:rPr>
-              <a:t>Tool descriptions are prompts too</a:t>
+              <a:t>The context lifecycle</a:t>
             </a:r>
             <a:endParaRPr lang="en-US" sz="2800" dirty="0"/>
           </a:p>
@@ -3835,24 +7917,63 @@
       </p:sp>
       <p:sp>
         <p:nvSpPr>
-          <p:cNvPr id="5" name="Shape 3"/>
+          <p:cNvPr id="5" name="Text 3"/>
           <p:cNvSpPr/>
           <p:nvPr/>
         </p:nvSpPr>
         <p:spPr>
           <a:xfrm>
-            <a:off x="365760" y="1097280"/>
-            <a:ext cx="8412480" cy="3200400"/>
+            <a:off x="365760" y="960120"/>
+            <a:ext cx="8412480" cy="365760"/>
+          </a:xfrm>
+          <a:prstGeom prst="rect">
+            <a:avLst/>
+          </a:prstGeom>
+          <a:noFill/>
+          <a:ln/>
+        </p:spPr>
+        <p:txBody>
+          <a:bodyPr wrap="square" rtlCol="0" anchor="ctr"/>
+          <a:lstStyle/>
+          <a:p>
+            <a:pPr indent="0" marL="0">
+              <a:buNone/>
+            </a:pPr>
+            <a:r>
+              <a:rPr lang="en-US" sz="1300" i="1" dirty="0">
+                <a:solidFill>
+                  <a:srgbClr val="212121"/>
+                </a:solidFill>
+                <a:latin typeface="Calibri" pitchFamily="34" charset="0"/>
+                <a:ea typeface="Calibri" pitchFamily="34" charset="-122"/>
+                <a:cs typeface="Calibri" pitchFamily="34" charset="-120"/>
+              </a:rPr>
+              <a:t>Every agent.run(...) call has three phases. Context providers hook into the first and third.</a:t>
+            </a:r>
+            <a:endParaRPr lang="en-US" sz="1300" dirty="0"/>
+          </a:p>
+        </p:txBody>
+      </p:sp>
+      <p:sp>
+        <p:nvSpPr>
+          <p:cNvPr id="6" name="Shape 4"/>
+          <p:cNvSpPr/>
+          <p:nvPr/>
+        </p:nvSpPr>
+        <p:spPr>
+          <a:xfrm>
+            <a:off x="1280160" y="1417320"/>
+            <a:ext cx="6583680" cy="1051560"/>
           </a:xfrm>
           <a:prstGeom prst="rect">
             <a:avLst/>
           </a:prstGeom>
           <a:solidFill>
-            <a:srgbClr val="F3F4F6"/>
+            <a:srgbClr val="CADCFC"/>
           </a:solidFill>
-          <a:ln w="6350">
+          <a:ln w="19050">
             <a:solidFill>
-              <a:srgbClr val="D1D5DB"/>
+              <a:srgbClr val="1E2761"/>
             </a:solidFill>
             <a:prstDash val="solid"/>
           </a:ln>
@@ -3860,178 +7981,14 @@
       </p:sp>
       <p:sp>
         <p:nvSpPr>
-          <p:cNvPr id="6" name="Text 4"/>
-          <p:cNvSpPr/>
-          <p:nvPr/>
-        </p:nvSpPr>
-        <p:spPr>
-          <a:xfrm>
-            <a:off x="502920" y="1188720"/>
-            <a:ext cx="8138160" cy="3017520"/>
-          </a:xfrm>
-          <a:prstGeom prst="rect">
-            <a:avLst/>
-          </a:prstGeom>
-          <a:noFill/>
-          <a:ln/>
-        </p:spPr>
-        <p:txBody>
-          <a:bodyPr wrap="square" lIns="0" tIns="0" rIns="0" bIns="0" rtlCol="0" anchor="t"/>
-          <a:lstStyle/>
-          <a:p>
-            <a:pPr indent="0" marL="0">
-              <a:buNone/>
-            </a:pPr>
-            <a:r>
-              <a:rPr lang="en-US" sz="1300" dirty="0">
-                <a:solidFill>
-                  <a:srgbClr val="212121"/>
-                </a:solidFill>
-                <a:latin typeface="Consolas" pitchFamily="34" charset="0"/>
-                <a:ea typeface="Consolas" pitchFamily="34" charset="-122"/>
-                <a:cs typeface="Consolas" pitchFamily="34" charset="-120"/>
-              </a:rPr>
-              <a:t>@tool</a:t>
-            </a:r>
-            <a:endParaRPr lang="en-US" sz="1300" dirty="0"/>
-          </a:p>
-          <a:p>
-            <a:pPr indent="0" marL="0">
-              <a:buNone/>
-            </a:pPr>
-            <a:r>
-              <a:rPr lang="en-US" sz="1300" dirty="0">
-                <a:solidFill>
-                  <a:srgbClr val="212121"/>
-                </a:solidFill>
-                <a:latin typeface="Consolas" pitchFamily="34" charset="0"/>
-                <a:ea typeface="Consolas" pitchFamily="34" charset="-122"/>
-                <a:cs typeface="Consolas" pitchFamily="34" charset="-120"/>
-              </a:rPr>
-              <a:t>def create_ticket(title: str, body: str, priority: str) -&gt; str:</a:t>
-            </a:r>
-            <a:endParaRPr lang="en-US" sz="1300" dirty="0"/>
-          </a:p>
-          <a:p>
-            <a:pPr indent="0" marL="0">
-              <a:buNone/>
-            </a:pPr>
-            <a:r>
-              <a:rPr lang="en-US" sz="1300" dirty="0">
-                <a:solidFill>
-                  <a:srgbClr val="212121"/>
-                </a:solidFill>
-                <a:latin typeface="Consolas" pitchFamily="34" charset="0"/>
-                <a:ea typeface="Consolas" pitchFamily="34" charset="-122"/>
-                <a:cs typeface="Consolas" pitchFamily="34" charset="-120"/>
-              </a:rPr>
-              <a:t>    """Create a support ticket.</a:t>
-            </a:r>
-            <a:endParaRPr lang="en-US" sz="1300" dirty="0"/>
-          </a:p>
-          <a:p>
-            <a:pPr indent="0" marL="0">
-              <a:buNone/>
-            </a:pPr>
-            <a:endParaRPr lang="en-US" sz="1300" dirty="0"/>
-          </a:p>
-          <a:p>
-            <a:pPr indent="0" marL="0">
-              <a:buNone/>
-            </a:pPr>
-            <a:r>
-              <a:rPr lang="en-US" sz="1300" dirty="0">
-                <a:solidFill>
-                  <a:srgbClr val="212121"/>
-                </a:solidFill>
-                <a:latin typeface="Consolas" pitchFamily="34" charset="0"/>
-                <a:ea typeface="Consolas" pitchFamily="34" charset="-122"/>
-                <a:cs typeface="Consolas" pitchFamily="34" charset="-120"/>
-              </a:rPr>
-              <a:t>    Use this when the user reports a problem that needs a human</a:t>
-            </a:r>
-            <a:endParaRPr lang="en-US" sz="1300" dirty="0"/>
-          </a:p>
-          <a:p>
-            <a:pPr indent="0" marL="0">
-              <a:buNone/>
-            </a:pPr>
-            <a:r>
-              <a:rPr lang="en-US" sz="1300" dirty="0">
-                <a:solidFill>
-                  <a:srgbClr val="212121"/>
-                </a:solidFill>
-                <a:latin typeface="Consolas" pitchFamily="34" charset="0"/>
-                <a:ea typeface="Consolas" pitchFamily="34" charset="-122"/>
-                <a:cs typeface="Consolas" pitchFamily="34" charset="-120"/>
-              </a:rPr>
-              <a:t>    engineer to resolve. Do NOT use for questions you can answer</a:t>
-            </a:r>
-            <a:endParaRPr lang="en-US" sz="1300" dirty="0"/>
-          </a:p>
-          <a:p>
-            <a:pPr indent="0" marL="0">
-              <a:buNone/>
-            </a:pPr>
-            <a:r>
-              <a:rPr lang="en-US" sz="1300" dirty="0">
-                <a:solidFill>
-                  <a:srgbClr val="212121"/>
-                </a:solidFill>
-                <a:latin typeface="Consolas" pitchFamily="34" charset="0"/>
-                <a:ea typeface="Consolas" pitchFamily="34" charset="-122"/>
-                <a:cs typeface="Consolas" pitchFamily="34" charset="-120"/>
-              </a:rPr>
-              <a:t>    from documentation. Priority must be one of low, med, high.</a:t>
-            </a:r>
-            <a:endParaRPr lang="en-US" sz="1300" dirty="0"/>
-          </a:p>
-          <a:p>
-            <a:pPr indent="0" marL="0">
-              <a:buNone/>
-            </a:pPr>
-            <a:r>
-              <a:rPr lang="en-US" sz="1300" dirty="0">
-                <a:solidFill>
-                  <a:srgbClr val="212121"/>
-                </a:solidFill>
-                <a:latin typeface="Consolas" pitchFamily="34" charset="0"/>
-                <a:ea typeface="Consolas" pitchFamily="34" charset="-122"/>
-                <a:cs typeface="Consolas" pitchFamily="34" charset="-120"/>
-              </a:rPr>
-              <a:t>    """</a:t>
-            </a:r>
-            <a:endParaRPr lang="en-US" sz="1300" dirty="0"/>
-          </a:p>
-          <a:p>
-            <a:pPr indent="0" marL="0">
-              <a:buNone/>
-            </a:pPr>
-            <a:r>
-              <a:rPr lang="en-US" sz="1300" dirty="0">
-                <a:solidFill>
-                  <a:srgbClr val="212121"/>
-                </a:solidFill>
-                <a:latin typeface="Consolas" pitchFamily="34" charset="0"/>
-                <a:ea typeface="Consolas" pitchFamily="34" charset="-122"/>
-                <a:cs typeface="Consolas" pitchFamily="34" charset="-120"/>
-              </a:rPr>
-              <a:t>    ...</a:t>
-            </a:r>
-            <a:endParaRPr lang="en-US" sz="1300" dirty="0"/>
-          </a:p>
-        </p:txBody>
-      </p:sp>
-      <p:sp>
-        <p:nvSpPr>
           <p:cNvPr id="7" name="Text 5"/>
           <p:cNvSpPr/>
           <p:nvPr/>
         </p:nvSpPr>
         <p:spPr>
           <a:xfrm>
-            <a:off x="365760" y="4434840"/>
-            <a:ext cx="8412480" cy="365760"/>
+            <a:off x="1417320" y="1463040"/>
+            <a:ext cx="6309360" cy="274320"/>
           </a:xfrm>
           <a:prstGeom prst="rect">
             <a:avLst/>
@@ -4040,14 +7997,14 @@
           <a:ln/>
         </p:spPr>
         <p:txBody>
-          <a:bodyPr wrap="square" rtlCol="0" anchor="ctr"/>
+          <a:bodyPr wrap="square" lIns="0" tIns="0" rIns="0" bIns="0" rtlCol="0" anchor="ctr"/>
           <a:lstStyle/>
           <a:p>
             <a:pPr indent="0" marL="0">
               <a:buNone/>
             </a:pPr>
             <a:r>
-              <a:rPr lang="en-US" sz="1400" b="1" i="1" dirty="0">
+              <a:rPr lang="en-US" sz="1200" b="1" dirty="0">
                 <a:solidFill>
                   <a:srgbClr val="1E2761"/>
                 </a:solidFill>
@@ -4055,9 +8012,428 @@
                 <a:ea typeface="Calibri" pitchFamily="34" charset="-122"/>
                 <a:cs typeface="Calibri" pitchFamily="34" charset="-120"/>
               </a:rPr>
-              <a:t>Bad docstrings = the model calls the wrong tool at the wrong time.</a:t>
-            </a:r>
-            <a:endParaRPr lang="en-US" sz="1400" dirty="0"/>
+              <a:t>BEFORE RUN — providers inject context</a:t>
+            </a:r>
+            <a:endParaRPr lang="en-US" sz="1200" dirty="0"/>
+          </a:p>
+        </p:txBody>
+      </p:sp>
+      <p:sp>
+        <p:nvSpPr>
+          <p:cNvPr id="8" name="Text 6"/>
+          <p:cNvSpPr/>
+          <p:nvPr/>
+        </p:nvSpPr>
+        <p:spPr>
+          <a:xfrm>
+            <a:off x="1417320" y="1737360"/>
+            <a:ext cx="6309360" cy="685800"/>
+          </a:xfrm>
+          <a:prstGeom prst="rect">
+            <a:avLst/>
+          </a:prstGeom>
+          <a:noFill/>
+          <a:ln/>
+        </p:spPr>
+        <p:txBody>
+          <a:bodyPr wrap="square" lIns="0" tIns="0" rIns="0" bIns="0" rtlCol="0" anchor="ctr"/>
+          <a:lstStyle/>
+          <a:p>
+            <a:pPr indent="0" marL="0">
+              <a:buNone/>
+            </a:pPr>
+            <a:r>
+              <a:rPr lang="en-US" sz="1100" dirty="0">
+                <a:solidFill>
+                  <a:srgbClr val="212121"/>
+                </a:solidFill>
+                <a:latin typeface="Calibri" pitchFamily="34" charset="0"/>
+                <a:ea typeface="Calibri" pitchFamily="34" charset="-122"/>
+                <a:cs typeface="Calibri" pitchFamily="34" charset="-120"/>
+              </a:rPr>
+              <a:t>• History provider loads past messages</a:t>
+            </a:r>
+            <a:endParaRPr lang="en-US" sz="1100" dirty="0"/>
+          </a:p>
+          <a:p>
+            <a:pPr indent="0" marL="0">
+              <a:buNone/>
+            </a:pPr>
+            <a:r>
+              <a:rPr lang="en-US" sz="1100" dirty="0">
+                <a:solidFill>
+                  <a:srgbClr val="212121"/>
+                </a:solidFill>
+                <a:latin typeface="Calibri" pitchFamily="34" charset="0"/>
+                <a:ea typeface="Calibri" pitchFamily="34" charset="-122"/>
+                <a:cs typeface="Calibri" pitchFamily="34" charset="-120"/>
+              </a:rPr>
+              <a:t>• Memory provider retrieves relevant facts</a:t>
+            </a:r>
+            <a:endParaRPr lang="en-US" sz="1100" dirty="0"/>
+          </a:p>
+          <a:p>
+            <a:pPr indent="0" marL="0">
+              <a:buNone/>
+            </a:pPr>
+            <a:r>
+              <a:rPr lang="en-US" sz="1100" dirty="0">
+                <a:solidFill>
+                  <a:srgbClr val="212121"/>
+                </a:solidFill>
+                <a:latin typeface="Calibri" pitchFamily="34" charset="0"/>
+                <a:ea typeface="Calibri" pitchFamily="34" charset="-122"/>
+                <a:cs typeface="Calibri" pitchFamily="34" charset="-120"/>
+              </a:rPr>
+              <a:t>• RAG provider searches knowledge base</a:t>
+            </a:r>
+            <a:endParaRPr lang="en-US" sz="1100" dirty="0"/>
+          </a:p>
+          <a:p>
+            <a:pPr indent="0" marL="0">
+              <a:buNone/>
+            </a:pPr>
+            <a:r>
+              <a:rPr lang="en-US" sz="1100" dirty="0">
+                <a:solidFill>
+                  <a:srgbClr val="212121"/>
+                </a:solidFill>
+                <a:latin typeface="Calibri" pitchFamily="34" charset="0"/>
+                <a:ea typeface="Calibri" pitchFamily="34" charset="-122"/>
+                <a:cs typeface="Calibri" pitchFamily="34" charset="-120"/>
+              </a:rPr>
+              <a:t>• Custom provider injects user profile, time, location</a:t>
+            </a:r>
+            <a:endParaRPr lang="en-US" sz="1100" dirty="0"/>
+          </a:p>
+        </p:txBody>
+      </p:sp>
+      <p:sp>
+        <p:nvSpPr>
+          <p:cNvPr id="9" name="Shape 7"/>
+          <p:cNvSpPr/>
+          <p:nvPr/>
+        </p:nvSpPr>
+        <p:spPr>
+          <a:xfrm>
+            <a:off x="4434840" y="2487168"/>
+            <a:ext cx="274320" cy="201168"/>
+          </a:xfrm>
+          <a:prstGeom prst="downArrow">
+            <a:avLst/>
+          </a:prstGeom>
+          <a:solidFill>
+            <a:srgbClr val="1E2761"/>
+          </a:solidFill>
+          <a:ln w="12700">
+            <a:solidFill>
+              <a:srgbClr val="1E2761"/>
+            </a:solidFill>
+            <a:prstDash val="solid"/>
+          </a:ln>
+        </p:spPr>
+      </p:sp>
+      <p:sp>
+        <p:nvSpPr>
+          <p:cNvPr id="10" name="Shape 8"/>
+          <p:cNvSpPr/>
+          <p:nvPr/>
+        </p:nvSpPr>
+        <p:spPr>
+          <a:xfrm>
+            <a:off x="1280160" y="2788920"/>
+            <a:ext cx="6583680" cy="640080"/>
+          </a:xfrm>
+          <a:prstGeom prst="rect">
+            <a:avLst/>
+          </a:prstGeom>
+          <a:solidFill>
+            <a:srgbClr val="FFFFFF"/>
+          </a:solidFill>
+          <a:ln w="19050">
+            <a:solidFill>
+              <a:srgbClr val="1E2761"/>
+            </a:solidFill>
+            <a:prstDash val="solid"/>
+          </a:ln>
+        </p:spPr>
+      </p:sp>
+      <p:sp>
+        <p:nvSpPr>
+          <p:cNvPr id="11" name="Text 9"/>
+          <p:cNvSpPr/>
+          <p:nvPr/>
+        </p:nvSpPr>
+        <p:spPr>
+          <a:xfrm>
+            <a:off x="1417320" y="2788920"/>
+            <a:ext cx="6309360" cy="640080"/>
+          </a:xfrm>
+          <a:prstGeom prst="rect">
+            <a:avLst/>
+          </a:prstGeom>
+          <a:noFill/>
+          <a:ln/>
+        </p:spPr>
+        <p:txBody>
+          <a:bodyPr wrap="square" lIns="0" tIns="0" rIns="0" bIns="0" rtlCol="0" anchor="ctr"/>
+          <a:lstStyle/>
+          <a:p>
+            <a:pPr algn="ctr" indent="0" marL="0">
+              <a:buNone/>
+            </a:pPr>
+            <a:r>
+              <a:rPr lang="en-US" sz="1200" b="1" dirty="0">
+                <a:solidFill>
+                  <a:srgbClr val="1E2761"/>
+                </a:solidFill>
+                <a:latin typeface="Calibri" pitchFamily="34" charset="0"/>
+                <a:ea typeface="Calibri" pitchFamily="34" charset="-122"/>
+                <a:cs typeface="Calibri" pitchFamily="34" charset="-120"/>
+              </a:rPr>
+              <a:t>AGENT CORE — model sees input + all injected context, generates response</a:t>
+            </a:r>
+            <a:endParaRPr lang="en-US" sz="1200" dirty="0"/>
+          </a:p>
+        </p:txBody>
+      </p:sp>
+      <p:sp>
+        <p:nvSpPr>
+          <p:cNvPr id="12" name="Shape 10"/>
+          <p:cNvSpPr/>
+          <p:nvPr/>
+        </p:nvSpPr>
+        <p:spPr>
+          <a:xfrm>
+            <a:off x="4434840" y="3447288"/>
+            <a:ext cx="274320" cy="201168"/>
+          </a:xfrm>
+          <a:prstGeom prst="downArrow">
+            <a:avLst/>
+          </a:prstGeom>
+          <a:solidFill>
+            <a:srgbClr val="1E2761"/>
+          </a:solidFill>
+          <a:ln w="12700">
+            <a:solidFill>
+              <a:srgbClr val="1E2761"/>
+            </a:solidFill>
+            <a:prstDash val="solid"/>
+          </a:ln>
+        </p:spPr>
+      </p:sp>
+      <p:sp>
+        <p:nvSpPr>
+          <p:cNvPr id="13" name="Shape 11"/>
+          <p:cNvSpPr/>
+          <p:nvPr/>
+        </p:nvSpPr>
+        <p:spPr>
+          <a:xfrm>
+            <a:off x="1280160" y="3749040"/>
+            <a:ext cx="6583680" cy="914400"/>
+          </a:xfrm>
+          <a:prstGeom prst="rect">
+            <a:avLst/>
+          </a:prstGeom>
+          <a:solidFill>
+            <a:srgbClr val="CADCFC"/>
+          </a:solidFill>
+          <a:ln w="19050">
+            <a:solidFill>
+              <a:srgbClr val="1E2761"/>
+            </a:solidFill>
+            <a:prstDash val="solid"/>
+          </a:ln>
+        </p:spPr>
+      </p:sp>
+      <p:sp>
+        <p:nvSpPr>
+          <p:cNvPr id="14" name="Text 12"/>
+          <p:cNvSpPr/>
+          <p:nvPr/>
+        </p:nvSpPr>
+        <p:spPr>
+          <a:xfrm>
+            <a:off x="1417320" y="3794760"/>
+            <a:ext cx="6309360" cy="274320"/>
+          </a:xfrm>
+          <a:prstGeom prst="rect">
+            <a:avLst/>
+          </a:prstGeom>
+          <a:noFill/>
+          <a:ln/>
+        </p:spPr>
+        <p:txBody>
+          <a:bodyPr wrap="square" lIns="0" tIns="0" rIns="0" bIns="0" rtlCol="0" anchor="ctr"/>
+          <a:lstStyle/>
+          <a:p>
+            <a:pPr indent="0" marL="0">
+              <a:buNone/>
+            </a:pPr>
+            <a:r>
+              <a:rPr lang="en-US" sz="1200" b="1" dirty="0">
+                <a:solidFill>
+                  <a:srgbClr val="1E2761"/>
+                </a:solidFill>
+                <a:latin typeface="Calibri" pitchFamily="34" charset="0"/>
+                <a:ea typeface="Calibri" pitchFamily="34" charset="-122"/>
+                <a:cs typeface="Calibri" pitchFamily="34" charset="-120"/>
+              </a:rPr>
+              <a:t>AFTER RUN — providers process the response</a:t>
+            </a:r>
+            <a:endParaRPr lang="en-US" sz="1200" dirty="0"/>
+          </a:p>
+        </p:txBody>
+      </p:sp>
+      <p:sp>
+        <p:nvSpPr>
+          <p:cNvPr id="15" name="Text 13"/>
+          <p:cNvSpPr/>
+          <p:nvPr/>
+        </p:nvSpPr>
+        <p:spPr>
+          <a:xfrm>
+            <a:off x="1417320" y="4069080"/>
+            <a:ext cx="6309360" cy="548640"/>
+          </a:xfrm>
+          <a:prstGeom prst="rect">
+            <a:avLst/>
+          </a:prstGeom>
+          <a:noFill/>
+          <a:ln/>
+        </p:spPr>
+        <p:txBody>
+          <a:bodyPr wrap="square" lIns="0" tIns="0" rIns="0" bIns="0" rtlCol="0" anchor="ctr"/>
+          <a:lstStyle/>
+          <a:p>
+            <a:pPr indent="0" marL="0">
+              <a:buNone/>
+            </a:pPr>
+            <a:r>
+              <a:rPr lang="en-US" sz="1100" dirty="0">
+                <a:solidFill>
+                  <a:srgbClr val="212121"/>
+                </a:solidFill>
+                <a:latin typeface="Calibri" pitchFamily="34" charset="0"/>
+                <a:ea typeface="Calibri" pitchFamily="34" charset="-122"/>
+                <a:cs typeface="Calibri" pitchFamily="34" charset="-120"/>
+              </a:rPr>
+              <a:t>• History provider saves new messages</a:t>
+            </a:r>
+            <a:endParaRPr lang="en-US" sz="1100" dirty="0"/>
+          </a:p>
+          <a:p>
+            <a:pPr indent="0" marL="0">
+              <a:buNone/>
+            </a:pPr>
+            <a:r>
+              <a:rPr lang="en-US" sz="1100" dirty="0">
+                <a:solidFill>
+                  <a:srgbClr val="212121"/>
+                </a:solidFill>
+                <a:latin typeface="Calibri" pitchFamily="34" charset="0"/>
+                <a:ea typeface="Calibri" pitchFamily="34" charset="-122"/>
+                <a:cs typeface="Calibri" pitchFamily="34" charset="-120"/>
+              </a:rPr>
+              <a:t>• Memory provider extracts facts to remember</a:t>
+            </a:r>
+            <a:endParaRPr lang="en-US" sz="1100" dirty="0"/>
+          </a:p>
+          <a:p>
+            <a:pPr indent="0" marL="0">
+              <a:buNone/>
+            </a:pPr>
+            <a:r>
+              <a:rPr lang="en-US" sz="1100" dirty="0">
+                <a:solidFill>
+                  <a:srgbClr val="212121"/>
+                </a:solidFill>
+                <a:latin typeface="Calibri" pitchFamily="34" charset="0"/>
+                <a:ea typeface="Calibri" pitchFamily="34" charset="-122"/>
+                <a:cs typeface="Calibri" pitchFamily="34" charset="-120"/>
+              </a:rPr>
+              <a:t>• Custom provider updates session state</a:t>
+            </a:r>
+            <a:endParaRPr lang="en-US" sz="1100" dirty="0"/>
+          </a:p>
+        </p:txBody>
+      </p:sp>
+      <p:sp>
+        <p:nvSpPr>
+          <p:cNvPr id="16" name="Text 14"/>
+          <p:cNvSpPr/>
+          <p:nvPr/>
+        </p:nvSpPr>
+        <p:spPr>
+          <a:xfrm>
+            <a:off x="365760" y="4892040"/>
+            <a:ext cx="8412480" cy="274320"/>
+          </a:xfrm>
+          <a:prstGeom prst="rect">
+            <a:avLst/>
+          </a:prstGeom>
+          <a:noFill/>
+          <a:ln/>
+        </p:spPr>
+        <p:txBody>
+          <a:bodyPr wrap="square" rtlCol="0" anchor="ctr"/>
+          <a:lstStyle/>
+          <a:p>
+            <a:pPr algn="ctr" indent="0" marL="0">
+              <a:buNone/>
+            </a:pPr>
+            <a:r>
+              <a:rPr lang="en-US" sz="1100" i="1" dirty="0">
+                <a:solidFill>
+                  <a:srgbClr val="6B7280"/>
+                </a:solidFill>
+                <a:latin typeface="Calibri" pitchFamily="34" charset="0"/>
+                <a:ea typeface="Calibri" pitchFamily="34" charset="-122"/>
+                <a:cs typeface="Calibri" pitchFamily="34" charset="-120"/>
+              </a:rPr>
+              <a:t>You register providers once when creating the agent. They participate in every invocation.</a:t>
+            </a:r>
+            <a:endParaRPr lang="en-US" sz="1100" dirty="0"/>
+          </a:p>
+        </p:txBody>
+      </p:sp>
+      <p:sp>
+        <p:nvSpPr>
+          <p:cNvPr id="17" name="Text 15"/>
+          <p:cNvSpPr/>
+          <p:nvPr/>
+        </p:nvSpPr>
+        <p:spPr>
+          <a:xfrm>
+            <a:off x="365760" y="5212080"/>
+            <a:ext cx="8412480" cy="201168"/>
+          </a:xfrm>
+          <a:prstGeom prst="rect">
+            <a:avLst/>
+          </a:prstGeom>
+          <a:noFill/>
+          <a:ln/>
+        </p:spPr>
+        <p:txBody>
+          <a:bodyPr wrap="square" rtlCol="0" anchor="ctr"/>
+          <a:lstStyle/>
+          <a:p>
+            <a:pPr algn="ctr" indent="0" marL="0">
+              <a:buNone/>
+            </a:pPr>
+            <a:r>
+              <a:rPr lang="en-US" sz="800" i="1" dirty="0">
+                <a:solidFill>
+                  <a:srgbClr val="6B7280"/>
+                </a:solidFill>
+                <a:latin typeface="Calibri" pitchFamily="34" charset="0"/>
+                <a:ea typeface="Calibri" pitchFamily="34" charset="-122"/>
+                <a:cs typeface="Calibri" pitchFamily="34" charset="-120"/>
+              </a:rPr>
+              <a:t>Diagram: Microsoft Learn · aka.ms/agent-framework/journey/adding-context-providers</a:t>
+            </a:r>
+            <a:endParaRPr lang="en-US" sz="800" dirty="0"/>
           </a:p>
         </p:txBody>
       </p:sp>
@@ -4075,7 +8451,7 @@
     <p:bg>
       <p:bgPr>
         <a:solidFill>
-          <a:srgbClr val="FFFFFF"/>
+          <a:srgbClr val="CADCFC"/>
         </a:solidFill>
       </p:bgPr>
     </p:bg>
@@ -4102,7 +8478,7 @@
         <p:spPr>
           <a:xfrm>
             <a:off x="0" y="0"/>
-            <a:ext cx="54864" cy="5143500"/>
+            <a:ext cx="146304" cy="5143500"/>
           </a:xfrm>
           <a:prstGeom prst="rect">
             <a:avLst/>
@@ -4146,7 +8522,7 @@
                 <a:ea typeface="Calibri" pitchFamily="34" charset="-122"/>
                 <a:cs typeface="Calibri" pitchFamily="34" charset="-120"/>
               </a:rPr>
-              <a:t>Day 1 · Module 3</a:t>
+              <a:t>Day 1 · Module 3 · Demo</a:t>
             </a:r>
             <a:endParaRPr lang="en-US" sz="1000" dirty="0"/>
           </a:p>
@@ -4160,8 +8536,8 @@
         </p:nvSpPr>
         <p:spPr>
           <a:xfrm>
-            <a:off x="365760" y="320040"/>
-            <a:ext cx="6217920" cy="640080"/>
+            <a:off x="548640" y="1051560"/>
+            <a:ext cx="5486400" cy="502920"/>
           </a:xfrm>
           <a:prstGeom prst="rect">
             <a:avLst/>
@@ -4177,7 +8553,7 @@
               <a:buNone/>
             </a:pPr>
             <a:r>
-              <a:rPr lang="en-US" sz="2800" b="1" dirty="0">
+              <a:rPr lang="en-US" sz="3200" b="1" spc="800" kern="0" dirty="0">
                 <a:solidFill>
                   <a:srgbClr val="1E2761"/>
                 </a:solidFill>
@@ -4185,9 +8561,9 @@
                 <a:ea typeface="Calibri" pitchFamily="34" charset="-122"/>
                 <a:cs typeface="Calibri" pitchFamily="34" charset="-120"/>
               </a:rPr>
-              <a:t>Takeaways</a:t>
-            </a:r>
-            <a:endParaRPr lang="en-US" sz="2800" dirty="0"/>
+              <a:t>DEMO</a:t>
+            </a:r>
+            <a:endParaRPr lang="en-US" sz="3200" dirty="0"/>
           </a:p>
         </p:txBody>
       </p:sp>
@@ -4199,8 +8575,8 @@
         </p:nvSpPr>
         <p:spPr>
           <a:xfrm>
-            <a:off x="365760" y="1097280"/>
-            <a:ext cx="8412480" cy="3108960"/>
+            <a:off x="548640" y="1691640"/>
+            <a:ext cx="8046720" cy="914400"/>
           </a:xfrm>
           <a:prstGeom prst="rect">
             <a:avLst/>
@@ -4209,18 +8585,95 @@
           <a:ln/>
         </p:spPr>
         <p:txBody>
-          <a:bodyPr wrap="square" rtlCol="0" anchor="ctr"/>
-          <a:lstStyle/>
-          <a:p>
-            <a:pPr marL="342900" indent="-342900">
+          <a:bodyPr wrap="square" lIns="0" tIns="0" rIns="0" bIns="0" rtlCol="0" anchor="ctr"/>
+          <a:lstStyle/>
+          <a:p>
+            <a:pPr indent="0" marL="0">
+              <a:buNone/>
+            </a:pPr>
+            <a:r>
+              <a:rPr lang="en-US" sz="3000" b="1" dirty="0">
+                <a:solidFill>
+                  <a:srgbClr val="1E2761"/>
+                </a:solidFill>
+                <a:latin typeface="Calibri" pitchFamily="34" charset="0"/>
+                <a:ea typeface="Calibri" pitchFamily="34" charset="-122"/>
+                <a:cs typeface="Calibri" pitchFamily="34" charset="-120"/>
+              </a:rPr>
+              <a:t>Tool vs. context provider — which fires when?</a:t>
+            </a:r>
+            <a:endParaRPr lang="en-US" sz="3000" dirty="0"/>
+          </a:p>
+        </p:txBody>
+      </p:sp>
+      <p:sp>
+        <p:nvSpPr>
+          <p:cNvPr id="6" name="Text 4"/>
+          <p:cNvSpPr/>
+          <p:nvPr/>
+        </p:nvSpPr>
+        <p:spPr>
+          <a:xfrm>
+            <a:off x="6583680" y="1051560"/>
+            <a:ext cx="2194560" cy="502920"/>
+          </a:xfrm>
+          <a:prstGeom prst="rect">
+            <a:avLst/>
+          </a:prstGeom>
+          <a:noFill/>
+          <a:ln/>
+        </p:spPr>
+        <p:txBody>
+          <a:bodyPr wrap="square" lIns="0" tIns="0" rIns="0" bIns="0" rtlCol="0" anchor="ctr"/>
+          <a:lstStyle/>
+          <a:p>
+            <a:pPr algn="r" indent="0" marL="0">
+              <a:buNone/>
+            </a:pPr>
+            <a:r>
+              <a:rPr lang="en-US" sz="1800" i="1" dirty="0">
+                <a:solidFill>
+                  <a:srgbClr val="6B7280"/>
+                </a:solidFill>
+                <a:latin typeface="Calibri" pitchFamily="34" charset="0"/>
+                <a:ea typeface="Calibri" pitchFamily="34" charset="-122"/>
+                <a:cs typeface="Calibri" pitchFamily="34" charset="-120"/>
+              </a:rPr>
+              <a:t>~4 min</a:t>
+            </a:r>
+            <a:endParaRPr lang="en-US" sz="1800" dirty="0"/>
+          </a:p>
+        </p:txBody>
+      </p:sp>
+      <p:sp>
+        <p:nvSpPr>
+          <p:cNvPr id="7" name="Text 5"/>
+          <p:cNvSpPr/>
+          <p:nvPr/>
+        </p:nvSpPr>
+        <p:spPr>
+          <a:xfrm>
+            <a:off x="548640" y="2788920"/>
+            <a:ext cx="8046720" cy="1371600"/>
+          </a:xfrm>
+          <a:prstGeom prst="rect">
+            <a:avLst/>
+          </a:prstGeom>
+          <a:noFill/>
+          <a:ln/>
+        </p:spPr>
+        <p:txBody>
+          <a:bodyPr wrap="square" lIns="0" tIns="0" rIns="0" bIns="0" rtlCol="0" anchor="ctr"/>
+          <a:lstStyle/>
+          <a:p>
+            <a:pPr indent="0" marL="0">
               <a:spcAft>
                 <a:spcPts val="600"/>
               </a:spcAft>
-              <a:buSzPct val="100000"/>
-              <a:buChar char="•"/>
-            </a:pPr>
-            <a:r>
-              <a:rPr lang="en-US" sz="1500" dirty="0">
+              <a:buNone/>
+            </a:pPr>
+            <a:r>
+              <a:rPr lang="en-US" sz="1600" dirty="0">
                 <a:solidFill>
                   <a:srgbClr val="212121"/>
                 </a:solidFill>
@@ -4228,105 +8681,22 @@
                 <a:ea typeface="Calibri" pitchFamily="34" charset="-122"/>
                 <a:cs typeface="Calibri" pitchFamily="34" charset="-120"/>
               </a:rPr>
-              <a:t>Prompts still matter — you'll just write fewer of them, more carefully.</a:t>
-            </a:r>
-            <a:endParaRPr lang="en-US" sz="1500" dirty="0"/>
-          </a:p>
-          <a:p>
-            <a:pPr marL="342900" indent="-342900">
-              <a:spcAft>
-                <a:spcPts val="600"/>
-              </a:spcAft>
-              <a:buSzPct val="100000"/>
-              <a:buChar char="•"/>
-            </a:pPr>
-            <a:r>
-              <a:rPr lang="en-US" sz="1500" dirty="0">
-                <a:solidFill>
-                  <a:srgbClr val="212121"/>
-                </a:solidFill>
-                <a:latin typeface="Calibri" pitchFamily="34" charset="0"/>
-                <a:ea typeface="Calibri" pitchFamily="34" charset="-122"/>
-                <a:cs typeface="Calibri" pitchFamily="34" charset="-120"/>
-              </a:rPr>
-              <a:t>Structure &gt; prose. Contracts &gt; pleas.</a:t>
-            </a:r>
-            <a:endParaRPr lang="en-US" sz="1500" dirty="0"/>
-          </a:p>
-          <a:p>
-            <a:pPr marL="342900" indent="-342900">
-              <a:spcAft>
-                <a:spcPts val="600"/>
-              </a:spcAft>
-              <a:buSzPct val="100000"/>
-              <a:buChar char="•"/>
-            </a:pPr>
-            <a:r>
-              <a:rPr lang="en-US" sz="1500" dirty="0">
-                <a:solidFill>
-                  <a:srgbClr val="212121"/>
-                </a:solidFill>
-                <a:latin typeface="Calibri" pitchFamily="34" charset="0"/>
-                <a:ea typeface="Calibri" pitchFamily="34" charset="-122"/>
-                <a:cs typeface="Calibri" pitchFamily="34" charset="-120"/>
-              </a:rPr>
-              <a:t>Iterate against an eval set, not intuition.</a:t>
-            </a:r>
-            <a:endParaRPr lang="en-US" sz="1500" dirty="0"/>
-          </a:p>
-          <a:p>
-            <a:pPr marL="342900" indent="-342900">
-              <a:spcAft>
-                <a:spcPts val="600"/>
-              </a:spcAft>
-              <a:buSzPct val="100000"/>
-              <a:buChar char="•"/>
-            </a:pPr>
-            <a:r>
-              <a:rPr lang="en-US" sz="1500" dirty="0">
-                <a:solidFill>
-                  <a:srgbClr val="212121"/>
-                </a:solidFill>
-                <a:latin typeface="Calibri" pitchFamily="34" charset="0"/>
-                <a:ea typeface="Calibri" pitchFamily="34" charset="-122"/>
-                <a:cs typeface="Calibri" pitchFamily="34" charset="-120"/>
-              </a:rPr>
-              <a:t>Every instruction, tool docstring, and output schema is a prompt.</a:t>
-            </a:r>
-            <a:endParaRPr lang="en-US" sz="1500" dirty="0"/>
-          </a:p>
-        </p:txBody>
-      </p:sp>
-      <p:sp>
-        <p:nvSpPr>
-          <p:cNvPr id="6" name="Shape 4"/>
+              <a:t>Same agent, same question, two configurations. Left pane wires get_user_orders as a tool — model decides to call, latency shows. Right pane injects the same data via a context provider — data was already in the prompt, answer is instant. Latency delta + reasoning delta prove the tools-vs-providers distinction.</a:t>
+            </a:r>
+            <a:endParaRPr lang="en-US" sz="1600" dirty="0"/>
+          </a:p>
+        </p:txBody>
+      </p:sp>
+      <p:sp>
+        <p:nvSpPr>
+          <p:cNvPr id="8" name="Text 6"/>
           <p:cNvSpPr/>
           <p:nvPr/>
         </p:nvSpPr>
         <p:spPr>
           <a:xfrm>
-            <a:off x="365760" y="4343400"/>
-            <a:ext cx="8412480" cy="457200"/>
-          </a:xfrm>
-          <a:prstGeom prst="rect">
-            <a:avLst/>
-          </a:prstGeom>
-          <a:solidFill>
-            <a:srgbClr val="CADCFC"/>
-          </a:solidFill>
-          <a:ln/>
-        </p:spPr>
-      </p:sp>
-      <p:sp>
-        <p:nvSpPr>
-          <p:cNvPr id="7" name="Text 5"/>
-          <p:cNvSpPr/>
-          <p:nvPr/>
-        </p:nvSpPr>
-        <p:spPr>
-          <a:xfrm>
-            <a:off x="502920" y="4370832"/>
-            <a:ext cx="8138160" cy="402336"/>
+            <a:off x="548640" y="4434840"/>
+            <a:ext cx="8046720" cy="320040"/>
           </a:xfrm>
           <a:prstGeom prst="rect">
             <a:avLst/>
@@ -4342,31 +8712,17 @@
               <a:buNone/>
             </a:pPr>
             <a:r>
-              <a:rPr lang="en-US" sz="1600" b="1" dirty="0">
-                <a:solidFill>
-                  <a:srgbClr val="1E2761"/>
-                </a:solidFill>
-                <a:latin typeface="Calibri" pitchFamily="34" charset="0"/>
-                <a:ea typeface="Calibri" pitchFamily="34" charset="-122"/>
-                <a:cs typeface="Calibri" pitchFamily="34" charset="-120"/>
-              </a:rPr>
-              <a:t>Next: </a:t>
-            </a:r>
-            <a:pPr indent="0" marL="0">
-              <a:buNone/>
-            </a:pPr>
-            <a:r>
-              <a:rPr lang="en-US" sz="1600" dirty="0">
-                <a:solidFill>
-                  <a:srgbClr val="1E2761"/>
-                </a:solidFill>
-                <a:latin typeface="Calibri" pitchFamily="34" charset="0"/>
-                <a:ea typeface="Calibri" pitchFamily="34" charset="-122"/>
-                <a:cs typeface="Calibri" pitchFamily="34" charset="-120"/>
-              </a:rPr>
-              <a:t>MAF 101 — the core primitives you'll use every day this week.</a:t>
-            </a:r>
-            <a:endParaRPr lang="en-US" sz="1600" dirty="0"/>
+              <a:rPr lang="en-US" sz="1100" i="1" dirty="0">
+                <a:solidFill>
+                  <a:srgbClr val="6B7280"/>
+                </a:solidFill>
+                <a:latin typeface="Calibri" pitchFamily="34" charset="0"/>
+                <a:ea typeface="Calibri" pitchFamily="34" charset="-122"/>
+                <a:cs typeface="Calibri" pitchFamily="34" charset="-120"/>
+              </a:rPr>
+              <a:t>Runbook: demos/day1/module-3-demo-2-tool-vs-provider.md</a:t>
+            </a:r>
+            <a:endParaRPr lang="en-US" sz="1100" dirty="0"/>
           </a:p>
         </p:txBody>
       </p:sp>

--- a/decks/day1/module-3-prompt-engineering.pptx
+++ b/decks/day1/module-3-prompt-engineering.pptx
@@ -3769,11 +3769,11 @@
             <a:avLst/>
           </a:prstGeom>
           <a:solidFill>
-            <a:srgbClr val="F3F4F6"/>
+            <a:srgbClr val="1D1E22"/>
           </a:solidFill>
-          <a:ln w="6350">
+          <a:ln w="9525">
             <a:solidFill>
-              <a:srgbClr val="D1D5DB"/>
+              <a:srgbClr val="2A2B2E"/>
             </a:solidFill>
             <a:prstDash val="solid"/>
           </a:ln>
@@ -3797,7 +3797,9 @@
           <a:ln/>
         </p:spPr>
         <p:txBody>
-          <a:bodyPr wrap="square" lIns="0" tIns="0" rIns="0" bIns="0" rtlCol="0" anchor="t"/>
+          <a:bodyPr wrap="square" lIns="0" tIns="0" rIns="0" bIns="0" rtlCol="0" anchor="t">
+            <a:normAutofit/>
+          </a:bodyPr>
           <a:lstStyle/>
           <a:p>
             <a:pPr indent="0" marL="0">
@@ -3806,70 +3808,55 @@
             <a:r>
               <a:rPr lang="en-US" sz="1300" dirty="0">
                 <a:solidFill>
-                  <a:srgbClr val="212121"/>
+                  <a:srgbClr val="A996B6"/>
                 </a:solidFill>
                 <a:latin typeface="Consolas" pitchFamily="34" charset="0"/>
                 <a:ea typeface="Consolas" pitchFamily="34" charset="-122"/>
                 <a:cs typeface="Consolas" pitchFamily="34" charset="-120"/>
               </a:rPr>
-              <a:t>from agent_framework import Agent</a:t>
-            </a:r>
-            <a:endParaRPr lang="en-US" sz="1300" dirty="0"/>
-          </a:p>
-          <a:p>
+              <a:t>from</a:t>
+            </a:r>
             <a:pPr indent="0" marL="0">
               <a:buNone/>
             </a:pPr>
             <a:r>
               <a:rPr lang="en-US" sz="1300" dirty="0">
                 <a:solidFill>
-                  <a:srgbClr val="212121"/>
+                  <a:srgbClr val="FFFFFF"/>
                 </a:solidFill>
                 <a:latin typeface="Consolas" pitchFamily="34" charset="0"/>
                 <a:ea typeface="Consolas" pitchFamily="34" charset="-122"/>
                 <a:cs typeface="Consolas" pitchFamily="34" charset="-120"/>
               </a:rPr>
-              <a:t>from agent_framework.foundry import FoundryChatClient</a:t>
-            </a:r>
-            <a:endParaRPr lang="en-US" sz="1300" dirty="0"/>
-          </a:p>
-          <a:p>
+              <a:t> agent_framework </a:t>
+            </a:r>
             <a:pPr indent="0" marL="0">
               <a:buNone/>
             </a:pPr>
             <a:r>
               <a:rPr lang="en-US" sz="1300" dirty="0">
                 <a:solidFill>
-                  <a:srgbClr val="212121"/>
+                  <a:srgbClr val="A996B6"/>
                 </a:solidFill>
                 <a:latin typeface="Consolas" pitchFamily="34" charset="0"/>
                 <a:ea typeface="Consolas" pitchFamily="34" charset="-122"/>
                 <a:cs typeface="Consolas" pitchFamily="34" charset="-120"/>
               </a:rPr>
-              <a:t>from azure.identity import AzureCliCredential</a:t>
-            </a:r>
-            <a:endParaRPr lang="en-US" sz="1300" dirty="0"/>
-          </a:p>
-          <a:p>
+              <a:t>import</a:t>
+            </a:r>
             <a:pPr indent="0" marL="0">
               <a:buNone/>
             </a:pPr>
-            <a:endParaRPr lang="en-US" sz="1300" dirty="0"/>
-          </a:p>
-          <a:p>
-            <a:pPr indent="0" marL="0">
-              <a:buNone/>
-            </a:pPr>
             <a:r>
               <a:rPr lang="en-US" sz="1300" dirty="0">
                 <a:solidFill>
-                  <a:srgbClr val="212121"/>
+                  <a:srgbClr val="FFFFFF"/>
                 </a:solidFill>
                 <a:latin typeface="Consolas" pitchFamily="34" charset="0"/>
                 <a:ea typeface="Consolas" pitchFamily="34" charset="-122"/>
                 <a:cs typeface="Consolas" pitchFamily="34" charset="-120"/>
               </a:rPr>
-              <a:t>agent = Agent(</a:t>
+              <a:t> Agent</a:t>
             </a:r>
             <a:endParaRPr lang="en-US" sz="1300" dirty="0"/>
           </a:p>
@@ -3880,64 +3867,55 @@
             <a:r>
               <a:rPr lang="en-US" sz="1300" dirty="0">
                 <a:solidFill>
-                  <a:srgbClr val="212121"/>
+                  <a:srgbClr val="A996B6"/>
                 </a:solidFill>
                 <a:latin typeface="Consolas" pitchFamily="34" charset="0"/>
                 <a:ea typeface="Consolas" pitchFamily="34" charset="-122"/>
                 <a:cs typeface="Consolas" pitchFamily="34" charset="-120"/>
               </a:rPr>
-              <a:t>    client=FoundryChatClient(credential=AzureCliCredential()),</a:t>
-            </a:r>
-            <a:endParaRPr lang="en-US" sz="1300" dirty="0"/>
-          </a:p>
-          <a:p>
+              <a:t>from</a:t>
+            </a:r>
             <a:pPr indent="0" marL="0">
               <a:buNone/>
             </a:pPr>
             <a:r>
               <a:rPr lang="en-US" sz="1300" dirty="0">
                 <a:solidFill>
-                  <a:srgbClr val="212121"/>
+                  <a:srgbClr val="FFFFFF"/>
                 </a:solidFill>
                 <a:latin typeface="Consolas" pitchFamily="34" charset="0"/>
                 <a:ea typeface="Consolas" pitchFamily="34" charset="-122"/>
                 <a:cs typeface="Consolas" pitchFamily="34" charset="-120"/>
               </a:rPr>
-              <a:t>    name="DocsAssistant",</a:t>
-            </a:r>
-            <a:endParaRPr lang="en-US" sz="1300" dirty="0"/>
-          </a:p>
-          <a:p>
+              <a:t> agent_framework.foundry </a:t>
+            </a:r>
             <a:pPr indent="0" marL="0">
               <a:buNone/>
             </a:pPr>
             <a:r>
               <a:rPr lang="en-US" sz="1300" dirty="0">
                 <a:solidFill>
-                  <a:srgbClr val="212121"/>
+                  <a:srgbClr val="A996B6"/>
                 </a:solidFill>
                 <a:latin typeface="Consolas" pitchFamily="34" charset="0"/>
                 <a:ea typeface="Consolas" pitchFamily="34" charset="-122"/>
                 <a:cs typeface="Consolas" pitchFamily="34" charset="-120"/>
               </a:rPr>
-              <a:t>    instructions=(</a:t>
-            </a:r>
-            <a:endParaRPr lang="en-US" sz="1300" dirty="0"/>
-          </a:p>
-          <a:p>
+              <a:t>import</a:t>
+            </a:r>
             <a:pPr indent="0" marL="0">
               <a:buNone/>
             </a:pPr>
             <a:r>
               <a:rPr lang="en-US" sz="1300" dirty="0">
                 <a:solidFill>
-                  <a:srgbClr val="212121"/>
+                  <a:srgbClr val="FFFFFF"/>
                 </a:solidFill>
                 <a:latin typeface="Consolas" pitchFamily="34" charset="0"/>
                 <a:ea typeface="Consolas" pitchFamily="34" charset="-122"/>
                 <a:cs typeface="Consolas" pitchFamily="34" charset="-120"/>
               </a:rPr>
-              <a:t>        "## Role\n"</a:t>
+              <a:t> FoundryChatClient</a:t>
             </a:r>
             <a:endParaRPr lang="en-US" sz="1300" dirty="0"/>
           </a:p>
@@ -3948,64 +3926,55 @@
             <a:r>
               <a:rPr lang="en-US" sz="1300" dirty="0">
                 <a:solidFill>
-                  <a:srgbClr val="212121"/>
+                  <a:srgbClr val="A996B6"/>
                 </a:solidFill>
                 <a:latin typeface="Consolas" pitchFamily="34" charset="0"/>
                 <a:ea typeface="Consolas" pitchFamily="34" charset="-122"/>
                 <a:cs typeface="Consolas" pitchFamily="34" charset="-120"/>
               </a:rPr>
-              <a:t>        "You are a technical documentation assistant.\n\n"</a:t>
-            </a:r>
-            <a:endParaRPr lang="en-US" sz="1300" dirty="0"/>
-          </a:p>
-          <a:p>
+              <a:t>from</a:t>
+            </a:r>
             <a:pPr indent="0" marL="0">
               <a:buNone/>
             </a:pPr>
             <a:r>
               <a:rPr lang="en-US" sz="1300" dirty="0">
                 <a:solidFill>
-                  <a:srgbClr val="212121"/>
+                  <a:srgbClr val="FFFFFF"/>
                 </a:solidFill>
                 <a:latin typeface="Consolas" pitchFamily="34" charset="0"/>
                 <a:ea typeface="Consolas" pitchFamily="34" charset="-122"/>
                 <a:cs typeface="Consolas" pitchFamily="34" charset="-120"/>
               </a:rPr>
-              <a:t>        "## Rules\n"</a:t>
-            </a:r>
-            <a:endParaRPr lang="en-US" sz="1300" dirty="0"/>
-          </a:p>
-          <a:p>
+              <a:t> azure.identity </a:t>
+            </a:r>
             <a:pPr indent="0" marL="0">
               <a:buNone/>
             </a:pPr>
             <a:r>
               <a:rPr lang="en-US" sz="1300" dirty="0">
                 <a:solidFill>
-                  <a:srgbClr val="212121"/>
+                  <a:srgbClr val="A996B6"/>
                 </a:solidFill>
                 <a:latin typeface="Consolas" pitchFamily="34" charset="0"/>
                 <a:ea typeface="Consolas" pitchFamily="34" charset="-122"/>
                 <a:cs typeface="Consolas" pitchFamily="34" charset="-120"/>
               </a:rPr>
-              <a:t>        "- Cite sources for factual claims.\n"</a:t>
-            </a:r>
-            <a:endParaRPr lang="en-US" sz="1300" dirty="0"/>
-          </a:p>
-          <a:p>
+              <a:t>import</a:t>
+            </a:r>
             <a:pPr indent="0" marL="0">
               <a:buNone/>
             </a:pPr>
             <a:r>
               <a:rPr lang="en-US" sz="1300" dirty="0">
                 <a:solidFill>
-                  <a:srgbClr val="212121"/>
+                  <a:srgbClr val="FFFFFF"/>
                 </a:solidFill>
                 <a:latin typeface="Consolas" pitchFamily="34" charset="0"/>
                 <a:ea typeface="Consolas" pitchFamily="34" charset="-122"/>
                 <a:cs typeface="Consolas" pitchFamily="34" charset="-120"/>
               </a:rPr>
-              <a:t>        "- Say 'I don't know' when you don't.\n"</a:t>
+              <a:t> AzureCliCredential</a:t>
             </a:r>
             <a:endParaRPr lang="en-US" sz="1300" dirty="0"/>
           </a:p>
@@ -4013,15 +3982,272 @@
             <a:pPr indent="0" marL="0">
               <a:buNone/>
             </a:pPr>
+            <a:endParaRPr lang="en-US" sz="1300" dirty="0"/>
+          </a:p>
+          <a:p>
+            <a:pPr indent="0" marL="0">
+              <a:buNone/>
+            </a:pPr>
             <a:r>
               <a:rPr lang="en-US" sz="1300" dirty="0">
                 <a:solidFill>
-                  <a:srgbClr val="212121"/>
+                  <a:srgbClr val="FFFFFF"/>
                 </a:solidFill>
                 <a:latin typeface="Consolas" pitchFamily="34" charset="0"/>
                 <a:ea typeface="Consolas" pitchFamily="34" charset="-122"/>
                 <a:cs typeface="Consolas" pitchFamily="34" charset="-120"/>
               </a:rPr>
+              <a:t>agent = Agent(</a:t>
+            </a:r>
+            <a:endParaRPr lang="en-US" sz="1300" dirty="0"/>
+          </a:p>
+          <a:p>
+            <a:pPr indent="0" marL="0">
+              <a:buNone/>
+            </a:pPr>
+            <a:r>
+              <a:rPr lang="en-US" sz="1300" dirty="0">
+                <a:solidFill>
+                  <a:srgbClr val="FFFFFF"/>
+                </a:solidFill>
+                <a:latin typeface="Consolas" pitchFamily="34" charset="0"/>
+                <a:ea typeface="Consolas" pitchFamily="34" charset="-122"/>
+                <a:cs typeface="Consolas" pitchFamily="34" charset="-120"/>
+              </a:rPr>
+              <a:t>    client=FoundryChatClient(credential=AzureCliCredential()),</a:t>
+            </a:r>
+            <a:endParaRPr lang="en-US" sz="1300" dirty="0"/>
+          </a:p>
+          <a:p>
+            <a:pPr indent="0" marL="0">
+              <a:buNone/>
+            </a:pPr>
+            <a:r>
+              <a:rPr lang="en-US" sz="1300" dirty="0">
+                <a:solidFill>
+                  <a:srgbClr val="FFFFFF"/>
+                </a:solidFill>
+                <a:latin typeface="Consolas" pitchFamily="34" charset="0"/>
+                <a:ea typeface="Consolas" pitchFamily="34" charset="-122"/>
+                <a:cs typeface="Consolas" pitchFamily="34" charset="-120"/>
+              </a:rPr>
+              <a:t>    name=</a:t>
+            </a:r>
+            <a:pPr indent="0" marL="0">
+              <a:buNone/>
+            </a:pPr>
+            <a:r>
+              <a:rPr lang="en-US" sz="1300" dirty="0">
+                <a:solidFill>
+                  <a:srgbClr val="E4C98A"/>
+                </a:solidFill>
+                <a:latin typeface="Consolas" pitchFamily="34" charset="0"/>
+                <a:ea typeface="Consolas" pitchFamily="34" charset="-122"/>
+                <a:cs typeface="Consolas" pitchFamily="34" charset="-120"/>
+              </a:rPr>
+              <a:t>"DocsAssistant"</a:t>
+            </a:r>
+            <a:pPr indent="0" marL="0">
+              <a:buNone/>
+            </a:pPr>
+            <a:r>
+              <a:rPr lang="en-US" sz="1300" dirty="0">
+                <a:solidFill>
+                  <a:srgbClr val="FFFFFF"/>
+                </a:solidFill>
+                <a:latin typeface="Consolas" pitchFamily="34" charset="0"/>
+                <a:ea typeface="Consolas" pitchFamily="34" charset="-122"/>
+                <a:cs typeface="Consolas" pitchFamily="34" charset="-120"/>
+              </a:rPr>
+              <a:t>,</a:t>
+            </a:r>
+            <a:endParaRPr lang="en-US" sz="1300" dirty="0"/>
+          </a:p>
+          <a:p>
+            <a:pPr indent="0" marL="0">
+              <a:buNone/>
+            </a:pPr>
+            <a:r>
+              <a:rPr lang="en-US" sz="1300" dirty="0">
+                <a:solidFill>
+                  <a:srgbClr val="FFFFFF"/>
+                </a:solidFill>
+                <a:latin typeface="Consolas" pitchFamily="34" charset="0"/>
+                <a:ea typeface="Consolas" pitchFamily="34" charset="-122"/>
+                <a:cs typeface="Consolas" pitchFamily="34" charset="-120"/>
+              </a:rPr>
+              <a:t>    instructions=(</a:t>
+            </a:r>
+            <a:endParaRPr lang="en-US" sz="1300" dirty="0"/>
+          </a:p>
+          <a:p>
+            <a:pPr indent="0" marL="0">
+              <a:buNone/>
+            </a:pPr>
+            <a:r>
+              <a:rPr lang="en-US" sz="1300" dirty="0">
+                <a:solidFill>
+                  <a:srgbClr val="FFFFFF"/>
+                </a:solidFill>
+                <a:latin typeface="Consolas" pitchFamily="34" charset="0"/>
+                <a:ea typeface="Consolas" pitchFamily="34" charset="-122"/>
+                <a:cs typeface="Consolas" pitchFamily="34" charset="-120"/>
+              </a:rPr>
+              <a:t>        </a:t>
+            </a:r>
+            <a:pPr indent="0" marL="0">
+              <a:buNone/>
+            </a:pPr>
+            <a:r>
+              <a:rPr lang="en-US" sz="1300" dirty="0">
+                <a:solidFill>
+                  <a:srgbClr val="E4C98A"/>
+                </a:solidFill>
+                <a:latin typeface="Consolas" pitchFamily="34" charset="0"/>
+                <a:ea typeface="Consolas" pitchFamily="34" charset="-122"/>
+                <a:cs typeface="Consolas" pitchFamily="34" charset="-120"/>
+              </a:rPr>
+              <a:t>"## Role\n"</a:t>
+            </a:r>
+            <a:endParaRPr lang="en-US" sz="1300" dirty="0"/>
+          </a:p>
+          <a:p>
+            <a:pPr indent="0" marL="0">
+              <a:buNone/>
+            </a:pPr>
+            <a:r>
+              <a:rPr lang="en-US" sz="1300" dirty="0">
+                <a:solidFill>
+                  <a:srgbClr val="FFFFFF"/>
+                </a:solidFill>
+                <a:latin typeface="Consolas" pitchFamily="34" charset="0"/>
+                <a:ea typeface="Consolas" pitchFamily="34" charset="-122"/>
+                <a:cs typeface="Consolas" pitchFamily="34" charset="-120"/>
+              </a:rPr>
+              <a:t>        </a:t>
+            </a:r>
+            <a:pPr indent="0" marL="0">
+              <a:buNone/>
+            </a:pPr>
+            <a:r>
+              <a:rPr lang="en-US" sz="1300" dirty="0">
+                <a:solidFill>
+                  <a:srgbClr val="E4C98A"/>
+                </a:solidFill>
+                <a:latin typeface="Consolas" pitchFamily="34" charset="0"/>
+                <a:ea typeface="Consolas" pitchFamily="34" charset="-122"/>
+                <a:cs typeface="Consolas" pitchFamily="34" charset="-120"/>
+              </a:rPr>
+              <a:t>"You are a technical documentation assistant.\n\n"</a:t>
+            </a:r>
+            <a:endParaRPr lang="en-US" sz="1300" dirty="0"/>
+          </a:p>
+          <a:p>
+            <a:pPr indent="0" marL="0">
+              <a:buNone/>
+            </a:pPr>
+            <a:r>
+              <a:rPr lang="en-US" sz="1300" dirty="0">
+                <a:solidFill>
+                  <a:srgbClr val="FFFFFF"/>
+                </a:solidFill>
+                <a:latin typeface="Consolas" pitchFamily="34" charset="0"/>
+                <a:ea typeface="Consolas" pitchFamily="34" charset="-122"/>
+                <a:cs typeface="Consolas" pitchFamily="34" charset="-120"/>
+              </a:rPr>
+              <a:t>        </a:t>
+            </a:r>
+            <a:pPr indent="0" marL="0">
+              <a:buNone/>
+            </a:pPr>
+            <a:r>
+              <a:rPr lang="en-US" sz="1300" dirty="0">
+                <a:solidFill>
+                  <a:srgbClr val="E4C98A"/>
+                </a:solidFill>
+                <a:latin typeface="Consolas" pitchFamily="34" charset="0"/>
+                <a:ea typeface="Consolas" pitchFamily="34" charset="-122"/>
+                <a:cs typeface="Consolas" pitchFamily="34" charset="-120"/>
+              </a:rPr>
+              <a:t>"## Rules\n"</a:t>
+            </a:r>
+            <a:endParaRPr lang="en-US" sz="1300" dirty="0"/>
+          </a:p>
+          <a:p>
+            <a:pPr indent="0" marL="0">
+              <a:buNone/>
+            </a:pPr>
+            <a:r>
+              <a:rPr lang="en-US" sz="1300" dirty="0">
+                <a:solidFill>
+                  <a:srgbClr val="FFFFFF"/>
+                </a:solidFill>
+                <a:latin typeface="Consolas" pitchFamily="34" charset="0"/>
+                <a:ea typeface="Consolas" pitchFamily="34" charset="-122"/>
+                <a:cs typeface="Consolas" pitchFamily="34" charset="-120"/>
+              </a:rPr>
+              <a:t>        </a:t>
+            </a:r>
+            <a:pPr indent="0" marL="0">
+              <a:buNone/>
+            </a:pPr>
+            <a:r>
+              <a:rPr lang="en-US" sz="1300" dirty="0">
+                <a:solidFill>
+                  <a:srgbClr val="E4C98A"/>
+                </a:solidFill>
+                <a:latin typeface="Consolas" pitchFamily="34" charset="0"/>
+                <a:ea typeface="Consolas" pitchFamily="34" charset="-122"/>
+                <a:cs typeface="Consolas" pitchFamily="34" charset="-120"/>
+              </a:rPr>
+              <a:t>"- Cite sources for factual claims.\n"</a:t>
+            </a:r>
+            <a:endParaRPr lang="en-US" sz="1300" dirty="0"/>
+          </a:p>
+          <a:p>
+            <a:pPr indent="0" marL="0">
+              <a:buNone/>
+            </a:pPr>
+            <a:r>
+              <a:rPr lang="en-US" sz="1300" dirty="0">
+                <a:solidFill>
+                  <a:srgbClr val="FFFFFF"/>
+                </a:solidFill>
+                <a:latin typeface="Consolas" pitchFamily="34" charset="0"/>
+                <a:ea typeface="Consolas" pitchFamily="34" charset="-122"/>
+                <a:cs typeface="Consolas" pitchFamily="34" charset="-120"/>
+              </a:rPr>
+              <a:t>        </a:t>
+            </a:r>
+            <a:pPr indent="0" marL="0">
+              <a:buNone/>
+            </a:pPr>
+            <a:r>
+              <a:rPr lang="en-US" sz="1300" dirty="0">
+                <a:solidFill>
+                  <a:srgbClr val="E4C98A"/>
+                </a:solidFill>
+                <a:latin typeface="Consolas" pitchFamily="34" charset="0"/>
+                <a:ea typeface="Consolas" pitchFamily="34" charset="-122"/>
+                <a:cs typeface="Consolas" pitchFamily="34" charset="-120"/>
+              </a:rPr>
+              <a:t>"- Say 'I don't know' when you don't.\n"</a:t>
+            </a:r>
+            <a:endParaRPr lang="en-US" sz="1300" dirty="0"/>
+          </a:p>
+          <a:p>
+            <a:pPr indent="0" marL="0">
+              <a:buNone/>
+            </a:pPr>
+            <a:r>
+              <a:rPr lang="en-US" sz="1300" dirty="0">
+                <a:solidFill>
+                  <a:srgbClr val="FFFFFF"/>
+                </a:solidFill>
+                <a:latin typeface="Consolas" pitchFamily="34" charset="0"/>
+                <a:ea typeface="Consolas" pitchFamily="34" charset="-122"/>
+                <a:cs typeface="Consolas" pitchFamily="34" charset="-120"/>
+              </a:rPr>
               <a:t>    ),</a:t>
             </a:r>
             <a:endParaRPr lang="en-US" sz="1300" dirty="0"/>
@@ -4033,7 +4259,7 @@
             <a:r>
               <a:rPr lang="en-US" sz="1300" dirty="0">
                 <a:solidFill>
-                  <a:srgbClr val="212121"/>
+                  <a:srgbClr val="FFFFFF"/>
                 </a:solidFill>
                 <a:latin typeface="Consolas" pitchFamily="34" charset="0"/>
                 <a:ea typeface="Consolas" pitchFamily="34" charset="-122"/>
@@ -4190,11 +4416,11 @@
             <a:avLst/>
           </a:prstGeom>
           <a:solidFill>
-            <a:srgbClr val="F3F4F6"/>
+            <a:srgbClr val="1D1E22"/>
           </a:solidFill>
-          <a:ln w="6350">
+          <a:ln w="9525">
             <a:solidFill>
-              <a:srgbClr val="D1D5DB"/>
+              <a:srgbClr val="2A2B2E"/>
             </a:solidFill>
             <a:prstDash val="solid"/>
           </a:ln>
@@ -4218,7 +4444,9 @@
           <a:ln/>
         </p:spPr>
         <p:txBody>
-          <a:bodyPr wrap="square" lIns="0" tIns="0" rIns="0" bIns="0" rtlCol="0" anchor="t"/>
+          <a:bodyPr wrap="square" lIns="0" tIns="0" rIns="0" bIns="0" rtlCol="0" anchor="t">
+            <a:normAutofit/>
+          </a:bodyPr>
           <a:lstStyle/>
           <a:p>
             <a:pPr indent="0" marL="0">
@@ -4227,7 +4455,7 @@
             <a:r>
               <a:rPr lang="en-US" sz="1300" dirty="0">
                 <a:solidFill>
-                  <a:srgbClr val="212121"/>
+                  <a:srgbClr val="A996B6"/>
                 </a:solidFill>
                 <a:latin typeface="Consolas" pitchFamily="34" charset="0"/>
                 <a:ea typeface="Consolas" pitchFamily="34" charset="-122"/>
@@ -4244,30 +4472,27 @@
             <a:r>
               <a:rPr lang="en-US" sz="1300" dirty="0">
                 <a:solidFill>
-                  <a:srgbClr val="212121"/>
+                  <a:srgbClr val="A996B6"/>
                 </a:solidFill>
                 <a:latin typeface="Consolas" pitchFamily="34" charset="0"/>
                 <a:ea typeface="Consolas" pitchFamily="34" charset="-122"/>
                 <a:cs typeface="Consolas" pitchFamily="34" charset="-120"/>
               </a:rPr>
-              <a:t>def create_ticket(title: str, body: str, priority: str) -&gt; str:</a:t>
-            </a:r>
-            <a:endParaRPr lang="en-US" sz="1300" dirty="0"/>
-          </a:p>
-          <a:p>
+              <a:t>def</a:t>
+            </a:r>
             <a:pPr indent="0" marL="0">
               <a:buNone/>
             </a:pPr>
             <a:r>
               <a:rPr lang="en-US" sz="1300" dirty="0">
                 <a:solidFill>
-                  <a:srgbClr val="212121"/>
+                  <a:srgbClr val="FFFFFF"/>
                 </a:solidFill>
                 <a:latin typeface="Consolas" pitchFamily="34" charset="0"/>
                 <a:ea typeface="Consolas" pitchFamily="34" charset="-122"/>
                 <a:cs typeface="Consolas" pitchFamily="34" charset="-120"/>
               </a:rPr>
-              <a:t>    """Create a support ticket.</a:t>
+              <a:t> create_ticket(title: str, body: str, priority: str) -&gt; str:</a:t>
             </a:r>
             <a:endParaRPr lang="en-US" sz="1300" dirty="0"/>
           </a:p>
@@ -4275,39 +4500,30 @@
             <a:pPr indent="0" marL="0">
               <a:buNone/>
             </a:pPr>
-            <a:endParaRPr lang="en-US" sz="1300" dirty="0"/>
-          </a:p>
-          <a:p>
-            <a:pPr indent="0" marL="0">
-              <a:buNone/>
-            </a:pPr>
             <a:r>
               <a:rPr lang="en-US" sz="1300" dirty="0">
                 <a:solidFill>
-                  <a:srgbClr val="212121"/>
+                  <a:srgbClr val="FFFFFF"/>
                 </a:solidFill>
                 <a:latin typeface="Consolas" pitchFamily="34" charset="0"/>
                 <a:ea typeface="Consolas" pitchFamily="34" charset="-122"/>
                 <a:cs typeface="Consolas" pitchFamily="34" charset="-120"/>
               </a:rPr>
-              <a:t>    Use this when the user reports a problem that needs a human</a:t>
-            </a:r>
-            <a:endParaRPr lang="en-US" sz="1300" dirty="0"/>
-          </a:p>
-          <a:p>
+              <a:t>    </a:t>
+            </a:r>
             <a:pPr indent="0" marL="0">
               <a:buNone/>
             </a:pPr>
             <a:r>
               <a:rPr lang="en-US" sz="1300" dirty="0">
                 <a:solidFill>
-                  <a:srgbClr val="212121"/>
+                  <a:srgbClr val="E4C98A"/>
                 </a:solidFill>
                 <a:latin typeface="Consolas" pitchFamily="34" charset="0"/>
                 <a:ea typeface="Consolas" pitchFamily="34" charset="-122"/>
                 <a:cs typeface="Consolas" pitchFamily="34" charset="-120"/>
               </a:rPr>
-              <a:t>    engineer to resolve. Do NOT use for questions you can answer</a:t>
+              <a:t>"""Create a support ticket.</a:t>
             </a:r>
             <a:endParaRPr lang="en-US" sz="1300" dirty="0"/>
           </a:p>
@@ -4315,16 +4531,22 @@
             <a:pPr indent="0" marL="0">
               <a:buNone/>
             </a:pPr>
+            <a:endParaRPr lang="en-US" sz="1300" dirty="0"/>
+          </a:p>
+          <a:p>
+            <a:pPr indent="0" marL="0">
+              <a:buNone/>
+            </a:pPr>
             <a:r>
               <a:rPr lang="en-US" sz="1300" dirty="0">
                 <a:solidFill>
-                  <a:srgbClr val="212121"/>
+                  <a:srgbClr val="E4C98A"/>
                 </a:solidFill>
                 <a:latin typeface="Consolas" pitchFamily="34" charset="0"/>
                 <a:ea typeface="Consolas" pitchFamily="34" charset="-122"/>
                 <a:cs typeface="Consolas" pitchFamily="34" charset="-120"/>
               </a:rPr>
-              <a:t>    from documentation. Priority must be one of low, med, high.</a:t>
+              <a:t>    Use this when the user reports a problem that needs a human</a:t>
             </a:r>
             <a:endParaRPr lang="en-US" sz="1300" dirty="0"/>
           </a:p>
@@ -4335,12 +4557,46 @@
             <a:r>
               <a:rPr lang="en-US" sz="1300" dirty="0">
                 <a:solidFill>
-                  <a:srgbClr val="212121"/>
+                  <a:srgbClr val="E4C98A"/>
                 </a:solidFill>
                 <a:latin typeface="Consolas" pitchFamily="34" charset="0"/>
                 <a:ea typeface="Consolas" pitchFamily="34" charset="-122"/>
                 <a:cs typeface="Consolas" pitchFamily="34" charset="-120"/>
               </a:rPr>
+              <a:t>    engineer to resolve. Do NOT use for questions you can answer</a:t>
+            </a:r>
+            <a:endParaRPr lang="en-US" sz="1300" dirty="0"/>
+          </a:p>
+          <a:p>
+            <a:pPr indent="0" marL="0">
+              <a:buNone/>
+            </a:pPr>
+            <a:r>
+              <a:rPr lang="en-US" sz="1300" dirty="0">
+                <a:solidFill>
+                  <a:srgbClr val="E4C98A"/>
+                </a:solidFill>
+                <a:latin typeface="Consolas" pitchFamily="34" charset="0"/>
+                <a:ea typeface="Consolas" pitchFamily="34" charset="-122"/>
+                <a:cs typeface="Consolas" pitchFamily="34" charset="-120"/>
+              </a:rPr>
+              <a:t>    from documentation. Priority must be one of low, med, high.</a:t>
+            </a:r>
+            <a:endParaRPr lang="en-US" sz="1300" dirty="0"/>
+          </a:p>
+          <a:p>
+            <a:pPr indent="0" marL="0">
+              <a:buNone/>
+            </a:pPr>
+            <a:r>
+              <a:rPr lang="en-US" sz="1300" dirty="0">
+                <a:solidFill>
+                  <a:srgbClr val="E4C98A"/>
+                </a:solidFill>
+                <a:latin typeface="Consolas" pitchFamily="34" charset="0"/>
+                <a:ea typeface="Consolas" pitchFamily="34" charset="-122"/>
+                <a:cs typeface="Consolas" pitchFamily="34" charset="-120"/>
+              </a:rPr>
               <a:t>    """</a:t>
             </a:r>
             <a:endParaRPr lang="en-US" sz="1300" dirty="0"/>
@@ -4352,7 +4608,7 @@
             <a:r>
               <a:rPr lang="en-US" sz="1300" dirty="0">
                 <a:solidFill>
-                  <a:srgbClr val="212121"/>
+                  <a:srgbClr val="FFFFFF"/>
                 </a:solidFill>
                 <a:latin typeface="Consolas" pitchFamily="34" charset="0"/>
                 <a:ea typeface="Consolas" pitchFamily="34" charset="-122"/>
